--- a/AVRI_Deck.pptx
+++ b/AVRI_Deck.pptx
@@ -9,8 +9,10 @@
     <p:sldId id="257" r:id="rId3"/>
     <p:sldId id="258" r:id="rId4"/>
     <p:sldId id="259" r:id="rId5"/>
+    <p:sldId id="263" r:id="rId14"/>
     <p:sldId id="260" r:id="rId6"/>
     <p:sldId id="261" r:id="rId7"/>
+    <p:sldId id="262" r:id="rId13"/>
   </p:sldIdLst>
   <p:notesMasterIdLst>
     <p:notesMasterId r:id="rId8"/>
@@ -1461,6 +1463,10 @@
             <a:prstDash val="solid"/>
           </a:ln>
         </p:spPr>
+        <p:txBody>
+          <a:bodyPr/>
+          <a:p/>
+        </p:txBody>
       </p:sp>
       <p:sp>
         <p:nvSpPr>
@@ -1523,6 +1529,10 @@
             <a:prstDash val="solid"/>
           </a:ln>
         </p:spPr>
+        <p:txBody>
+          <a:bodyPr/>
+          <a:p/>
+        </p:txBody>
       </p:sp>
       <p:sp>
         <p:nvSpPr>
@@ -1686,6 +1696,10 @@
             <a:prstDash val="solid"/>
           </a:ln>
         </p:spPr>
+        <p:txBody>
+          <a:bodyPr/>
+          <a:p/>
+        </p:txBody>
       </p:sp>
       <p:sp>
         <p:nvSpPr>
@@ -1828,6 +1842,10 @@
             <a:prstDash val="solid"/>
           </a:ln>
         </p:spPr>
+        <p:txBody>
+          <a:bodyPr/>
+          <a:p/>
+        </p:txBody>
       </p:sp>
       <p:sp>
         <p:nvSpPr>
@@ -1853,6 +1871,10 @@
             <a:prstDash val="solid"/>
           </a:ln>
         </p:spPr>
+        <p:txBody>
+          <a:bodyPr/>
+          <a:p/>
+        </p:txBody>
       </p:sp>
       <p:sp>
         <p:nvSpPr>
@@ -2089,6 +2111,10 @@
             <a:prstDash val="solid"/>
           </a:ln>
         </p:spPr>
+        <p:txBody>
+          <a:bodyPr/>
+          <a:p/>
+        </p:txBody>
       </p:sp>
       <p:sp>
         <p:nvSpPr>
@@ -2153,6 +2179,10 @@
             <a:prstDash val="solid"/>
           </a:ln>
         </p:spPr>
+        <p:txBody>
+          <a:bodyPr/>
+          <a:p/>
+        </p:txBody>
       </p:sp>
       <p:sp>
         <p:nvSpPr>
@@ -2178,6 +2208,10 @@
             <a:prstDash val="solid"/>
           </a:ln>
         </p:spPr>
+        <p:txBody>
+          <a:bodyPr/>
+          <a:p/>
+        </p:txBody>
       </p:sp>
       <p:sp>
         <p:nvSpPr>
@@ -2242,6 +2276,10 @@
             <a:prstDash val="solid"/>
           </a:ln>
         </p:spPr>
+        <p:txBody>
+          <a:bodyPr/>
+          <a:p/>
+        </p:txBody>
       </p:sp>
       <p:sp>
         <p:nvSpPr>
@@ -2267,6 +2305,10 @@
             <a:prstDash val="solid"/>
           </a:ln>
         </p:spPr>
+        <p:txBody>
+          <a:bodyPr/>
+          <a:p/>
+        </p:txBody>
       </p:sp>
       <p:sp>
         <p:nvSpPr>
@@ -2331,6 +2373,10 @@
             <a:prstDash val="solid"/>
           </a:ln>
         </p:spPr>
+        <p:txBody>
+          <a:bodyPr/>
+          <a:p/>
+        </p:txBody>
       </p:sp>
       <p:sp>
         <p:nvSpPr>
@@ -2356,6 +2402,10 @@
             <a:prstDash val="solid"/>
           </a:ln>
         </p:spPr>
+        <p:txBody>
+          <a:bodyPr/>
+          <a:p/>
+        </p:txBody>
       </p:sp>
       <p:sp>
         <p:nvSpPr>
@@ -2420,6 +2470,10 @@
             <a:prstDash val="solid"/>
           </a:ln>
         </p:spPr>
+        <p:txBody>
+          <a:bodyPr/>
+          <a:p/>
+        </p:txBody>
       </p:sp>
       <p:sp>
         <p:nvSpPr>
@@ -2445,6 +2499,10 @@
             <a:prstDash val="solid"/>
           </a:ln>
         </p:spPr>
+        <p:txBody>
+          <a:bodyPr/>
+          <a:p/>
+        </p:txBody>
       </p:sp>
       <p:sp>
         <p:nvSpPr>
@@ -2509,6 +2567,10 @@
             <a:prstDash val="solid"/>
           </a:ln>
         </p:spPr>
+        <p:txBody>
+          <a:bodyPr/>
+          <a:p/>
+        </p:txBody>
       </p:sp>
       <p:sp>
         <p:nvSpPr>
@@ -2534,6 +2596,10 @@
             <a:prstDash val="solid"/>
           </a:ln>
         </p:spPr>
+        <p:txBody>
+          <a:bodyPr/>
+          <a:p/>
+        </p:txBody>
       </p:sp>
       <p:sp>
         <p:nvSpPr>
@@ -2637,6 +2703,10 @@
             <a:prstDash val="solid"/>
           </a:ln>
         </p:spPr>
+        <p:txBody>
+          <a:bodyPr/>
+          <a:p/>
+        </p:txBody>
       </p:sp>
       <p:sp>
         <p:nvSpPr>
@@ -2794,15 +2864,13 @@
               <a:buNone/>
             </a:pPr>
             <a:r>
-              <a:rPr lang="en-US" sz="900" dirty="0">
-                <a:solidFill>
-                  <a:srgbClr val="64748B"/>
-                </a:solidFill>
-                <a:latin typeface="Calibri" pitchFamily="34" charset="0"/>
-                <a:ea typeface="Calibri" pitchFamily="34" charset="-122"/>
-                <a:cs typeface="Calibri" pitchFamily="34" charset="-120"/>
-              </a:rPr>
-              <a:t>2 / 6</a:t>
+              <a:rPr sz="900" b="0">
+                <a:solidFill>
+                  <a:srgbClr val="94A3B8"/>
+                </a:solidFill>
+                <a:latin typeface="Calibri"/>
+              </a:rPr>
+              <a:t>2 / 8</a:t>
             </a:r>
             <a:endParaRPr lang="en-US" sz="900" dirty="0"/>
           </a:p>
@@ -2864,6 +2932,10 @@
             <a:prstDash val="solid"/>
           </a:ln>
         </p:spPr>
+        <p:txBody>
+          <a:bodyPr/>
+          <a:p/>
+        </p:txBody>
       </p:sp>
       <p:sp>
         <p:nvSpPr>
@@ -6407,351 +6479,6 @@
       </p:sp>
       <p:sp>
         <p:nvSpPr>
-          <p:cNvPr id="8" name="Text 5"/>
-          <p:cNvSpPr/>
-          <p:nvPr/>
-        </p:nvSpPr>
-        <p:spPr>
-          <a:xfrm>
-            <a:off x="7315200" y="2011680"/>
-            <a:ext cx="4389120" cy="365760"/>
-          </a:xfrm>
-          <a:prstGeom prst="rect">
-            <a:avLst/>
-          </a:prstGeom>
-          <a:noFill/>
-          <a:ln/>
-        </p:spPr>
-        <p:txBody>
-          <a:bodyPr wrap="square" lIns="0" tIns="0" rIns="0" bIns="0" rtlCol="0" anchor="ctr"/>
-          <a:lstStyle/>
-          <a:p>
-            <a:pPr indent="0" marL="0">
-              <a:buNone/>
-            </a:pPr>
-            <a:r>
-              <a:rPr lang="en-US" sz="1200" b="1" dirty="0">
-                <a:solidFill>
-                  <a:srgbClr val="0F172A"/>
-                </a:solidFill>
-                <a:latin typeface="Calibri" pitchFamily="34" charset="0"/>
-                <a:ea typeface="Calibri" pitchFamily="34" charset="-122"/>
-                <a:cs typeface="Calibri" pitchFamily="34" charset="-120"/>
-              </a:rPr>
-              <a:t>On 766 in-scope accounts:</a:t>
-            </a:r>
-            <a:endParaRPr lang="en-US" sz="1200" dirty="0"/>
-          </a:p>
-        </p:txBody>
-      </p:sp>
-      <p:sp>
-        <p:nvSpPr>
-          <p:cNvPr id="9" name="Text 6"/>
-          <p:cNvSpPr/>
-          <p:nvPr/>
-        </p:nvSpPr>
-        <p:spPr>
-          <a:xfrm>
-            <a:off x="7315200" y="2560320"/>
-            <a:ext cx="4389120" cy="274320"/>
-          </a:xfrm>
-          <a:prstGeom prst="rect">
-            <a:avLst/>
-          </a:prstGeom>
-          <a:noFill/>
-          <a:ln/>
-        </p:spPr>
-        <p:txBody>
-          <a:bodyPr wrap="square" lIns="0" tIns="0" rIns="0" bIns="0" rtlCol="0" anchor="ctr"/>
-          <a:lstStyle/>
-          <a:p>
-            <a:pPr indent="0" marL="0">
-              <a:buNone/>
-            </a:pPr>
-            <a:r>
-              <a:rPr lang="en-US" sz="1100" b="1" dirty="0">
-                <a:solidFill>
-                  <a:srgbClr val="0F172A"/>
-                </a:solidFill>
-                <a:latin typeface="Calibri" pitchFamily="34" charset="0"/>
-                <a:ea typeface="Calibri" pitchFamily="34" charset="-122"/>
-                <a:cs typeface="Calibri" pitchFamily="34" charset="-120"/>
-              </a:rPr>
-              <a:t>AVRI (ours)</a:t>
-            </a:r>
-            <a:endParaRPr lang="en-US" sz="1100" dirty="0"/>
-          </a:p>
-        </p:txBody>
-      </p:sp>
-      <p:sp>
-        <p:nvSpPr>
-          <p:cNvPr id="10" name="Shape 7"/>
-          <p:cNvSpPr/>
-          <p:nvPr/>
-        </p:nvSpPr>
-        <p:spPr>
-          <a:xfrm>
-            <a:off x="7315200" y="2880360"/>
-            <a:ext cx="3048318" cy="457200"/>
-          </a:xfrm>
-          <a:prstGeom prst="rect">
-            <a:avLst/>
-          </a:prstGeom>
-          <a:solidFill>
-            <a:srgbClr val="059669"/>
-          </a:solidFill>
-          <a:ln w="12700">
-            <a:solidFill>
-              <a:srgbClr val="059669"/>
-            </a:solidFill>
-            <a:prstDash val="solid"/>
-          </a:ln>
-        </p:spPr>
-      </p:sp>
-      <p:sp>
-        <p:nvSpPr>
-          <p:cNvPr id="11" name="Shape 8"/>
-          <p:cNvSpPr/>
-          <p:nvPr/>
-        </p:nvSpPr>
-        <p:spPr>
-          <a:xfrm>
-            <a:off x="10363518" y="2880360"/>
-            <a:ext cx="366715" cy="457200"/>
-          </a:xfrm>
-          <a:prstGeom prst="rect">
-            <a:avLst/>
-          </a:prstGeom>
-          <a:solidFill>
-            <a:srgbClr val="D97706"/>
-          </a:solidFill>
-          <a:ln w="12700">
-            <a:solidFill>
-              <a:srgbClr val="D97706"/>
-            </a:solidFill>
-            <a:prstDash val="solid"/>
-          </a:ln>
-        </p:spPr>
-      </p:sp>
-      <p:sp>
-        <p:nvSpPr>
-          <p:cNvPr id="12" name="Shape 9"/>
-          <p:cNvSpPr/>
-          <p:nvPr/>
-        </p:nvSpPr>
-        <p:spPr>
-          <a:xfrm>
-            <a:off x="10730233" y="2880360"/>
-            <a:ext cx="974087" cy="457200"/>
-          </a:xfrm>
-          <a:prstGeom prst="rect">
-            <a:avLst/>
-          </a:prstGeom>
-          <a:solidFill>
-            <a:srgbClr val="DC2626"/>
-          </a:solidFill>
-          <a:ln w="12700">
-            <a:solidFill>
-              <a:srgbClr val="DC2626"/>
-            </a:solidFill>
-            <a:prstDash val="solid"/>
-          </a:ln>
-        </p:spPr>
-      </p:sp>
-      <p:sp>
-        <p:nvSpPr>
-          <p:cNvPr id="13" name="Text 10"/>
-          <p:cNvSpPr/>
-          <p:nvPr/>
-        </p:nvSpPr>
-        <p:spPr>
-          <a:xfrm>
-            <a:off x="7315200" y="3383280"/>
-            <a:ext cx="4389120" cy="274320"/>
-          </a:xfrm>
-          <a:prstGeom prst="rect">
-            <a:avLst/>
-          </a:prstGeom>
-          <a:noFill/>
-          <a:ln/>
-        </p:spPr>
-        <p:txBody>
-          <a:bodyPr wrap="square" lIns="0" tIns="0" rIns="0" bIns="0" rtlCol="0" anchor="ctr"/>
-          <a:lstStyle/>
-          <a:p>
-            <a:pPr indent="0" marL="0">
-              <a:buNone/>
-            </a:pPr>
-            <a:r>
-              <a:rPr lang="en-US" sz="1000" dirty="0">
-                <a:solidFill>
-                  <a:srgbClr val="64748B"/>
-                </a:solidFill>
-                <a:latin typeface="Calibri" pitchFamily="34" charset="0"/>
-                <a:ea typeface="Calibri" pitchFamily="34" charset="-122"/>
-                <a:cs typeface="Calibri" pitchFamily="34" charset="-120"/>
-              </a:rPr>
-              <a:t>69% / 8% / 22%</a:t>
-            </a:r>
-            <a:endParaRPr lang="en-US" sz="1000" dirty="0"/>
-          </a:p>
-        </p:txBody>
-      </p:sp>
-      <p:sp>
-        <p:nvSpPr>
-          <p:cNvPr id="14" name="Text 11"/>
-          <p:cNvSpPr/>
-          <p:nvPr/>
-        </p:nvSpPr>
-        <p:spPr>
-          <a:xfrm>
-            <a:off x="7315200" y="3840480"/>
-            <a:ext cx="4389120" cy="274320"/>
-          </a:xfrm>
-          <a:prstGeom prst="rect">
-            <a:avLst/>
-          </a:prstGeom>
-          <a:noFill/>
-          <a:ln/>
-        </p:spPr>
-        <p:txBody>
-          <a:bodyPr wrap="square" lIns="0" tIns="0" rIns="0" bIns="0" rtlCol="0" anchor="ctr"/>
-          <a:lstStyle/>
-          <a:p>
-            <a:pPr indent="0" marL="0">
-              <a:buNone/>
-            </a:pPr>
-            <a:r>
-              <a:rPr lang="en-US" sz="1100" b="1" dirty="0">
-                <a:solidFill>
-                  <a:srgbClr val="334155"/>
-                </a:solidFill>
-                <a:latin typeface="Calibri" pitchFamily="34" charset="0"/>
-                <a:ea typeface="Calibri" pitchFamily="34" charset="-122"/>
-                <a:cs typeface="Calibri" pitchFamily="34" charset="-120"/>
-              </a:rPr>
-              <a:t>Naive CHS (industry baseline)</a:t>
-            </a:r>
-            <a:endParaRPr lang="en-US" sz="1100" dirty="0"/>
-          </a:p>
-        </p:txBody>
-      </p:sp>
-      <p:sp>
-        <p:nvSpPr>
-          <p:cNvPr id="15" name="Shape 12"/>
-          <p:cNvSpPr/>
-          <p:nvPr/>
-        </p:nvSpPr>
-        <p:spPr>
-          <a:xfrm>
-            <a:off x="7315200" y="4160520"/>
-            <a:ext cx="2584195" cy="457200"/>
-          </a:xfrm>
-          <a:prstGeom prst="rect">
-            <a:avLst/>
-          </a:prstGeom>
-          <a:solidFill>
-            <a:srgbClr val="059669"/>
-          </a:solidFill>
-          <a:ln w="12700">
-            <a:solidFill>
-              <a:srgbClr val="059669"/>
-            </a:solidFill>
-            <a:prstDash val="solid"/>
-          </a:ln>
-        </p:spPr>
-      </p:sp>
-      <p:sp>
-        <p:nvSpPr>
-          <p:cNvPr id="16" name="Shape 13"/>
-          <p:cNvSpPr/>
-          <p:nvPr/>
-        </p:nvSpPr>
-        <p:spPr>
-          <a:xfrm>
-            <a:off x="9899395" y="4160520"/>
-            <a:ext cx="956897" cy="457200"/>
-          </a:xfrm>
-          <a:prstGeom prst="rect">
-            <a:avLst/>
-          </a:prstGeom>
-          <a:solidFill>
-            <a:srgbClr val="D97706"/>
-          </a:solidFill>
-          <a:ln w="12700">
-            <a:solidFill>
-              <a:srgbClr val="D97706"/>
-            </a:solidFill>
-            <a:prstDash val="solid"/>
-          </a:ln>
-        </p:spPr>
-      </p:sp>
-      <p:sp>
-        <p:nvSpPr>
-          <p:cNvPr id="17" name="Shape 14"/>
-          <p:cNvSpPr/>
-          <p:nvPr/>
-        </p:nvSpPr>
-        <p:spPr>
-          <a:xfrm>
-            <a:off x="10856292" y="4160520"/>
-            <a:ext cx="848028" cy="457200"/>
-          </a:xfrm>
-          <a:prstGeom prst="rect">
-            <a:avLst/>
-          </a:prstGeom>
-          <a:solidFill>
-            <a:srgbClr val="DC2626"/>
-          </a:solidFill>
-          <a:ln w="12700">
-            <a:solidFill>
-              <a:srgbClr val="DC2626"/>
-            </a:solidFill>
-            <a:prstDash val="solid"/>
-          </a:ln>
-        </p:spPr>
-      </p:sp>
-      <p:sp>
-        <p:nvSpPr>
-          <p:cNvPr id="18" name="Text 15"/>
-          <p:cNvSpPr/>
-          <p:nvPr/>
-        </p:nvSpPr>
-        <p:spPr>
-          <a:xfrm>
-            <a:off x="7315200" y="4663440"/>
-            <a:ext cx="4389120" cy="274320"/>
-          </a:xfrm>
-          <a:prstGeom prst="rect">
-            <a:avLst/>
-          </a:prstGeom>
-          <a:noFill/>
-          <a:ln/>
-        </p:spPr>
-        <p:txBody>
-          <a:bodyPr wrap="square" lIns="0" tIns="0" rIns="0" bIns="0" rtlCol="0" anchor="ctr"/>
-          <a:lstStyle/>
-          <a:p>
-            <a:pPr indent="0" marL="0">
-              <a:buNone/>
-            </a:pPr>
-            <a:r>
-              <a:rPr lang="en-US" sz="1000" dirty="0">
-                <a:solidFill>
-                  <a:srgbClr val="64748B"/>
-                </a:solidFill>
-                <a:latin typeface="Calibri" pitchFamily="34" charset="0"/>
-                <a:ea typeface="Calibri" pitchFamily="34" charset="-122"/>
-                <a:cs typeface="Calibri" pitchFamily="34" charset="-120"/>
-              </a:rPr>
-              <a:t>59% / 22% / 19%</a:t>
-            </a:r>
-            <a:endParaRPr lang="en-US" sz="1000" dirty="0"/>
-          </a:p>
-        </p:txBody>
-      </p:sp>
-      <p:sp>
-        <p:nvSpPr>
           <p:cNvPr id="19" name="Shape 16"/>
           <p:cNvSpPr/>
           <p:nvPr/>
@@ -6774,6 +6501,10 @@
             <a:prstDash val="solid"/>
           </a:ln>
         </p:spPr>
+        <p:txBody>
+          <a:bodyPr/>
+          <a:p/>
+        </p:txBody>
       </p:sp>
       <p:sp>
         <p:nvSpPr>
@@ -6796,166 +6527,132 @@
           <a:bodyPr wrap="square" lIns="0" tIns="0" rIns="0" bIns="0" rtlCol="0" anchor="ctr"/>
           <a:lstStyle/>
           <a:p>
+            <a:pPr indent="0" marL="0" algn="l">
+              <a:buNone/>
+            </a:pPr>
             <a:pPr indent="0" marL="0">
               <a:buNone/>
             </a:pPr>
-            <a:r>
-              <a:rPr lang="en-US" sz="1200" dirty="0">
+            <a:pPr indent="0" marL="0">
+              <a:buNone/>
+            </a:pPr>
+            <a:pPr indent="0" marL="0">
+              <a:buNone/>
+            </a:pPr>
+            <a:pPr indent="0" marL="0">
+              <a:buNone/>
+            </a:pPr>
+            <a:r>
+              <a:rPr sz="850" b="0">
                 <a:solidFill>
                   <a:srgbClr val="78350F"/>
+                </a:solidFill>
+                <a:latin typeface="Calibri"/>
+              </a:rPr>
+              <a:t>Diagonal (agree): 601 accts.  Off-diag (disagree): 129 accts.  Plus 36 onboarding (v1.3 grace, deferred).</a:t>
+            </a:r>
+            <a:endParaRPr lang="en-US" sz="1200" dirty="0"/>
+          </a:p>
+          <a:p>
+            <a:pPr algn="l"/>
+            <a:r>
+              <a:rPr sz="1000" b="1">
+                <a:solidFill>
+                  <a:srgbClr val="78350F"/>
+                </a:solidFill>
+                <a:latin typeface="Calibri"/>
+              </a:rPr>
+              <a:t>AVRI surfaces 22% Red vs CHS's 19%, AND $22M ARR sits where AVRI flags risk that naive CHS misses.</a:t>
+            </a:r>
+          </a:p>
+        </p:txBody>
+      </p:sp>
+      <p:sp>
+        <p:nvSpPr>
+          <p:cNvPr id="21" name="Text 18"/>
+          <p:cNvSpPr/>
+          <p:nvPr/>
+        </p:nvSpPr>
+        <p:spPr>
+          <a:xfrm>
+            <a:off x="457200" y="4983480"/>
+            <a:ext cx="6400800" cy="594360"/>
+          </a:xfrm>
+          <a:prstGeom prst="rect">
+            <a:avLst/>
+          </a:prstGeom>
+          <a:noFill/>
+          <a:ln/>
+        </p:spPr>
+        <p:txBody>
+          <a:bodyPr wrap="square" lIns="0" tIns="0" rIns="0" bIns="0" rtlCol="0" anchor="ctr"/>
+          <a:lstStyle/>
+          <a:p>
+            <a:pPr indent="0" marL="0">
+              <a:buNone/>
+            </a:pPr>
+            <a:r>
+              <a:rPr lang="en-US" sz="1000" b="1" dirty="0">
+                <a:solidFill>
+                  <a:srgbClr val="0F172A"/>
                 </a:solidFill>
                 <a:latin typeface="Calibri" pitchFamily="34" charset="0"/>
                 <a:ea typeface="Calibri" pitchFamily="34" charset="-122"/>
                 <a:cs typeface="Calibri" pitchFamily="34" charset="-120"/>
               </a:rPr>
-              <a:t>AVRI surfaces </a:t>
+              <a:t>Build vs Buy: </a:t>
             </a:r>
             <a:pPr indent="0" marL="0">
               <a:buNone/>
             </a:pPr>
             <a:r>
-              <a:rPr lang="en-US" sz="1200" b="1" dirty="0">
-                <a:solidFill>
-                  <a:srgbClr val="0F172A"/>
+              <a:rPr lang="en-US" sz="1000" i="1" dirty="0">
+                <a:solidFill>
+                  <a:srgbClr val="334155"/>
                 </a:solidFill>
                 <a:latin typeface="Calibri" pitchFamily="34" charset="0"/>
                 <a:ea typeface="Calibri" pitchFamily="34" charset="-122"/>
                 <a:cs typeface="Calibri" pitchFamily="34" charset="-120"/>
               </a:rPr>
-              <a:t>more risk</a:t>
-            </a:r>
+              <a:t>Gainsight CHS is the closest commercial alternative, same composite pattern, but doesn't natively handle commit-vs-consume, trajectory, or the 5 brief-specified edge cases. AVRI is that pattern, specialized for PANW's consumption-hybrid model.</a:t>
+            </a:r>
+            <a:endParaRPr lang="en-US" sz="1000" dirty="0"/>
+          </a:p>
+        </p:txBody>
+      </p:sp>
+      <p:sp>
+        <p:nvSpPr>
+          <p:cNvPr id="22" name="Text 19"/>
+          <p:cNvSpPr/>
+          <p:nvPr/>
+        </p:nvSpPr>
+        <p:spPr>
+          <a:xfrm>
+            <a:off x="365760" y="6492240"/>
+            <a:ext cx="5486400" cy="274320"/>
+          </a:xfrm>
+          <a:prstGeom prst="rect">
+            <a:avLst/>
+          </a:prstGeom>
+          <a:noFill/>
+          <a:ln/>
+        </p:spPr>
+        <p:txBody>
+          <a:bodyPr wrap="square" rtlCol="0" anchor="ctr"/>
+          <a:lstStyle/>
+          <a:p>
             <a:pPr indent="0" marL="0">
               <a:buNone/>
             </a:pPr>
             <a:r>
-              <a:rPr lang="en-US" sz="1200" dirty="0">
-                <a:solidFill>
-                  <a:srgbClr val="78350F"/>
+              <a:rPr lang="en-US" sz="900" dirty="0">
+                <a:solidFill>
+                  <a:srgbClr val="64748B"/>
                 </a:solidFill>
                 <a:latin typeface="Calibri" pitchFamily="34" charset="0"/>
                 <a:ea typeface="Calibri" pitchFamily="34" charset="-122"/>
                 <a:cs typeface="Calibri" pitchFamily="34" charset="-120"/>
               </a:rPr>
-              <a:t> than naive CHS, and is </a:t>
-            </a:r>
-            <a:pPr indent="0" marL="0">
-              <a:buNone/>
-            </a:pPr>
-            <a:r>
-              <a:rPr lang="en-US" sz="1200" b="1" dirty="0">
-                <a:solidFill>
-                  <a:srgbClr val="0F172A"/>
-                </a:solidFill>
-                <a:latin typeface="Calibri" pitchFamily="34" charset="0"/>
-                <a:ea typeface="Calibri" pitchFamily="34" charset="-122"/>
-                <a:cs typeface="Calibri" pitchFamily="34" charset="-120"/>
-              </a:rPr>
-              <a:t>more lenient on the right things</a:t>
-            </a:r>
-            <a:pPr indent="0" marL="0">
-              <a:buNone/>
-            </a:pPr>
-            <a:r>
-              <a:rPr lang="en-US" sz="1200" dirty="0">
-                <a:solidFill>
-                  <a:srgbClr val="78350F"/>
-                </a:solidFill>
-                <a:latin typeface="Calibri" pitchFamily="34" charset="0"/>
-                <a:ea typeface="Calibri" pitchFamily="34" charset="-122"/>
-                <a:cs typeface="Calibri" pitchFamily="34" charset="-120"/>
-              </a:rPr>
-              <a:t> (overage = upsell, not failure).</a:t>
-            </a:r>
-            <a:endParaRPr lang="en-US" sz="1200" dirty="0"/>
-          </a:p>
-        </p:txBody>
-      </p:sp>
-      <p:sp>
-        <p:nvSpPr>
-          <p:cNvPr id="21" name="Text 18"/>
-          <p:cNvSpPr/>
-          <p:nvPr/>
-        </p:nvSpPr>
-        <p:spPr>
-          <a:xfrm>
-            <a:off x="457200" y="4983480"/>
-            <a:ext cx="6400800" cy="594360"/>
-          </a:xfrm>
-          <a:prstGeom prst="rect">
-            <a:avLst/>
-          </a:prstGeom>
-          <a:noFill/>
-          <a:ln/>
-        </p:spPr>
-        <p:txBody>
-          <a:bodyPr wrap="square" lIns="0" tIns="0" rIns="0" bIns="0" rtlCol="0" anchor="ctr"/>
-          <a:lstStyle/>
-          <a:p>
-            <a:pPr indent="0" marL="0">
-              <a:buNone/>
-            </a:pPr>
-            <a:r>
-              <a:rPr lang="en-US" sz="1000" b="1" dirty="0">
-                <a:solidFill>
-                  <a:srgbClr val="0F172A"/>
-                </a:solidFill>
-                <a:latin typeface="Calibri" pitchFamily="34" charset="0"/>
-                <a:ea typeface="Calibri" pitchFamily="34" charset="-122"/>
-                <a:cs typeface="Calibri" pitchFamily="34" charset="-120"/>
-              </a:rPr>
-              <a:t>Build vs Buy: </a:t>
-            </a:r>
-            <a:pPr indent="0" marL="0">
-              <a:buNone/>
-            </a:pPr>
-            <a:r>
-              <a:rPr lang="en-US" sz="1000" i="1" dirty="0">
-                <a:solidFill>
-                  <a:srgbClr val="334155"/>
-                </a:solidFill>
-                <a:latin typeface="Calibri" pitchFamily="34" charset="0"/>
-                <a:ea typeface="Calibri" pitchFamily="34" charset="-122"/>
-                <a:cs typeface="Calibri" pitchFamily="34" charset="-120"/>
-              </a:rPr>
-              <a:t>Gainsight CHS is the closest commercial alternative, same composite pattern, but doesn't natively handle commit-vs-consume, trajectory, or the 5 brief-specified edge cases. AVRI is that pattern, specialized for PANW's consumption-hybrid model.</a:t>
-            </a:r>
-            <a:endParaRPr lang="en-US" sz="1000" dirty="0"/>
-          </a:p>
-        </p:txBody>
-      </p:sp>
-      <p:sp>
-        <p:nvSpPr>
-          <p:cNvPr id="22" name="Text 19"/>
-          <p:cNvSpPr/>
-          <p:nvPr/>
-        </p:nvSpPr>
-        <p:spPr>
-          <a:xfrm>
-            <a:off x="365760" y="6492240"/>
-            <a:ext cx="5486400" cy="274320"/>
-          </a:xfrm>
-          <a:prstGeom prst="rect">
-            <a:avLst/>
-          </a:prstGeom>
-          <a:noFill/>
-          <a:ln/>
-        </p:spPr>
-        <p:txBody>
-          <a:bodyPr wrap="square" rtlCol="0" anchor="ctr"/>
-          <a:lstStyle/>
-          <a:p>
-            <a:pPr indent="0" marL="0">
-              <a:buNone/>
-            </a:pPr>
-            <a:r>
-              <a:rPr lang="en-US" sz="900" dirty="0">
-                <a:solidFill>
-                  <a:srgbClr val="64748B"/>
-                </a:solidFill>
-                <a:latin typeface="Calibri" pitchFamily="34" charset="0"/>
-                <a:ea typeface="Calibri" pitchFamily="34" charset="-122"/>
-                <a:cs typeface="Calibri" pitchFamily="34" charset="-120"/>
-              </a:rPr>
               <a:t>GCS North Star · AVRI Proposal · Rami Ibrahimi</a:t>
             </a:r>
             <a:endParaRPr lang="en-US" sz="900" dirty="0"/>
@@ -6987,17 +6684,1403 @@
               <a:buNone/>
             </a:pPr>
             <a:r>
-              <a:rPr lang="en-US" sz="900" dirty="0">
-                <a:solidFill>
-                  <a:srgbClr val="64748B"/>
-                </a:solidFill>
-                <a:latin typeface="Calibri" pitchFamily="34" charset="0"/>
-                <a:ea typeface="Calibri" pitchFamily="34" charset="-122"/>
-                <a:cs typeface="Calibri" pitchFamily="34" charset="-120"/>
-              </a:rPr>
-              <a:t>3 / 6</a:t>
+              <a:rPr sz="900" b="0">
+                <a:solidFill>
+                  <a:srgbClr val="94A3B8"/>
+                </a:solidFill>
+                <a:latin typeface="Calibri"/>
+              </a:rPr>
+              <a:t>3 / 8</a:t>
             </a:r>
             <a:endParaRPr lang="en-US" sz="900" dirty="0"/>
+          </a:p>
+        </p:txBody>
+      </p:sp>
+      <p:sp>
+        <p:nvSpPr>
+          <p:cNvPr id="24" name="TextBox 23"/>
+          <p:cNvSpPr txBox="1"/>
+          <p:nvPr/>
+        </p:nvSpPr>
+        <p:spPr>
+          <a:xfrm>
+            <a:off x="7315200" y="1965960"/>
+            <a:ext cx="4389120" cy="292608"/>
+          </a:xfrm>
+          <a:prstGeom prst="rect">
+            <a:avLst/>
+          </a:prstGeom>
+          <a:noFill/>
+        </p:spPr>
+        <p:txBody>
+          <a:bodyPr wrap="square" lIns="45720" rIns="45720" tIns="18288" bIns="18288" anchor="b">
+            <a:spAutoFit/>
+          </a:bodyPr>
+          <a:lstStyle/>
+          <a:p>
+            <a:pPr algn="l"/>
+            <a:r>
+              <a:rPr sz="1200" b="1">
+                <a:solidFill>
+                  <a:srgbClr val="0F172A"/>
+                </a:solidFill>
+                <a:latin typeface="Calibri"/>
+              </a:rPr>
+              <a:t>AVRI × naive CHS, 730 in-scope accts</a:t>
+            </a:r>
+          </a:p>
+        </p:txBody>
+      </p:sp>
+      <p:sp>
+        <p:nvSpPr>
+          <p:cNvPr id="25" name="Rounded Rectangle 24"/>
+          <p:cNvSpPr/>
+          <p:nvPr/>
+        </p:nvSpPr>
+        <p:spPr>
+          <a:xfrm>
+            <a:off x="8129015" y="2286000"/>
+            <a:ext cx="1130808" cy="292608"/>
+          </a:xfrm>
+          <a:prstGeom prst="roundRect">
+            <a:avLst>
+              <a:gd name="adj" fmla="val 25000"/>
+            </a:avLst>
+          </a:prstGeom>
+          <a:solidFill>
+            <a:srgbClr val="059669"/>
+          </a:solidFill>
+          <a:ln>
+            <a:noFill/>
+          </a:ln>
+          <a:effectLst/>
+        </p:spPr>
+        <p:style>
+          <a:lnRef idx="1">
+            <a:schemeClr val="accent1"/>
+          </a:lnRef>
+          <a:fillRef idx="3">
+            <a:schemeClr val="accent1"/>
+          </a:fillRef>
+          <a:effectRef idx="2">
+            <a:schemeClr val="accent1"/>
+          </a:effectRef>
+          <a:fontRef idx="minor">
+            <a:schemeClr val="lt1"/>
+          </a:fontRef>
+        </p:style>
+        <p:txBody>
+          <a:bodyPr rtlCol="0" anchor="ctr"/>
+          <a:lstStyle/>
+          <a:p>
+            <a:pPr algn="ctr"/>
+          </a:p>
+        </p:txBody>
+      </p:sp>
+      <p:sp>
+        <p:nvSpPr>
+          <p:cNvPr id="26" name="TextBox 25"/>
+          <p:cNvSpPr txBox="1"/>
+          <p:nvPr/>
+        </p:nvSpPr>
+        <p:spPr>
+          <a:xfrm>
+            <a:off x="8129015" y="2286000"/>
+            <a:ext cx="1130808" cy="292608"/>
+          </a:xfrm>
+          <a:prstGeom prst="rect">
+            <a:avLst/>
+          </a:prstGeom>
+          <a:noFill/>
+        </p:spPr>
+        <p:txBody>
+          <a:bodyPr wrap="square" lIns="0" rIns="0" tIns="18288" bIns="18288" anchor="ctr">
+            <a:spAutoFit/>
+          </a:bodyPr>
+          <a:lstStyle/>
+          <a:p>
+            <a:pPr algn="ctr"/>
+            <a:r>
+              <a:rPr sz="800" b="1">
+                <a:solidFill>
+                  <a:srgbClr val="FFFFFF"/>
+                </a:solidFill>
+                <a:latin typeface="Calibri"/>
+              </a:rPr>
+              <a:t>CHS GREEN</a:t>
+            </a:r>
+          </a:p>
+        </p:txBody>
+      </p:sp>
+      <p:sp>
+        <p:nvSpPr>
+          <p:cNvPr id="27" name="Rounded Rectangle 26"/>
+          <p:cNvSpPr/>
+          <p:nvPr/>
+        </p:nvSpPr>
+        <p:spPr>
+          <a:xfrm>
+            <a:off x="9332975" y="2286000"/>
+            <a:ext cx="1130808" cy="292608"/>
+          </a:xfrm>
+          <a:prstGeom prst="roundRect">
+            <a:avLst>
+              <a:gd name="adj" fmla="val 25000"/>
+            </a:avLst>
+          </a:prstGeom>
+          <a:solidFill>
+            <a:srgbClr val="D97706"/>
+          </a:solidFill>
+          <a:ln>
+            <a:noFill/>
+          </a:ln>
+          <a:effectLst/>
+        </p:spPr>
+        <p:style>
+          <a:lnRef idx="1">
+            <a:schemeClr val="accent1"/>
+          </a:lnRef>
+          <a:fillRef idx="3">
+            <a:schemeClr val="accent1"/>
+          </a:fillRef>
+          <a:effectRef idx="2">
+            <a:schemeClr val="accent1"/>
+          </a:effectRef>
+          <a:fontRef idx="minor">
+            <a:schemeClr val="lt1"/>
+          </a:fontRef>
+        </p:style>
+        <p:txBody>
+          <a:bodyPr rtlCol="0" anchor="ctr"/>
+          <a:lstStyle/>
+          <a:p>
+            <a:pPr algn="ctr"/>
+          </a:p>
+        </p:txBody>
+      </p:sp>
+      <p:sp>
+        <p:nvSpPr>
+          <p:cNvPr id="28" name="TextBox 27"/>
+          <p:cNvSpPr txBox="1"/>
+          <p:nvPr/>
+        </p:nvSpPr>
+        <p:spPr>
+          <a:xfrm>
+            <a:off x="9332975" y="2286000"/>
+            <a:ext cx="1130808" cy="292608"/>
+          </a:xfrm>
+          <a:prstGeom prst="rect">
+            <a:avLst/>
+          </a:prstGeom>
+          <a:noFill/>
+        </p:spPr>
+        <p:txBody>
+          <a:bodyPr wrap="square" lIns="0" rIns="0" tIns="18288" bIns="18288" anchor="ctr">
+            <a:spAutoFit/>
+          </a:bodyPr>
+          <a:lstStyle/>
+          <a:p>
+            <a:pPr algn="ctr"/>
+            <a:r>
+              <a:rPr sz="800" b="1">
+                <a:solidFill>
+                  <a:srgbClr val="FFFFFF"/>
+                </a:solidFill>
+                <a:latin typeface="Calibri"/>
+              </a:rPr>
+              <a:t>CHS YELLOW</a:t>
+            </a:r>
+          </a:p>
+        </p:txBody>
+      </p:sp>
+      <p:sp>
+        <p:nvSpPr>
+          <p:cNvPr id="29" name="Rounded Rectangle 28"/>
+          <p:cNvSpPr/>
+          <p:nvPr/>
+        </p:nvSpPr>
+        <p:spPr>
+          <a:xfrm>
+            <a:off x="10536935" y="2286000"/>
+            <a:ext cx="1130808" cy="292608"/>
+          </a:xfrm>
+          <a:prstGeom prst="roundRect">
+            <a:avLst>
+              <a:gd name="adj" fmla="val 25000"/>
+            </a:avLst>
+          </a:prstGeom>
+          <a:solidFill>
+            <a:srgbClr val="DC2626"/>
+          </a:solidFill>
+          <a:ln>
+            <a:noFill/>
+          </a:ln>
+          <a:effectLst/>
+        </p:spPr>
+        <p:style>
+          <a:lnRef idx="1">
+            <a:schemeClr val="accent1"/>
+          </a:lnRef>
+          <a:fillRef idx="3">
+            <a:schemeClr val="accent1"/>
+          </a:fillRef>
+          <a:effectRef idx="2">
+            <a:schemeClr val="accent1"/>
+          </a:effectRef>
+          <a:fontRef idx="minor">
+            <a:schemeClr val="lt1"/>
+          </a:fontRef>
+        </p:style>
+        <p:txBody>
+          <a:bodyPr rtlCol="0" anchor="ctr"/>
+          <a:lstStyle/>
+          <a:p>
+            <a:pPr algn="ctr"/>
+          </a:p>
+        </p:txBody>
+      </p:sp>
+      <p:sp>
+        <p:nvSpPr>
+          <p:cNvPr id="30" name="TextBox 29"/>
+          <p:cNvSpPr txBox="1"/>
+          <p:nvPr/>
+        </p:nvSpPr>
+        <p:spPr>
+          <a:xfrm>
+            <a:off x="10536935" y="2286000"/>
+            <a:ext cx="1130808" cy="292608"/>
+          </a:xfrm>
+          <a:prstGeom prst="rect">
+            <a:avLst/>
+          </a:prstGeom>
+          <a:noFill/>
+        </p:spPr>
+        <p:txBody>
+          <a:bodyPr wrap="square" lIns="0" rIns="0" tIns="18288" bIns="18288" anchor="ctr">
+            <a:spAutoFit/>
+          </a:bodyPr>
+          <a:lstStyle/>
+          <a:p>
+            <a:pPr algn="ctr"/>
+            <a:r>
+              <a:rPr sz="800" b="1">
+                <a:solidFill>
+                  <a:srgbClr val="FFFFFF"/>
+                </a:solidFill>
+                <a:latin typeface="Calibri"/>
+              </a:rPr>
+              <a:t>CHS RED</a:t>
+            </a:r>
+          </a:p>
+        </p:txBody>
+      </p:sp>
+      <p:sp>
+        <p:nvSpPr>
+          <p:cNvPr id="31" name="Rounded Rectangle 30"/>
+          <p:cNvSpPr/>
+          <p:nvPr/>
+        </p:nvSpPr>
+        <p:spPr>
+          <a:xfrm>
+            <a:off x="7315200" y="2651760"/>
+            <a:ext cx="722376" cy="746760"/>
+          </a:xfrm>
+          <a:prstGeom prst="roundRect">
+            <a:avLst>
+              <a:gd name="adj" fmla="val 25000"/>
+            </a:avLst>
+          </a:prstGeom>
+          <a:solidFill>
+            <a:srgbClr val="059669"/>
+          </a:solidFill>
+          <a:ln>
+            <a:noFill/>
+          </a:ln>
+          <a:effectLst/>
+        </p:spPr>
+        <p:style>
+          <a:lnRef idx="1">
+            <a:schemeClr val="accent1"/>
+          </a:lnRef>
+          <a:fillRef idx="3">
+            <a:schemeClr val="accent1"/>
+          </a:fillRef>
+          <a:effectRef idx="2">
+            <a:schemeClr val="accent1"/>
+          </a:effectRef>
+          <a:fontRef idx="minor">
+            <a:schemeClr val="lt1"/>
+          </a:fontRef>
+        </p:style>
+        <p:txBody>
+          <a:bodyPr rtlCol="0" anchor="ctr"/>
+          <a:lstStyle/>
+          <a:p>
+            <a:pPr algn="ctr"/>
+          </a:p>
+        </p:txBody>
+      </p:sp>
+      <p:sp>
+        <p:nvSpPr>
+          <p:cNvPr id="32" name="TextBox 31"/>
+          <p:cNvSpPr txBox="1"/>
+          <p:nvPr/>
+        </p:nvSpPr>
+        <p:spPr>
+          <a:xfrm>
+            <a:off x="7315200" y="2651760"/>
+            <a:ext cx="722376" cy="746760"/>
+          </a:xfrm>
+          <a:prstGeom prst="rect">
+            <a:avLst/>
+          </a:prstGeom>
+          <a:noFill/>
+        </p:spPr>
+        <p:txBody>
+          <a:bodyPr wrap="square" lIns="0" rIns="0" tIns="18288" bIns="18288" anchor="ctr">
+            <a:spAutoFit/>
+          </a:bodyPr>
+          <a:lstStyle/>
+          <a:p>
+            <a:pPr algn="ctr"/>
+            <a:r>
+              <a:rPr sz="700" b="1">
+                <a:solidFill>
+                  <a:srgbClr val="FFFFFF"/>
+                </a:solidFill>
+                <a:latin typeface="Calibri"/>
+              </a:rPr>
+              <a:t>AVRI</a:t>
+            </a:r>
+          </a:p>
+          <a:p>
+            <a:pPr algn="ctr"/>
+            <a:r>
+              <a:rPr sz="900" b="1">
+                <a:solidFill>
+                  <a:srgbClr val="FFFFFF"/>
+                </a:solidFill>
+                <a:latin typeface="Calibri"/>
+              </a:rPr>
+              <a:t>GREEN</a:t>
+            </a:r>
+          </a:p>
+        </p:txBody>
+      </p:sp>
+      <p:sp>
+        <p:nvSpPr>
+          <p:cNvPr id="33" name="Rounded Rectangle 32"/>
+          <p:cNvSpPr/>
+          <p:nvPr/>
+        </p:nvSpPr>
+        <p:spPr>
+          <a:xfrm>
+            <a:off x="8129015" y="2651760"/>
+            <a:ext cx="1130808" cy="746760"/>
+          </a:xfrm>
+          <a:prstGeom prst="roundRect">
+            <a:avLst>
+              <a:gd name="adj" fmla="val 18000"/>
+            </a:avLst>
+          </a:prstGeom>
+          <a:solidFill>
+            <a:srgbClr val="F1F5F9"/>
+          </a:solidFill>
+          <a:ln w="12700">
+            <a:solidFill>
+              <a:srgbClr val="CBD5E1"/>
+            </a:solidFill>
+          </a:ln>
+          <a:effectLst/>
+        </p:spPr>
+        <p:style>
+          <a:lnRef idx="1">
+            <a:schemeClr val="accent1"/>
+          </a:lnRef>
+          <a:fillRef idx="3">
+            <a:schemeClr val="accent1"/>
+          </a:fillRef>
+          <a:effectRef idx="2">
+            <a:schemeClr val="accent1"/>
+          </a:effectRef>
+          <a:fontRef idx="minor">
+            <a:schemeClr val="lt1"/>
+          </a:fontRef>
+        </p:style>
+        <p:txBody>
+          <a:bodyPr rtlCol="0" anchor="ctr"/>
+          <a:lstStyle/>
+          <a:p>
+            <a:pPr algn="ctr"/>
+          </a:p>
+        </p:txBody>
+      </p:sp>
+      <p:sp>
+        <p:nvSpPr>
+          <p:cNvPr id="34" name="TextBox 33"/>
+          <p:cNvSpPr txBox="1"/>
+          <p:nvPr/>
+        </p:nvSpPr>
+        <p:spPr>
+          <a:xfrm>
+            <a:off x="8129015" y="2651760"/>
+            <a:ext cx="1130808" cy="746760"/>
+          </a:xfrm>
+          <a:prstGeom prst="rect">
+            <a:avLst/>
+          </a:prstGeom>
+          <a:noFill/>
+        </p:spPr>
+        <p:txBody>
+          <a:bodyPr wrap="square" lIns="0" rIns="0" tIns="18288" bIns="18288" anchor="ctr">
+            <a:spAutoFit/>
+          </a:bodyPr>
+          <a:lstStyle/>
+          <a:p>
+            <a:pPr algn="ctr"/>
+            <a:r>
+              <a:rPr sz="1800" b="1">
+                <a:solidFill>
+                  <a:srgbClr val="0F172A"/>
+                </a:solidFill>
+                <a:latin typeface="Calibri"/>
+              </a:rPr>
+              <a:t>444</a:t>
+            </a:r>
+          </a:p>
+          <a:p>
+            <a:pPr algn="ctr"/>
+            <a:r>
+              <a:rPr sz="800" b="0">
+                <a:solidFill>
+                  <a:srgbClr val="475569"/>
+                </a:solidFill>
+                <a:latin typeface="Calibri"/>
+              </a:rPr>
+              <a:t>$181.5M ARR</a:t>
+            </a:r>
+          </a:p>
+        </p:txBody>
+      </p:sp>
+      <p:sp>
+        <p:nvSpPr>
+          <p:cNvPr id="35" name="Rounded Rectangle 34"/>
+          <p:cNvSpPr/>
+          <p:nvPr/>
+        </p:nvSpPr>
+        <p:spPr>
+          <a:xfrm>
+            <a:off x="9332975" y="2651760"/>
+            <a:ext cx="1130808" cy="746760"/>
+          </a:xfrm>
+          <a:prstGeom prst="roundRect">
+            <a:avLst>
+              <a:gd name="adj" fmla="val 18000"/>
+            </a:avLst>
+          </a:prstGeom>
+          <a:solidFill>
+            <a:srgbClr val="FED7AA"/>
+          </a:solidFill>
+          <a:ln w="12700">
+            <a:solidFill>
+              <a:srgbClr val="EA580C"/>
+            </a:solidFill>
+          </a:ln>
+          <a:effectLst/>
+        </p:spPr>
+        <p:style>
+          <a:lnRef idx="1">
+            <a:schemeClr val="accent1"/>
+          </a:lnRef>
+          <a:fillRef idx="3">
+            <a:schemeClr val="accent1"/>
+          </a:fillRef>
+          <a:effectRef idx="2">
+            <a:schemeClr val="accent1"/>
+          </a:effectRef>
+          <a:fontRef idx="minor">
+            <a:schemeClr val="lt1"/>
+          </a:fontRef>
+        </p:style>
+        <p:txBody>
+          <a:bodyPr rtlCol="0" anchor="ctr"/>
+          <a:lstStyle/>
+          <a:p>
+            <a:pPr algn="ctr"/>
+          </a:p>
+        </p:txBody>
+      </p:sp>
+      <p:sp>
+        <p:nvSpPr>
+          <p:cNvPr id="36" name="TextBox 35"/>
+          <p:cNvSpPr txBox="1"/>
+          <p:nvPr/>
+        </p:nvSpPr>
+        <p:spPr>
+          <a:xfrm>
+            <a:off x="9332975" y="2651760"/>
+            <a:ext cx="1130808" cy="746760"/>
+          </a:xfrm>
+          <a:prstGeom prst="rect">
+            <a:avLst/>
+          </a:prstGeom>
+          <a:noFill/>
+        </p:spPr>
+        <p:txBody>
+          <a:bodyPr wrap="square" lIns="0" rIns="0" tIns="18288" bIns="18288" anchor="ctr">
+            <a:spAutoFit/>
+          </a:bodyPr>
+          <a:lstStyle/>
+          <a:p>
+            <a:pPr algn="ctr"/>
+            <a:r>
+              <a:rPr sz="1800" b="1">
+                <a:solidFill>
+                  <a:srgbClr val="0F172A"/>
+                </a:solidFill>
+                <a:latin typeface="Calibri"/>
+              </a:rPr>
+              <a:t>89</a:t>
+            </a:r>
+          </a:p>
+          <a:p>
+            <a:pPr algn="ctr"/>
+            <a:r>
+              <a:rPr sz="800" b="0">
+                <a:solidFill>
+                  <a:srgbClr val="475569"/>
+                </a:solidFill>
+                <a:latin typeface="Calibri"/>
+              </a:rPr>
+              <a:t>$33.5M ARR</a:t>
+            </a:r>
+          </a:p>
+        </p:txBody>
+      </p:sp>
+      <p:sp>
+        <p:nvSpPr>
+          <p:cNvPr id="37" name="Rounded Rectangle 36"/>
+          <p:cNvSpPr/>
+          <p:nvPr/>
+        </p:nvSpPr>
+        <p:spPr>
+          <a:xfrm>
+            <a:off x="10536935" y="2651760"/>
+            <a:ext cx="1130808" cy="746760"/>
+          </a:xfrm>
+          <a:prstGeom prst="roundRect">
+            <a:avLst>
+              <a:gd name="adj" fmla="val 18000"/>
+            </a:avLst>
+          </a:prstGeom>
+          <a:solidFill>
+            <a:srgbClr val="F8FAFC"/>
+          </a:solidFill>
+          <a:ln w="12700">
+            <a:solidFill>
+              <a:srgbClr val="E2E8F0"/>
+            </a:solidFill>
+          </a:ln>
+          <a:effectLst/>
+        </p:spPr>
+        <p:style>
+          <a:lnRef idx="1">
+            <a:schemeClr val="accent1"/>
+          </a:lnRef>
+          <a:fillRef idx="3">
+            <a:schemeClr val="accent1"/>
+          </a:fillRef>
+          <a:effectRef idx="2">
+            <a:schemeClr val="accent1"/>
+          </a:effectRef>
+          <a:fontRef idx="minor">
+            <a:schemeClr val="lt1"/>
+          </a:fontRef>
+        </p:style>
+        <p:txBody>
+          <a:bodyPr rtlCol="0" anchor="ctr"/>
+          <a:lstStyle/>
+          <a:p>
+            <a:pPr algn="ctr"/>
+          </a:p>
+        </p:txBody>
+      </p:sp>
+      <p:sp>
+        <p:nvSpPr>
+          <p:cNvPr id="38" name="TextBox 37"/>
+          <p:cNvSpPr txBox="1"/>
+          <p:nvPr/>
+        </p:nvSpPr>
+        <p:spPr>
+          <a:xfrm>
+            <a:off x="10536935" y="2651760"/>
+            <a:ext cx="1130808" cy="746760"/>
+          </a:xfrm>
+          <a:prstGeom prst="rect">
+            <a:avLst/>
+          </a:prstGeom>
+          <a:noFill/>
+        </p:spPr>
+        <p:txBody>
+          <a:bodyPr wrap="square" lIns="0" rIns="0" tIns="18288" bIns="18288" anchor="ctr">
+            <a:spAutoFit/>
+          </a:bodyPr>
+          <a:lstStyle/>
+          <a:p>
+            <a:pPr algn="ctr"/>
+            <a:r>
+              <a:rPr sz="1200" b="0">
+                <a:solidFill>
+                  <a:srgbClr val="94A3B8"/>
+                </a:solidFill>
+                <a:latin typeface="Calibri"/>
+              </a:rPr>
+              <a:t>—</a:t>
+            </a:r>
+          </a:p>
+        </p:txBody>
+      </p:sp>
+      <p:sp>
+        <p:nvSpPr>
+          <p:cNvPr id="39" name="Rounded Rectangle 38"/>
+          <p:cNvSpPr/>
+          <p:nvPr/>
+        </p:nvSpPr>
+        <p:spPr>
+          <a:xfrm>
+            <a:off x="7315200" y="3453383"/>
+            <a:ext cx="722376" cy="746760"/>
+          </a:xfrm>
+          <a:prstGeom prst="roundRect">
+            <a:avLst>
+              <a:gd name="adj" fmla="val 25000"/>
+            </a:avLst>
+          </a:prstGeom>
+          <a:solidFill>
+            <a:srgbClr val="D97706"/>
+          </a:solidFill>
+          <a:ln>
+            <a:noFill/>
+          </a:ln>
+          <a:effectLst/>
+        </p:spPr>
+        <p:style>
+          <a:lnRef idx="1">
+            <a:schemeClr val="accent1"/>
+          </a:lnRef>
+          <a:fillRef idx="3">
+            <a:schemeClr val="accent1"/>
+          </a:fillRef>
+          <a:effectRef idx="2">
+            <a:schemeClr val="accent1"/>
+          </a:effectRef>
+          <a:fontRef idx="minor">
+            <a:schemeClr val="lt1"/>
+          </a:fontRef>
+        </p:style>
+        <p:txBody>
+          <a:bodyPr rtlCol="0" anchor="ctr"/>
+          <a:lstStyle/>
+          <a:p>
+            <a:pPr algn="ctr"/>
+          </a:p>
+        </p:txBody>
+      </p:sp>
+      <p:sp>
+        <p:nvSpPr>
+          <p:cNvPr id="40" name="TextBox 39"/>
+          <p:cNvSpPr txBox="1"/>
+          <p:nvPr/>
+        </p:nvSpPr>
+        <p:spPr>
+          <a:xfrm>
+            <a:off x="7315200" y="3453383"/>
+            <a:ext cx="722376" cy="746760"/>
+          </a:xfrm>
+          <a:prstGeom prst="rect">
+            <a:avLst/>
+          </a:prstGeom>
+          <a:noFill/>
+        </p:spPr>
+        <p:txBody>
+          <a:bodyPr wrap="square" lIns="0" rIns="0" tIns="18288" bIns="18288" anchor="ctr">
+            <a:spAutoFit/>
+          </a:bodyPr>
+          <a:lstStyle/>
+          <a:p>
+            <a:pPr algn="ctr"/>
+            <a:r>
+              <a:rPr sz="700" b="1">
+                <a:solidFill>
+                  <a:srgbClr val="FFFFFF"/>
+                </a:solidFill>
+                <a:latin typeface="Calibri"/>
+              </a:rPr>
+              <a:t>AVRI</a:t>
+            </a:r>
+          </a:p>
+          <a:p>
+            <a:pPr algn="ctr"/>
+            <a:r>
+              <a:rPr sz="900" b="1">
+                <a:solidFill>
+                  <a:srgbClr val="FFFFFF"/>
+                </a:solidFill>
+                <a:latin typeface="Calibri"/>
+              </a:rPr>
+              <a:t>YELLOW</a:t>
+            </a:r>
+          </a:p>
+        </p:txBody>
+      </p:sp>
+      <p:sp>
+        <p:nvSpPr>
+          <p:cNvPr id="41" name="Rounded Rectangle 40"/>
+          <p:cNvSpPr/>
+          <p:nvPr/>
+        </p:nvSpPr>
+        <p:spPr>
+          <a:xfrm>
+            <a:off x="8129015" y="3453383"/>
+            <a:ext cx="1130808" cy="746760"/>
+          </a:xfrm>
+          <a:prstGeom prst="roundRect">
+            <a:avLst>
+              <a:gd name="adj" fmla="val 18000"/>
+            </a:avLst>
+          </a:prstGeom>
+          <a:solidFill>
+            <a:srgbClr val="FED7AA"/>
+          </a:solidFill>
+          <a:ln w="12700">
+            <a:solidFill>
+              <a:srgbClr val="EA580C"/>
+            </a:solidFill>
+          </a:ln>
+          <a:effectLst/>
+        </p:spPr>
+        <p:style>
+          <a:lnRef idx="1">
+            <a:schemeClr val="accent1"/>
+          </a:lnRef>
+          <a:fillRef idx="3">
+            <a:schemeClr val="accent1"/>
+          </a:fillRef>
+          <a:effectRef idx="2">
+            <a:schemeClr val="accent1"/>
+          </a:effectRef>
+          <a:fontRef idx="minor">
+            <a:schemeClr val="lt1"/>
+          </a:fontRef>
+        </p:style>
+        <p:txBody>
+          <a:bodyPr rtlCol="0" anchor="ctr"/>
+          <a:lstStyle/>
+          <a:p>
+            <a:pPr algn="ctr"/>
+          </a:p>
+        </p:txBody>
+      </p:sp>
+      <p:sp>
+        <p:nvSpPr>
+          <p:cNvPr id="42" name="TextBox 41"/>
+          <p:cNvSpPr txBox="1"/>
+          <p:nvPr/>
+        </p:nvSpPr>
+        <p:spPr>
+          <a:xfrm>
+            <a:off x="8129015" y="3453383"/>
+            <a:ext cx="1130808" cy="746760"/>
+          </a:xfrm>
+          <a:prstGeom prst="rect">
+            <a:avLst/>
+          </a:prstGeom>
+          <a:noFill/>
+        </p:spPr>
+        <p:txBody>
+          <a:bodyPr wrap="square" lIns="0" rIns="0" tIns="18288" bIns="18288" anchor="ctr">
+            <a:spAutoFit/>
+          </a:bodyPr>
+          <a:lstStyle/>
+          <a:p>
+            <a:pPr algn="ctr"/>
+            <a:r>
+              <a:rPr sz="1800" b="1">
+                <a:solidFill>
+                  <a:srgbClr val="0F172A"/>
+                </a:solidFill>
+                <a:latin typeface="Calibri"/>
+              </a:rPr>
+              <a:t>7</a:t>
+            </a:r>
+          </a:p>
+          <a:p>
+            <a:pPr algn="ctr"/>
+            <a:r>
+              <a:rPr sz="800" b="0">
+                <a:solidFill>
+                  <a:srgbClr val="475569"/>
+                </a:solidFill>
+                <a:latin typeface="Calibri"/>
+              </a:rPr>
+              <a:t>$400K ARR</a:t>
+            </a:r>
+          </a:p>
+        </p:txBody>
+      </p:sp>
+      <p:sp>
+        <p:nvSpPr>
+          <p:cNvPr id="43" name="Rounded Rectangle 42"/>
+          <p:cNvSpPr/>
+          <p:nvPr/>
+        </p:nvSpPr>
+        <p:spPr>
+          <a:xfrm>
+            <a:off x="9332975" y="3453383"/>
+            <a:ext cx="1130808" cy="746760"/>
+          </a:xfrm>
+          <a:prstGeom prst="roundRect">
+            <a:avLst>
+              <a:gd name="adj" fmla="val 18000"/>
+            </a:avLst>
+          </a:prstGeom>
+          <a:solidFill>
+            <a:srgbClr val="F1F5F9"/>
+          </a:solidFill>
+          <a:ln w="12700">
+            <a:solidFill>
+              <a:srgbClr val="CBD5E1"/>
+            </a:solidFill>
+          </a:ln>
+          <a:effectLst/>
+        </p:spPr>
+        <p:style>
+          <a:lnRef idx="1">
+            <a:schemeClr val="accent1"/>
+          </a:lnRef>
+          <a:fillRef idx="3">
+            <a:schemeClr val="accent1"/>
+          </a:fillRef>
+          <a:effectRef idx="2">
+            <a:schemeClr val="accent1"/>
+          </a:effectRef>
+          <a:fontRef idx="minor">
+            <a:schemeClr val="lt1"/>
+          </a:fontRef>
+        </p:style>
+        <p:txBody>
+          <a:bodyPr rtlCol="0" anchor="ctr"/>
+          <a:lstStyle/>
+          <a:p>
+            <a:pPr algn="ctr"/>
+          </a:p>
+        </p:txBody>
+      </p:sp>
+      <p:sp>
+        <p:nvSpPr>
+          <p:cNvPr id="44" name="TextBox 43"/>
+          <p:cNvSpPr txBox="1"/>
+          <p:nvPr/>
+        </p:nvSpPr>
+        <p:spPr>
+          <a:xfrm>
+            <a:off x="9332975" y="3453383"/>
+            <a:ext cx="1130808" cy="746760"/>
+          </a:xfrm>
+          <a:prstGeom prst="rect">
+            <a:avLst/>
+          </a:prstGeom>
+          <a:noFill/>
+        </p:spPr>
+        <p:txBody>
+          <a:bodyPr wrap="square" lIns="0" rIns="0" tIns="18288" bIns="18288" anchor="ctr">
+            <a:spAutoFit/>
+          </a:bodyPr>
+          <a:lstStyle/>
+          <a:p>
+            <a:pPr algn="ctr"/>
+            <a:r>
+              <a:rPr sz="1800" b="1">
+                <a:solidFill>
+                  <a:srgbClr val="0F172A"/>
+                </a:solidFill>
+                <a:latin typeface="Calibri"/>
+              </a:rPr>
+              <a:t>48</a:t>
+            </a:r>
+          </a:p>
+          <a:p>
+            <a:pPr algn="ctr"/>
+            <a:r>
+              <a:rPr sz="800" b="0">
+                <a:solidFill>
+                  <a:srgbClr val="475569"/>
+                </a:solidFill>
+                <a:latin typeface="Calibri"/>
+              </a:rPr>
+              <a:t>$20.2M ARR</a:t>
+            </a:r>
+          </a:p>
+        </p:txBody>
+      </p:sp>
+      <p:sp>
+        <p:nvSpPr>
+          <p:cNvPr id="45" name="Rounded Rectangle 44"/>
+          <p:cNvSpPr/>
+          <p:nvPr/>
+        </p:nvSpPr>
+        <p:spPr>
+          <a:xfrm>
+            <a:off x="10536935" y="3453383"/>
+            <a:ext cx="1130808" cy="746760"/>
+          </a:xfrm>
+          <a:prstGeom prst="roundRect">
+            <a:avLst>
+              <a:gd name="adj" fmla="val 18000"/>
+            </a:avLst>
+          </a:prstGeom>
+          <a:solidFill>
+            <a:srgbClr val="FED7AA"/>
+          </a:solidFill>
+          <a:ln w="12700">
+            <a:solidFill>
+              <a:srgbClr val="EA580C"/>
+            </a:solidFill>
+          </a:ln>
+          <a:effectLst/>
+        </p:spPr>
+        <p:style>
+          <a:lnRef idx="1">
+            <a:schemeClr val="accent1"/>
+          </a:lnRef>
+          <a:fillRef idx="3">
+            <a:schemeClr val="accent1"/>
+          </a:fillRef>
+          <a:effectRef idx="2">
+            <a:schemeClr val="accent1"/>
+          </a:effectRef>
+          <a:fontRef idx="minor">
+            <a:schemeClr val="lt1"/>
+          </a:fontRef>
+        </p:style>
+        <p:txBody>
+          <a:bodyPr rtlCol="0" anchor="ctr"/>
+          <a:lstStyle/>
+          <a:p>
+            <a:pPr algn="ctr"/>
+          </a:p>
+        </p:txBody>
+      </p:sp>
+      <p:sp>
+        <p:nvSpPr>
+          <p:cNvPr id="46" name="TextBox 45"/>
+          <p:cNvSpPr txBox="1"/>
+          <p:nvPr/>
+        </p:nvSpPr>
+        <p:spPr>
+          <a:xfrm>
+            <a:off x="10536935" y="3453383"/>
+            <a:ext cx="1130808" cy="746760"/>
+          </a:xfrm>
+          <a:prstGeom prst="rect">
+            <a:avLst/>
+          </a:prstGeom>
+          <a:noFill/>
+        </p:spPr>
+        <p:txBody>
+          <a:bodyPr wrap="square" lIns="0" rIns="0" tIns="18288" bIns="18288" anchor="ctr">
+            <a:spAutoFit/>
+          </a:bodyPr>
+          <a:lstStyle/>
+          <a:p>
+            <a:pPr algn="ctr"/>
+            <a:r>
+              <a:rPr sz="1800" b="1">
+                <a:solidFill>
+                  <a:srgbClr val="0F172A"/>
+                </a:solidFill>
+                <a:latin typeface="Calibri"/>
+              </a:rPr>
+              <a:t>8</a:t>
+            </a:r>
+          </a:p>
+          <a:p>
+            <a:pPr algn="ctr"/>
+            <a:r>
+              <a:rPr sz="800" b="0">
+                <a:solidFill>
+                  <a:srgbClr val="475569"/>
+                </a:solidFill>
+                <a:latin typeface="Calibri"/>
+              </a:rPr>
+              <a:t>$4.9M ARR</a:t>
+            </a:r>
+          </a:p>
+        </p:txBody>
+      </p:sp>
+      <p:sp>
+        <p:nvSpPr>
+          <p:cNvPr id="47" name="Rounded Rectangle 46"/>
+          <p:cNvSpPr/>
+          <p:nvPr/>
+        </p:nvSpPr>
+        <p:spPr>
+          <a:xfrm>
+            <a:off x="7315200" y="4255008"/>
+            <a:ext cx="722376" cy="746760"/>
+          </a:xfrm>
+          <a:prstGeom prst="roundRect">
+            <a:avLst>
+              <a:gd name="adj" fmla="val 25000"/>
+            </a:avLst>
+          </a:prstGeom>
+          <a:solidFill>
+            <a:srgbClr val="DC2626"/>
+          </a:solidFill>
+          <a:ln>
+            <a:noFill/>
+          </a:ln>
+          <a:effectLst/>
+        </p:spPr>
+        <p:style>
+          <a:lnRef idx="1">
+            <a:schemeClr val="accent1"/>
+          </a:lnRef>
+          <a:fillRef idx="3">
+            <a:schemeClr val="accent1"/>
+          </a:fillRef>
+          <a:effectRef idx="2">
+            <a:schemeClr val="accent1"/>
+          </a:effectRef>
+          <a:fontRef idx="minor">
+            <a:schemeClr val="lt1"/>
+          </a:fontRef>
+        </p:style>
+        <p:txBody>
+          <a:bodyPr rtlCol="0" anchor="ctr"/>
+          <a:lstStyle/>
+          <a:p>
+            <a:pPr algn="ctr"/>
+          </a:p>
+        </p:txBody>
+      </p:sp>
+      <p:sp>
+        <p:nvSpPr>
+          <p:cNvPr id="48" name="TextBox 47"/>
+          <p:cNvSpPr txBox="1"/>
+          <p:nvPr/>
+        </p:nvSpPr>
+        <p:spPr>
+          <a:xfrm>
+            <a:off x="7315200" y="4255008"/>
+            <a:ext cx="722376" cy="746760"/>
+          </a:xfrm>
+          <a:prstGeom prst="rect">
+            <a:avLst/>
+          </a:prstGeom>
+          <a:noFill/>
+        </p:spPr>
+        <p:txBody>
+          <a:bodyPr wrap="square" lIns="0" rIns="0" tIns="18288" bIns="18288" anchor="ctr">
+            <a:spAutoFit/>
+          </a:bodyPr>
+          <a:lstStyle/>
+          <a:p>
+            <a:pPr algn="ctr"/>
+            <a:r>
+              <a:rPr sz="700" b="1">
+                <a:solidFill>
+                  <a:srgbClr val="FFFFFF"/>
+                </a:solidFill>
+                <a:latin typeface="Calibri"/>
+              </a:rPr>
+              <a:t>AVRI</a:t>
+            </a:r>
+          </a:p>
+          <a:p>
+            <a:pPr algn="ctr"/>
+            <a:r>
+              <a:rPr sz="900" b="1">
+                <a:solidFill>
+                  <a:srgbClr val="FFFFFF"/>
+                </a:solidFill>
+                <a:latin typeface="Calibri"/>
+              </a:rPr>
+              <a:t>RED</a:t>
+            </a:r>
+          </a:p>
+        </p:txBody>
+      </p:sp>
+      <p:sp>
+        <p:nvSpPr>
+          <p:cNvPr id="49" name="Rounded Rectangle 48"/>
+          <p:cNvSpPr/>
+          <p:nvPr/>
+        </p:nvSpPr>
+        <p:spPr>
+          <a:xfrm>
+            <a:off x="8129015" y="4255008"/>
+            <a:ext cx="1130808" cy="746760"/>
+          </a:xfrm>
+          <a:prstGeom prst="roundRect">
+            <a:avLst>
+              <a:gd name="adj" fmla="val 18000"/>
+            </a:avLst>
+          </a:prstGeom>
+          <a:solidFill>
+            <a:srgbClr val="F8FAFC"/>
+          </a:solidFill>
+          <a:ln w="12700">
+            <a:solidFill>
+              <a:srgbClr val="E2E8F0"/>
+            </a:solidFill>
+          </a:ln>
+          <a:effectLst/>
+        </p:spPr>
+        <p:style>
+          <a:lnRef idx="1">
+            <a:schemeClr val="accent1"/>
+          </a:lnRef>
+          <a:fillRef idx="3">
+            <a:schemeClr val="accent1"/>
+          </a:fillRef>
+          <a:effectRef idx="2">
+            <a:schemeClr val="accent1"/>
+          </a:effectRef>
+          <a:fontRef idx="minor">
+            <a:schemeClr val="lt1"/>
+          </a:fontRef>
+        </p:style>
+        <p:txBody>
+          <a:bodyPr rtlCol="0" anchor="ctr"/>
+          <a:lstStyle/>
+          <a:p>
+            <a:pPr algn="ctr"/>
+          </a:p>
+        </p:txBody>
+      </p:sp>
+      <p:sp>
+        <p:nvSpPr>
+          <p:cNvPr id="50" name="TextBox 49"/>
+          <p:cNvSpPr txBox="1"/>
+          <p:nvPr/>
+        </p:nvSpPr>
+        <p:spPr>
+          <a:xfrm>
+            <a:off x="8129015" y="4255008"/>
+            <a:ext cx="1130808" cy="746760"/>
+          </a:xfrm>
+          <a:prstGeom prst="rect">
+            <a:avLst/>
+          </a:prstGeom>
+          <a:noFill/>
+        </p:spPr>
+        <p:txBody>
+          <a:bodyPr wrap="square" lIns="0" rIns="0" tIns="18288" bIns="18288" anchor="ctr">
+            <a:spAutoFit/>
+          </a:bodyPr>
+          <a:lstStyle/>
+          <a:p>
+            <a:pPr algn="ctr"/>
+            <a:r>
+              <a:rPr sz="1200" b="0">
+                <a:solidFill>
+                  <a:srgbClr val="94A3B8"/>
+                </a:solidFill>
+                <a:latin typeface="Calibri"/>
+              </a:rPr>
+              <a:t>—</a:t>
+            </a:r>
+          </a:p>
+        </p:txBody>
+      </p:sp>
+      <p:sp>
+        <p:nvSpPr>
+          <p:cNvPr id="51" name="Rounded Rectangle 50"/>
+          <p:cNvSpPr/>
+          <p:nvPr/>
+        </p:nvSpPr>
+        <p:spPr>
+          <a:xfrm>
+            <a:off x="9332975" y="4255008"/>
+            <a:ext cx="1130808" cy="746760"/>
+          </a:xfrm>
+          <a:prstGeom prst="roundRect">
+            <a:avLst>
+              <a:gd name="adj" fmla="val 18000"/>
+            </a:avLst>
+          </a:prstGeom>
+          <a:solidFill>
+            <a:srgbClr val="FED7AA"/>
+          </a:solidFill>
+          <a:ln w="12700">
+            <a:solidFill>
+              <a:srgbClr val="EA580C"/>
+            </a:solidFill>
+          </a:ln>
+          <a:effectLst/>
+        </p:spPr>
+        <p:style>
+          <a:lnRef idx="1">
+            <a:schemeClr val="accent1"/>
+          </a:lnRef>
+          <a:fillRef idx="3">
+            <a:schemeClr val="accent1"/>
+          </a:fillRef>
+          <a:effectRef idx="2">
+            <a:schemeClr val="accent1"/>
+          </a:effectRef>
+          <a:fontRef idx="minor">
+            <a:schemeClr val="lt1"/>
+          </a:fontRef>
+        </p:style>
+        <p:txBody>
+          <a:bodyPr rtlCol="0" anchor="ctr"/>
+          <a:lstStyle/>
+          <a:p>
+            <a:pPr algn="ctr"/>
+          </a:p>
+        </p:txBody>
+      </p:sp>
+      <p:sp>
+        <p:nvSpPr>
+          <p:cNvPr id="52" name="TextBox 51"/>
+          <p:cNvSpPr txBox="1"/>
+          <p:nvPr/>
+        </p:nvSpPr>
+        <p:spPr>
+          <a:xfrm>
+            <a:off x="9332975" y="4255008"/>
+            <a:ext cx="1130808" cy="746760"/>
+          </a:xfrm>
+          <a:prstGeom prst="rect">
+            <a:avLst/>
+          </a:prstGeom>
+          <a:noFill/>
+        </p:spPr>
+        <p:txBody>
+          <a:bodyPr wrap="square" lIns="0" rIns="0" tIns="18288" bIns="18288" anchor="ctr">
+            <a:spAutoFit/>
+          </a:bodyPr>
+          <a:lstStyle/>
+          <a:p>
+            <a:pPr algn="ctr"/>
+            <a:r>
+              <a:rPr sz="1800" b="1">
+                <a:solidFill>
+                  <a:srgbClr val="0F172A"/>
+                </a:solidFill>
+                <a:latin typeface="Calibri"/>
+              </a:rPr>
+              <a:t>25</a:t>
+            </a:r>
+          </a:p>
+          <a:p>
+            <a:pPr algn="ctr"/>
+            <a:r>
+              <a:rPr sz="800" b="0">
+                <a:solidFill>
+                  <a:srgbClr val="475569"/>
+                </a:solidFill>
+                <a:latin typeface="Calibri"/>
+              </a:rPr>
+              <a:t>$16.9M ARR</a:t>
+            </a:r>
+          </a:p>
+        </p:txBody>
+      </p:sp>
+      <p:sp>
+        <p:nvSpPr>
+          <p:cNvPr id="53" name="Rounded Rectangle 52"/>
+          <p:cNvSpPr/>
+          <p:nvPr/>
+        </p:nvSpPr>
+        <p:spPr>
+          <a:xfrm>
+            <a:off x="10536935" y="4255008"/>
+            <a:ext cx="1130808" cy="746760"/>
+          </a:xfrm>
+          <a:prstGeom prst="roundRect">
+            <a:avLst>
+              <a:gd name="adj" fmla="val 18000"/>
+            </a:avLst>
+          </a:prstGeom>
+          <a:solidFill>
+            <a:srgbClr val="F1F5F9"/>
+          </a:solidFill>
+          <a:ln w="12700">
+            <a:solidFill>
+              <a:srgbClr val="CBD5E1"/>
+            </a:solidFill>
+          </a:ln>
+          <a:effectLst/>
+        </p:spPr>
+        <p:style>
+          <a:lnRef idx="1">
+            <a:schemeClr val="accent1"/>
+          </a:lnRef>
+          <a:fillRef idx="3">
+            <a:schemeClr val="accent1"/>
+          </a:fillRef>
+          <a:effectRef idx="2">
+            <a:schemeClr val="accent1"/>
+          </a:effectRef>
+          <a:fontRef idx="minor">
+            <a:schemeClr val="lt1"/>
+          </a:fontRef>
+        </p:style>
+        <p:txBody>
+          <a:bodyPr rtlCol="0" anchor="ctr"/>
+          <a:lstStyle/>
+          <a:p>
+            <a:pPr algn="ctr"/>
+          </a:p>
+        </p:txBody>
+      </p:sp>
+      <p:sp>
+        <p:nvSpPr>
+          <p:cNvPr id="54" name="TextBox 53"/>
+          <p:cNvSpPr txBox="1"/>
+          <p:nvPr/>
+        </p:nvSpPr>
+        <p:spPr>
+          <a:xfrm>
+            <a:off x="10536935" y="4255008"/>
+            <a:ext cx="1130808" cy="746760"/>
+          </a:xfrm>
+          <a:prstGeom prst="rect">
+            <a:avLst/>
+          </a:prstGeom>
+          <a:noFill/>
+        </p:spPr>
+        <p:txBody>
+          <a:bodyPr wrap="square" lIns="0" rIns="0" tIns="18288" bIns="18288" anchor="ctr">
+            <a:spAutoFit/>
+          </a:bodyPr>
+          <a:lstStyle/>
+          <a:p>
+            <a:pPr algn="ctr"/>
+            <a:r>
+              <a:rPr sz="1800" b="1">
+                <a:solidFill>
+                  <a:srgbClr val="0F172A"/>
+                </a:solidFill>
+                <a:latin typeface="Calibri"/>
+              </a:rPr>
+              <a:t>109</a:t>
+            </a:r>
+          </a:p>
+          <a:p>
+            <a:pPr algn="ctr"/>
+            <a:r>
+              <a:rPr sz="800" b="0">
+                <a:solidFill>
+                  <a:srgbClr val="475569"/>
+                </a:solidFill>
+                <a:latin typeface="Calibri"/>
+              </a:rPr>
+              <a:t>$47.7M ARR</a:t>
+            </a:r>
           </a:p>
         </p:txBody>
       </p:sp>
@@ -7057,6 +8140,10 @@
             <a:prstDash val="solid"/>
           </a:ln>
         </p:spPr>
+        <p:txBody>
+          <a:bodyPr/>
+          <a:p/>
+        </p:txBody>
       </p:sp>
       <p:sp>
         <p:nvSpPr>
@@ -7118,19 +8205,17 @@
           <a:bodyPr wrap="square" lIns="0" tIns="0" rIns="0" bIns="0" rtlCol="0" anchor="ctr"/>
           <a:lstStyle/>
           <a:p>
-            <a:pPr indent="0" marL="0">
+            <a:pPr indent="0" marL="0" algn="l">
               <a:buNone/>
             </a:pPr>
             <a:r>
-              <a:rPr lang="en-US" sz="3000" b="1" dirty="0">
+              <a:rPr sz="2200" b="1">
                 <a:solidFill>
                   <a:srgbClr val="0F172A"/>
                 </a:solidFill>
-                <a:latin typeface="Calibri" pitchFamily="34" charset="0"/>
-                <a:ea typeface="Calibri" pitchFamily="34" charset="-122"/>
-                <a:cs typeface="Calibri" pitchFamily="34" charset="-120"/>
-              </a:rPr>
-              <a:t>AVRI: a 0–100 composite that balances all four dimensions.</a:t>
+                <a:latin typeface="Calibri"/>
+              </a:rPr>
+              <a:t>AVRI: the quality term — 0–100 composite that balances all four dimensions.</a:t>
             </a:r>
             <a:endParaRPr lang="en-US" sz="3000" dirty="0"/>
           </a:p>
@@ -7160,6 +8245,10 @@
             <a:prstDash val="solid"/>
           </a:ln>
         </p:spPr>
+        <p:txBody>
+          <a:bodyPr/>
+          <a:p/>
+        </p:txBody>
       </p:sp>
       <p:sp>
         <p:nvSpPr>
@@ -7185,6 +8274,10 @@
             <a:prstDash val="solid"/>
           </a:ln>
         </p:spPr>
+        <p:txBody>
+          <a:bodyPr/>
+          <a:p/>
+        </p:txBody>
       </p:sp>
       <p:sp>
         <p:nvSpPr>
@@ -7210,6 +8303,10 @@
             <a:prstDash val="solid"/>
           </a:ln>
         </p:spPr>
+        <p:txBody>
+          <a:bodyPr/>
+          <a:p/>
+        </p:txBody>
       </p:sp>
       <p:sp>
         <p:nvSpPr>
@@ -7430,6 +8527,10 @@
             <a:prstDash val="solid"/>
           </a:ln>
         </p:spPr>
+        <p:txBody>
+          <a:bodyPr/>
+          <a:p/>
+        </p:txBody>
       </p:sp>
       <p:sp>
         <p:nvSpPr>
@@ -7455,6 +8556,10 @@
             <a:prstDash val="solid"/>
           </a:ln>
         </p:spPr>
+        <p:txBody>
+          <a:bodyPr/>
+          <a:p/>
+        </p:txBody>
       </p:sp>
       <p:sp>
         <p:nvSpPr>
@@ -7480,6 +8585,10 @@
             <a:prstDash val="solid"/>
           </a:ln>
         </p:spPr>
+        <p:txBody>
+          <a:bodyPr/>
+          <a:p/>
+        </p:txBody>
       </p:sp>
       <p:sp>
         <p:nvSpPr>
@@ -7700,6 +8809,10 @@
             <a:prstDash val="solid"/>
           </a:ln>
         </p:spPr>
+        <p:txBody>
+          <a:bodyPr/>
+          <a:p/>
+        </p:txBody>
       </p:sp>
       <p:sp>
         <p:nvSpPr>
@@ -7725,6 +8838,10 @@
             <a:prstDash val="solid"/>
           </a:ln>
         </p:spPr>
+        <p:txBody>
+          <a:bodyPr/>
+          <a:p/>
+        </p:txBody>
       </p:sp>
       <p:sp>
         <p:nvSpPr>
@@ -7750,6 +8867,10 @@
             <a:prstDash val="solid"/>
           </a:ln>
         </p:spPr>
+        <p:txBody>
+          <a:bodyPr/>
+          <a:p/>
+        </p:txBody>
       </p:sp>
       <p:sp>
         <p:nvSpPr>
@@ -7970,6 +9091,10 @@
             <a:prstDash val="solid"/>
           </a:ln>
         </p:spPr>
+        <p:txBody>
+          <a:bodyPr/>
+          <a:p/>
+        </p:txBody>
       </p:sp>
       <p:sp>
         <p:nvSpPr>
@@ -7995,6 +9120,10 @@
             <a:prstDash val="solid"/>
           </a:ln>
         </p:spPr>
+        <p:txBody>
+          <a:bodyPr/>
+          <a:p/>
+        </p:txBody>
       </p:sp>
       <p:sp>
         <p:nvSpPr>
@@ -8020,6 +9149,10 @@
             <a:prstDash val="solid"/>
           </a:ln>
         </p:spPr>
+        <p:txBody>
+          <a:bodyPr/>
+          <a:p/>
+        </p:txBody>
       </p:sp>
       <p:sp>
         <p:nvSpPr>
@@ -8240,6 +9373,10 @@
             <a:prstDash val="solid"/>
           </a:ln>
         </p:spPr>
+        <p:txBody>
+          <a:bodyPr/>
+          <a:p/>
+        </p:txBody>
       </p:sp>
       <p:sp>
         <p:nvSpPr>
@@ -8304,6 +9441,10 @@
             <a:prstDash val="solid"/>
           </a:ln>
         </p:spPr>
+        <p:txBody>
+          <a:bodyPr/>
+          <a:p/>
+        </p:txBody>
       </p:sp>
       <p:sp>
         <p:nvSpPr>
@@ -8382,6 +9523,10 @@
             <a:prstDash val="solid"/>
           </a:ln>
         </p:spPr>
+        <p:txBody>
+          <a:bodyPr/>
+          <a:p/>
+        </p:txBody>
       </p:sp>
       <p:sp>
         <p:nvSpPr>
@@ -8407,6 +9552,10 @@
             <a:prstDash val="solid"/>
           </a:ln>
         </p:spPr>
+        <p:txBody>
+          <a:bodyPr/>
+          <a:p/>
+        </p:txBody>
       </p:sp>
       <p:sp>
         <p:nvSpPr>
@@ -8510,6 +9659,10 @@
             <a:prstDash val="solid"/>
           </a:ln>
         </p:spPr>
+        <p:txBody>
+          <a:bodyPr/>
+          <a:p/>
+        </p:txBody>
       </p:sp>
       <p:sp>
         <p:nvSpPr>
@@ -8535,6 +9688,10 @@
             <a:prstDash val="solid"/>
           </a:ln>
         </p:spPr>
+        <p:txBody>
+          <a:bodyPr/>
+          <a:p/>
+        </p:txBody>
       </p:sp>
       <p:sp>
         <p:nvSpPr>
@@ -8638,6 +9795,10 @@
             <a:prstDash val="solid"/>
           </a:ln>
         </p:spPr>
+        <p:txBody>
+          <a:bodyPr/>
+          <a:p/>
+        </p:txBody>
       </p:sp>
       <p:sp>
         <p:nvSpPr>
@@ -8663,6 +9824,10 @@
             <a:prstDash val="solid"/>
           </a:ln>
         </p:spPr>
+        <p:txBody>
+          <a:bodyPr/>
+          <a:p/>
+        </p:txBody>
       </p:sp>
       <p:sp>
         <p:nvSpPr>
@@ -8750,8 +9915,8 @@
         </p:nvSpPr>
         <p:spPr>
           <a:xfrm>
-            <a:off x="365760" y="6492240"/>
-            <a:ext cx="5486400" cy="274320"/>
+            <a:off x="457200" y="6062472"/>
+            <a:ext cx="11247120" cy="292608"/>
           </a:xfrm>
           <a:prstGeom prst="rect">
             <a:avLst/>
@@ -8760,21 +9925,74 @@
           <a:ln/>
         </p:spPr>
         <p:txBody>
-          <a:bodyPr wrap="square" rtlCol="0" anchor="ctr"/>
+          <a:bodyPr wrap="square" lIns="0" tIns="0" rIns="0" bIns="0" rtlCol="0" anchor="ctr"/>
           <a:lstStyle/>
           <a:p>
             <a:pPr indent="0" marL="0">
               <a:buNone/>
             </a:pPr>
             <a:r>
-              <a:rPr lang="en-US" sz="900" dirty="0">
-                <a:solidFill>
-                  <a:srgbClr val="64748B"/>
+              <a:rPr lang="en-US" sz="1000" b="1" dirty="0">
+                <a:solidFill>
+                  <a:srgbClr val="EA580C"/>
                 </a:solidFill>
                 <a:latin typeface="Calibri" pitchFamily="34" charset="0"/>
                 <a:ea typeface="Calibri" pitchFamily="34" charset="-122"/>
                 <a:cs typeface="Calibri" pitchFamily="34" charset="-120"/>
               </a:rPr>
+              <a:t>v1.3 — Activation Grace: </a:t>
+            </a:r>
+            <a:pPr indent="0" marL="0">
+              <a:buNone/>
+            </a:pPr>
+            <a:r>
+              <a:rPr lang="en-US" sz="1000" i="1" dirty="0">
+                <a:solidFill>
+                  <a:srgbClr val="64748B"/>
+                </a:solidFill>
+                <a:latin typeface="Calibri" pitchFamily="34" charset="0"/>
+                <a:ea typeface="Calibri" pitchFamily="34" charset="-122"/>
+                <a:cs typeface="Calibri" pitchFamily="34" charset="-120"/>
+              </a:rPr>
+              <a:t>newly-signed contracts excluded from CR until cumulative usage ≥ 15% of monthly commit OR 90 days elapsed (whichever first). Signing a deal never penalizes a CSM during ramp.</a:t>
+            </a:r>
+            <a:endParaRPr lang="en-US" sz="1000" dirty="0"/>
+          </a:p>
+        </p:txBody>
+      </p:sp>
+      <p:sp>
+        <p:nvSpPr>
+          <p:cNvPr id="54" name="Text 52"/>
+          <p:cNvSpPr/>
+          <p:nvPr/>
+        </p:nvSpPr>
+        <p:spPr>
+          <a:xfrm>
+            <a:off x="365760" y="6492240"/>
+            <a:ext cx="5486400" cy="274320"/>
+          </a:xfrm>
+          <a:prstGeom prst="rect">
+            <a:avLst/>
+          </a:prstGeom>
+          <a:noFill/>
+          <a:ln/>
+        </p:spPr>
+        <p:txBody>
+          <a:bodyPr wrap="square" rtlCol="0" anchor="ctr"/>
+          <a:lstStyle/>
+          <a:p>
+            <a:pPr indent="0" marL="0">
+              <a:buNone/>
+            </a:pPr>
+            <a:r>
+              <a:rPr lang="en-US" sz="900" dirty="0">
+                <a:solidFill>
+                  <a:srgbClr val="64748B"/>
+                </a:solidFill>
+                <a:latin typeface="Calibri" pitchFamily="34" charset="0"/>
+                <a:ea typeface="Calibri" pitchFamily="34" charset="-122"/>
+                <a:cs typeface="Calibri" pitchFamily="34" charset="-120"/>
+              </a:rPr>
               <a:t>GCS North Star · AVRI Proposal · Rami Ibrahimi</a:t>
             </a:r>
             <a:endParaRPr lang="en-US" sz="900" dirty="0"/>
@@ -8783,7 +10001,7 @@
       </p:sp>
       <p:sp>
         <p:nvSpPr>
-          <p:cNvPr id="54" name="Text 52"/>
+          <p:cNvPr id="55" name="Text 53"/>
           <p:cNvSpPr/>
           <p:nvPr/>
         </p:nvSpPr>
@@ -8806,15 +10024,13 @@
               <a:buNone/>
             </a:pPr>
             <a:r>
-              <a:rPr lang="en-US" sz="900" dirty="0">
-                <a:solidFill>
-                  <a:srgbClr val="64748B"/>
-                </a:solidFill>
-                <a:latin typeface="Calibri" pitchFamily="34" charset="0"/>
-                <a:ea typeface="Calibri" pitchFamily="34" charset="-122"/>
-                <a:cs typeface="Calibri" pitchFamily="34" charset="-120"/>
-              </a:rPr>
-              <a:t>4 / 6</a:t>
+              <a:rPr sz="900" b="0">
+                <a:solidFill>
+                  <a:srgbClr val="94A3B8"/>
+                </a:solidFill>
+                <a:latin typeface="Calibri"/>
+              </a:rPr>
+              <a:t>4 / 8</a:t>
             </a:r>
             <a:endParaRPr lang="en-US" sz="900" dirty="0"/>
           </a:p>
@@ -8829,6 +10045,2016 @@
 </file>
 
 <file path=ppt/slides/slide5.xml><?xml version="1.0" encoding="utf-8"?>
+<p:sld xmlns:a="http://schemas.openxmlformats.org/drawingml/2006/main" xmlns:p="http://schemas.openxmlformats.org/presentationml/2006/main" xmlns:r="http://schemas.openxmlformats.org/officeDocument/2006/relationships">
+  <p:cSld>
+    <p:spTree>
+      <p:nvGrpSpPr>
+        <p:cNvPr id="1" name=""/>
+        <p:cNvGrpSpPr/>
+        <p:nvPr/>
+      </p:nvGrpSpPr>
+      <p:grpSpPr/>
+      <p:sp>
+        <p:nvSpPr>
+          <p:cNvPr id="2" name="Rectangle 1"/>
+          <p:cNvSpPr/>
+          <p:nvPr/>
+        </p:nvSpPr>
+        <p:spPr>
+          <a:xfrm>
+            <a:off x="0" y="0"/>
+            <a:ext cx="164592" cy="6858000"/>
+          </a:xfrm>
+          <a:prstGeom prst="rect">
+            <a:avLst/>
+          </a:prstGeom>
+          <a:solidFill>
+            <a:srgbClr val="EA580C"/>
+          </a:solidFill>
+          <a:ln>
+            <a:noFill/>
+          </a:ln>
+          <a:effectLst/>
+        </p:spPr>
+        <p:style>
+          <a:lnRef idx="1">
+            <a:schemeClr val="accent1"/>
+          </a:lnRef>
+          <a:fillRef idx="3">
+            <a:schemeClr val="accent1"/>
+          </a:fillRef>
+          <a:effectRef idx="2">
+            <a:schemeClr val="accent1"/>
+          </a:effectRef>
+          <a:fontRef idx="minor">
+            <a:schemeClr val="lt1"/>
+          </a:fontRef>
+        </p:style>
+        <p:txBody>
+          <a:bodyPr rtlCol="0" anchor="ctr"/>
+          <a:lstStyle/>
+          <a:p>
+            <a:pPr algn="ctr"/>
+          </a:p>
+        </p:txBody>
+      </p:sp>
+      <p:sp>
+        <p:nvSpPr>
+          <p:cNvPr id="3" name="TextBox 2"/>
+          <p:cNvSpPr txBox="1"/>
+          <p:nvPr/>
+        </p:nvSpPr>
+        <p:spPr>
+          <a:xfrm>
+            <a:off x="457200" y="320040"/>
+            <a:ext cx="7315200" cy="274320"/>
+          </a:xfrm>
+          <a:prstGeom prst="rect">
+            <a:avLst/>
+          </a:prstGeom>
+          <a:noFill/>
+        </p:spPr>
+        <p:txBody>
+          <a:bodyPr wrap="square" lIns="0" rIns="0" tIns="18288" bIns="18288" anchor="ctr">
+            <a:spAutoFit/>
+          </a:bodyPr>
+          <a:lstStyle/>
+          <a:p>
+            <a:pPr algn="l"/>
+            <a:r>
+              <a:rPr sz="1100" b="1">
+                <a:solidFill>
+                  <a:srgbClr val="EA580C"/>
+                </a:solidFill>
+                <a:latin typeface="Calibri"/>
+              </a:rPr>
+              <a:t>05 · QUALITY × SCALE</a:t>
+            </a:r>
+          </a:p>
+        </p:txBody>
+      </p:sp>
+      <p:sp>
+        <p:nvSpPr>
+          <p:cNvPr id="4" name="TextBox 3"/>
+          <p:cNvSpPr txBox="1"/>
+          <p:nvPr/>
+        </p:nvSpPr>
+        <p:spPr>
+          <a:xfrm>
+            <a:off x="457200" y="594360"/>
+            <a:ext cx="11430000" cy="640080"/>
+          </a:xfrm>
+          <a:prstGeom prst="rect">
+            <a:avLst/>
+          </a:prstGeom>
+          <a:noFill/>
+        </p:spPr>
+        <p:txBody>
+          <a:bodyPr wrap="square" lIns="0" rIns="0" tIns="18288" bIns="18288" anchor="t">
+            <a:spAutoFit/>
+          </a:bodyPr>
+          <a:lstStyle/>
+          <a:p>
+            <a:pPr algn="l"/>
+            <a:r>
+              <a:rPr sz="2400" b="1">
+                <a:solidFill>
+                  <a:srgbClr val="0F172A"/>
+                </a:solidFill>
+                <a:latin typeface="Calibri"/>
+              </a:rPr>
+              <a:t>Realized Value: AVRI is velocity. RV is momentum. Both belong on the dashboard.</a:t>
+            </a:r>
+          </a:p>
+        </p:txBody>
+      </p:sp>
+      <p:sp>
+        <p:nvSpPr>
+          <p:cNvPr id="5" name="TextBox 4"/>
+          <p:cNvSpPr txBox="1"/>
+          <p:nvPr/>
+        </p:nvSpPr>
+        <p:spPr>
+          <a:xfrm>
+            <a:off x="457200" y="1280160"/>
+            <a:ext cx="11247120" cy="502920"/>
+          </a:xfrm>
+          <a:prstGeom prst="rect">
+            <a:avLst/>
+          </a:prstGeom>
+          <a:noFill/>
+        </p:spPr>
+        <p:txBody>
+          <a:bodyPr wrap="square" lIns="0" rIns="0" tIns="18288" bIns="18288" anchor="t">
+            <a:spAutoFit/>
+          </a:bodyPr>
+          <a:lstStyle/>
+          <a:p>
+            <a:pPr algn="l"/>
+            <a:r>
+              <a:rPr sz="1200" b="0">
+                <a:solidFill>
+                  <a:srgbClr val="475569"/>
+                </a:solidFill>
+                <a:latin typeface="Calibri"/>
+              </a:rPr>
+              <a:t>AVRI scores quality of execution; segment-fair and comp-grade. RV composes ARR with AVRI to surface dollars at stake; the executive-dashboard metric. Three uses, three consumers, one engine.</a:t>
+            </a:r>
+          </a:p>
+        </p:txBody>
+      </p:sp>
+      <p:sp>
+        <p:nvSpPr>
+          <p:cNvPr id="6" name="Rounded Rectangle 5"/>
+          <p:cNvSpPr/>
+          <p:nvPr/>
+        </p:nvSpPr>
+        <p:spPr>
+          <a:xfrm>
+            <a:off x="457200" y="1874519"/>
+            <a:ext cx="4846320" cy="1234440"/>
+          </a:xfrm>
+          <a:prstGeom prst="roundRect">
+            <a:avLst>
+              <a:gd name="adj" fmla="val 10000"/>
+            </a:avLst>
+          </a:prstGeom>
+          <a:solidFill>
+            <a:srgbClr val="F8FAFC"/>
+          </a:solidFill>
+          <a:ln w="9525">
+            <a:solidFill>
+              <a:srgbClr val="94A3B8"/>
+            </a:solidFill>
+          </a:ln>
+          <a:effectLst/>
+        </p:spPr>
+        <p:style>
+          <a:lnRef idx="1">
+            <a:schemeClr val="accent1"/>
+          </a:lnRef>
+          <a:fillRef idx="3">
+            <a:schemeClr val="accent1"/>
+          </a:fillRef>
+          <a:effectRef idx="2">
+            <a:schemeClr val="accent1"/>
+          </a:effectRef>
+          <a:fontRef idx="minor">
+            <a:schemeClr val="lt1"/>
+          </a:fontRef>
+        </p:style>
+        <p:txBody>
+          <a:bodyPr rtlCol="0" anchor="ctr"/>
+          <a:lstStyle/>
+          <a:p>
+            <a:pPr algn="ctr"/>
+          </a:p>
+        </p:txBody>
+      </p:sp>
+      <p:sp>
+        <p:nvSpPr>
+          <p:cNvPr id="7" name="TextBox 6"/>
+          <p:cNvSpPr txBox="1"/>
+          <p:nvPr/>
+        </p:nvSpPr>
+        <p:spPr>
+          <a:xfrm>
+            <a:off x="640080" y="1947672"/>
+            <a:ext cx="4480559" cy="274320"/>
+          </a:xfrm>
+          <a:prstGeom prst="rect">
+            <a:avLst/>
+          </a:prstGeom>
+          <a:noFill/>
+        </p:spPr>
+        <p:txBody>
+          <a:bodyPr wrap="square" lIns="0" rIns="0" tIns="18288" bIns="18288" anchor="t">
+            <a:spAutoFit/>
+          </a:bodyPr>
+          <a:lstStyle/>
+          <a:p>
+            <a:pPr algn="l"/>
+            <a:r>
+              <a:rPr sz="1000" b="1">
+                <a:solidFill>
+                  <a:srgbClr val="475569"/>
+                </a:solidFill>
+                <a:latin typeface="Calibri"/>
+              </a:rPr>
+              <a:t>THE FORMULA</a:t>
+            </a:r>
+          </a:p>
+        </p:txBody>
+      </p:sp>
+      <p:sp>
+        <p:nvSpPr>
+          <p:cNvPr id="8" name="TextBox 7"/>
+          <p:cNvSpPr txBox="1"/>
+          <p:nvPr/>
+        </p:nvSpPr>
+        <p:spPr>
+          <a:xfrm>
+            <a:off x="640080" y="2240279"/>
+            <a:ext cx="4480559" cy="502920"/>
+          </a:xfrm>
+          <a:prstGeom prst="rect">
+            <a:avLst/>
+          </a:prstGeom>
+          <a:noFill/>
+        </p:spPr>
+        <p:txBody>
+          <a:bodyPr wrap="square" lIns="0" rIns="0" tIns="18288" bIns="18288" anchor="ctr">
+            <a:spAutoFit/>
+          </a:bodyPr>
+          <a:lstStyle/>
+          <a:p>
+            <a:pPr algn="ctr"/>
+            <a:r>
+              <a:rPr sz="2400" b="1">
+                <a:solidFill>
+                  <a:srgbClr val="0F172A"/>
+                </a:solidFill>
+                <a:latin typeface="Calibri"/>
+              </a:rPr>
+              <a:t>RV  =  ARR  ×  AVRI / 100</a:t>
+            </a:r>
+          </a:p>
+        </p:txBody>
+      </p:sp>
+      <p:sp>
+        <p:nvSpPr>
+          <p:cNvPr id="9" name="TextBox 8"/>
+          <p:cNvSpPr txBox="1"/>
+          <p:nvPr/>
+        </p:nvSpPr>
+        <p:spPr>
+          <a:xfrm>
+            <a:off x="640080" y="2743200"/>
+            <a:ext cx="4480559" cy="320040"/>
+          </a:xfrm>
+          <a:prstGeom prst="rect">
+            <a:avLst/>
+          </a:prstGeom>
+          <a:noFill/>
+        </p:spPr>
+        <p:txBody>
+          <a:bodyPr wrap="square" lIns="0" rIns="0" tIns="18288" bIns="18288" anchor="ctr">
+            <a:spAutoFit/>
+          </a:bodyPr>
+          <a:lstStyle/>
+          <a:p>
+            <a:pPr algn="ctr"/>
+            <a:r>
+              <a:rPr sz="1000" b="0">
+                <a:solidFill>
+                  <a:srgbClr val="475569"/>
+                </a:solidFill>
+                <a:latin typeface="Calibri"/>
+              </a:rPr>
+              <a:t>Linear v1.  Decomposable.  Calibratable.  Onboarding accounts contribute zero.</a:t>
+            </a:r>
+          </a:p>
+        </p:txBody>
+      </p:sp>
+      <p:sp>
+        <p:nvSpPr>
+          <p:cNvPr id="10" name="Rounded Rectangle 9"/>
+          <p:cNvSpPr/>
+          <p:nvPr/>
+        </p:nvSpPr>
+        <p:spPr>
+          <a:xfrm>
+            <a:off x="457200" y="3246120"/>
+            <a:ext cx="2377440" cy="640080"/>
+          </a:xfrm>
+          <a:prstGeom prst="roundRect">
+            <a:avLst>
+              <a:gd name="adj" fmla="val 10000"/>
+            </a:avLst>
+          </a:prstGeom>
+          <a:solidFill>
+            <a:srgbClr val="DBEAFE"/>
+          </a:solidFill>
+          <a:ln>
+            <a:noFill/>
+          </a:ln>
+          <a:effectLst/>
+        </p:spPr>
+        <p:style>
+          <a:lnRef idx="1">
+            <a:schemeClr val="accent1"/>
+          </a:lnRef>
+          <a:fillRef idx="3">
+            <a:schemeClr val="accent1"/>
+          </a:fillRef>
+          <a:effectRef idx="2">
+            <a:schemeClr val="accent1"/>
+          </a:effectRef>
+          <a:fontRef idx="minor">
+            <a:schemeClr val="lt1"/>
+          </a:fontRef>
+        </p:style>
+        <p:txBody>
+          <a:bodyPr rtlCol="0" anchor="ctr"/>
+          <a:lstStyle/>
+          <a:p>
+            <a:pPr algn="ctr"/>
+          </a:p>
+        </p:txBody>
+      </p:sp>
+      <p:sp>
+        <p:nvSpPr>
+          <p:cNvPr id="11" name="TextBox 10"/>
+          <p:cNvSpPr txBox="1"/>
+          <p:nvPr/>
+        </p:nvSpPr>
+        <p:spPr>
+          <a:xfrm>
+            <a:off x="548640" y="3246120"/>
+            <a:ext cx="2194560" cy="640080"/>
+          </a:xfrm>
+          <a:prstGeom prst="rect">
+            <a:avLst/>
+          </a:prstGeom>
+          <a:noFill/>
+        </p:spPr>
+        <p:txBody>
+          <a:bodyPr wrap="square" lIns="45720" rIns="45720" tIns="18288" bIns="18288" anchor="ctr">
+            <a:spAutoFit/>
+          </a:bodyPr>
+          <a:lstStyle/>
+          <a:p>
+            <a:pPr algn="l"/>
+            <a:r>
+              <a:rPr sz="1000" b="1">
+                <a:solidFill>
+                  <a:srgbClr val="0F172A"/>
+                </a:solidFill>
+                <a:latin typeface="Calibri"/>
+              </a:rPr>
+              <a:t>Decomposes by pillar.</a:t>
+            </a:r>
+          </a:p>
+          <a:p>
+            <a:pPr algn="l"/>
+            <a:r>
+              <a:rPr sz="900" b="0">
+                <a:solidFill>
+                  <a:srgbClr val="475569"/>
+                </a:solidFill>
+                <a:latin typeface="Calibri"/>
+              </a:rPr>
+              <a:t>Σ of CR + UM + DM + TH + Floor losses = total unrealized $.</a:t>
+            </a:r>
+          </a:p>
+        </p:txBody>
+      </p:sp>
+      <p:sp>
+        <p:nvSpPr>
+          <p:cNvPr id="12" name="Rounded Rectangle 11"/>
+          <p:cNvSpPr/>
+          <p:nvPr/>
+        </p:nvSpPr>
+        <p:spPr>
+          <a:xfrm>
+            <a:off x="2926080" y="3246120"/>
+            <a:ext cx="2377440" cy="640080"/>
+          </a:xfrm>
+          <a:prstGeom prst="roundRect">
+            <a:avLst>
+              <a:gd name="adj" fmla="val 10000"/>
+            </a:avLst>
+          </a:prstGeom>
+          <a:solidFill>
+            <a:srgbClr val="D1FAE5"/>
+          </a:solidFill>
+          <a:ln>
+            <a:noFill/>
+          </a:ln>
+          <a:effectLst/>
+        </p:spPr>
+        <p:style>
+          <a:lnRef idx="1">
+            <a:schemeClr val="accent1"/>
+          </a:lnRef>
+          <a:fillRef idx="3">
+            <a:schemeClr val="accent1"/>
+          </a:fillRef>
+          <a:effectRef idx="2">
+            <a:schemeClr val="accent1"/>
+          </a:effectRef>
+          <a:fontRef idx="minor">
+            <a:schemeClr val="lt1"/>
+          </a:fontRef>
+        </p:style>
+        <p:txBody>
+          <a:bodyPr rtlCol="0" anchor="ctr"/>
+          <a:lstStyle/>
+          <a:p>
+            <a:pPr algn="ctr"/>
+          </a:p>
+        </p:txBody>
+      </p:sp>
+      <p:sp>
+        <p:nvSpPr>
+          <p:cNvPr id="13" name="TextBox 12"/>
+          <p:cNvSpPr txBox="1"/>
+          <p:nvPr/>
+        </p:nvSpPr>
+        <p:spPr>
+          <a:xfrm>
+            <a:off x="3017520" y="3246120"/>
+            <a:ext cx="2194560" cy="640080"/>
+          </a:xfrm>
+          <a:prstGeom prst="rect">
+            <a:avLst/>
+          </a:prstGeom>
+          <a:noFill/>
+        </p:spPr>
+        <p:txBody>
+          <a:bodyPr wrap="square" lIns="45720" rIns="45720" tIns="18288" bIns="18288" anchor="ctr">
+            <a:spAutoFit/>
+          </a:bodyPr>
+          <a:lstStyle/>
+          <a:p>
+            <a:pPr algn="l"/>
+            <a:r>
+              <a:rPr sz="1000" b="1">
+                <a:solidFill>
+                  <a:srgbClr val="0F172A"/>
+                </a:solidFill>
+                <a:latin typeface="Calibri"/>
+              </a:rPr>
+              <a:t>Sums at every level.</a:t>
+            </a:r>
+          </a:p>
+          <a:p>
+            <a:pPr algn="l"/>
+            <a:r>
+              <a:rPr sz="900" b="0">
+                <a:solidFill>
+                  <a:srgbClr val="475569"/>
+                </a:solidFill>
+                <a:latin typeface="Calibri"/>
+              </a:rPr>
+              <a:t>Account → CSM → Region → Org. Numbers reconcile.</a:t>
+            </a:r>
+          </a:p>
+        </p:txBody>
+      </p:sp>
+      <p:sp>
+        <p:nvSpPr>
+          <p:cNvPr id="14" name="Rounded Rectangle 13"/>
+          <p:cNvSpPr/>
+          <p:nvPr/>
+        </p:nvSpPr>
+        <p:spPr>
+          <a:xfrm>
+            <a:off x="5577840" y="1874519"/>
+            <a:ext cx="6309360" cy="1234440"/>
+          </a:xfrm>
+          <a:prstGeom prst="roundRect">
+            <a:avLst>
+              <a:gd name="adj" fmla="val 10000"/>
+            </a:avLst>
+          </a:prstGeom>
+          <a:solidFill>
+            <a:srgbClr val="F8FAFC"/>
+          </a:solidFill>
+          <a:ln w="9525">
+            <a:solidFill>
+              <a:srgbClr val="94A3B8"/>
+            </a:solidFill>
+          </a:ln>
+          <a:effectLst/>
+        </p:spPr>
+        <p:style>
+          <a:lnRef idx="1">
+            <a:schemeClr val="accent1"/>
+          </a:lnRef>
+          <a:fillRef idx="3">
+            <a:schemeClr val="accent1"/>
+          </a:fillRef>
+          <a:effectRef idx="2">
+            <a:schemeClr val="accent1"/>
+          </a:effectRef>
+          <a:fontRef idx="minor">
+            <a:schemeClr val="lt1"/>
+          </a:fontRef>
+        </p:style>
+        <p:txBody>
+          <a:bodyPr rtlCol="0" anchor="ctr"/>
+          <a:lstStyle/>
+          <a:p>
+            <a:pPr algn="ctr"/>
+          </a:p>
+        </p:txBody>
+      </p:sp>
+      <p:sp>
+        <p:nvSpPr>
+          <p:cNvPr id="15" name="TextBox 14"/>
+          <p:cNvSpPr txBox="1"/>
+          <p:nvPr/>
+        </p:nvSpPr>
+        <p:spPr>
+          <a:xfrm>
+            <a:off x="5760720" y="1947672"/>
+            <a:ext cx="5943600" cy="274320"/>
+          </a:xfrm>
+          <a:prstGeom prst="rect">
+            <a:avLst/>
+          </a:prstGeom>
+          <a:noFill/>
+        </p:spPr>
+        <p:txBody>
+          <a:bodyPr wrap="square" lIns="0" rIns="0" tIns="18288" bIns="18288" anchor="t">
+            <a:spAutoFit/>
+          </a:bodyPr>
+          <a:lstStyle/>
+          <a:p>
+            <a:pPr algn="l"/>
+            <a:r>
+              <a:rPr sz="1000" b="1">
+                <a:solidFill>
+                  <a:srgbClr val="475569"/>
+                </a:solidFill>
+                <a:latin typeface="Calibri"/>
+              </a:rPr>
+              <a:t>THE HEADLINE</a:t>
+            </a:r>
+          </a:p>
+        </p:txBody>
+      </p:sp>
+      <p:sp>
+        <p:nvSpPr>
+          <p:cNvPr id="16" name="Rectangle 15"/>
+          <p:cNvSpPr/>
+          <p:nvPr/>
+        </p:nvSpPr>
+        <p:spPr>
+          <a:xfrm>
+            <a:off x="5760720" y="2377439"/>
+            <a:ext cx="4610209" cy="365760"/>
+          </a:xfrm>
+          <a:prstGeom prst="rect">
+            <a:avLst/>
+          </a:prstGeom>
+          <a:solidFill>
+            <a:srgbClr val="059669"/>
+          </a:solidFill>
+          <a:ln>
+            <a:noFill/>
+          </a:ln>
+          <a:effectLst/>
+        </p:spPr>
+        <p:style>
+          <a:lnRef idx="1">
+            <a:schemeClr val="accent1"/>
+          </a:lnRef>
+          <a:fillRef idx="3">
+            <a:schemeClr val="accent1"/>
+          </a:fillRef>
+          <a:effectRef idx="2">
+            <a:schemeClr val="accent1"/>
+          </a:effectRef>
+          <a:fontRef idx="minor">
+            <a:schemeClr val="lt1"/>
+          </a:fontRef>
+        </p:style>
+        <p:txBody>
+          <a:bodyPr rtlCol="0" anchor="ctr"/>
+          <a:lstStyle/>
+          <a:p>
+            <a:pPr algn="ctr"/>
+          </a:p>
+        </p:txBody>
+      </p:sp>
+      <p:sp>
+        <p:nvSpPr>
+          <p:cNvPr id="17" name="TextBox 16"/>
+          <p:cNvSpPr txBox="1"/>
+          <p:nvPr/>
+        </p:nvSpPr>
+        <p:spPr>
+          <a:xfrm>
+            <a:off x="5760720" y="2377439"/>
+            <a:ext cx="4610209" cy="365760"/>
+          </a:xfrm>
+          <a:prstGeom prst="rect">
+            <a:avLst/>
+          </a:prstGeom>
+          <a:noFill/>
+        </p:spPr>
+        <p:txBody>
+          <a:bodyPr wrap="square" lIns="0" rIns="0" tIns="18288" bIns="18288" anchor="ctr">
+            <a:spAutoFit/>
+          </a:bodyPr>
+          <a:lstStyle/>
+          <a:p>
+            <a:pPr algn="ctr"/>
+            <a:r>
+              <a:rPr sz="1100" b="1">
+                <a:solidFill>
+                  <a:srgbClr val="FFFFFF"/>
+                </a:solidFill>
+                <a:latin typeface="Calibri"/>
+              </a:rPr>
+              <a:t>Realized $226M</a:t>
+            </a:r>
+          </a:p>
+        </p:txBody>
+      </p:sp>
+      <p:sp>
+        <p:nvSpPr>
+          <p:cNvPr id="18" name="Rectangle 17"/>
+          <p:cNvSpPr/>
+          <p:nvPr/>
+        </p:nvSpPr>
+        <p:spPr>
+          <a:xfrm>
+            <a:off x="10370929" y="2377439"/>
+            <a:ext cx="1333390" cy="365760"/>
+          </a:xfrm>
+          <a:prstGeom prst="rect">
+            <a:avLst/>
+          </a:prstGeom>
+          <a:solidFill>
+            <a:srgbClr val="DC2626"/>
+          </a:solidFill>
+          <a:ln>
+            <a:noFill/>
+          </a:ln>
+          <a:effectLst/>
+        </p:spPr>
+        <p:style>
+          <a:lnRef idx="1">
+            <a:schemeClr val="accent1"/>
+          </a:lnRef>
+          <a:fillRef idx="3">
+            <a:schemeClr val="accent1"/>
+          </a:fillRef>
+          <a:effectRef idx="2">
+            <a:schemeClr val="accent1"/>
+          </a:effectRef>
+          <a:fontRef idx="minor">
+            <a:schemeClr val="lt1"/>
+          </a:fontRef>
+        </p:style>
+        <p:txBody>
+          <a:bodyPr rtlCol="0" anchor="ctr"/>
+          <a:lstStyle/>
+          <a:p>
+            <a:pPr algn="ctr"/>
+          </a:p>
+        </p:txBody>
+      </p:sp>
+      <p:sp>
+        <p:nvSpPr>
+          <p:cNvPr id="19" name="TextBox 18"/>
+          <p:cNvSpPr txBox="1"/>
+          <p:nvPr/>
+        </p:nvSpPr>
+        <p:spPr>
+          <a:xfrm>
+            <a:off x="10370929" y="2377439"/>
+            <a:ext cx="1333390" cy="365760"/>
+          </a:xfrm>
+          <a:prstGeom prst="rect">
+            <a:avLst/>
+          </a:prstGeom>
+          <a:noFill/>
+        </p:spPr>
+        <p:txBody>
+          <a:bodyPr wrap="square" lIns="0" rIns="0" tIns="18288" bIns="18288" anchor="ctr">
+            <a:spAutoFit/>
+          </a:bodyPr>
+          <a:lstStyle/>
+          <a:p>
+            <a:pPr algn="ctr"/>
+            <a:r>
+              <a:rPr sz="1100" b="1">
+                <a:solidFill>
+                  <a:srgbClr val="FFFFFF"/>
+                </a:solidFill>
+                <a:latin typeface="Calibri"/>
+              </a:rPr>
+              <a:t>Unrealized $65M</a:t>
+            </a:r>
+          </a:p>
+        </p:txBody>
+      </p:sp>
+      <p:sp>
+        <p:nvSpPr>
+          <p:cNvPr id="20" name="TextBox 19"/>
+          <p:cNvSpPr txBox="1"/>
+          <p:nvPr/>
+        </p:nvSpPr>
+        <p:spPr>
+          <a:xfrm>
+            <a:off x="5760720" y="2788920"/>
+            <a:ext cx="5943600" cy="274320"/>
+          </a:xfrm>
+          <a:prstGeom prst="rect">
+            <a:avLst/>
+          </a:prstGeom>
+          <a:noFill/>
+        </p:spPr>
+        <p:txBody>
+          <a:bodyPr wrap="square" lIns="0" rIns="0" tIns="18288" bIns="18288" anchor="ctr">
+            <a:spAutoFit/>
+          </a:bodyPr>
+          <a:lstStyle/>
+          <a:p>
+            <a:pPr algn="ctr"/>
+            <a:r>
+              <a:rPr sz="1000" b="1">
+                <a:solidFill>
+                  <a:srgbClr val="0F172A"/>
+                </a:solidFill>
+                <a:latin typeface="Calibri"/>
+              </a:rPr>
+              <a:t>$291M ARR  ·  Realizing 78%  ·  $65M unrealized  ·  40 accounts in grace</a:t>
+            </a:r>
+          </a:p>
+        </p:txBody>
+      </p:sp>
+      <p:sp>
+        <p:nvSpPr>
+          <p:cNvPr id="21" name="Rounded Rectangle 20"/>
+          <p:cNvSpPr/>
+          <p:nvPr/>
+        </p:nvSpPr>
+        <p:spPr>
+          <a:xfrm>
+            <a:off x="5577840" y="3246120"/>
+            <a:ext cx="6309360" cy="640080"/>
+          </a:xfrm>
+          <a:prstGeom prst="roundRect">
+            <a:avLst>
+              <a:gd name="adj" fmla="val 10000"/>
+            </a:avLst>
+          </a:prstGeom>
+          <a:solidFill>
+            <a:srgbClr val="F8FAFC"/>
+          </a:solidFill>
+          <a:ln w="9525">
+            <a:solidFill>
+              <a:srgbClr val="94A3B8"/>
+            </a:solidFill>
+          </a:ln>
+          <a:effectLst/>
+        </p:spPr>
+        <p:style>
+          <a:lnRef idx="1">
+            <a:schemeClr val="accent1"/>
+          </a:lnRef>
+          <a:fillRef idx="3">
+            <a:schemeClr val="accent1"/>
+          </a:fillRef>
+          <a:effectRef idx="2">
+            <a:schemeClr val="accent1"/>
+          </a:effectRef>
+          <a:fontRef idx="minor">
+            <a:schemeClr val="lt1"/>
+          </a:fontRef>
+        </p:style>
+        <p:txBody>
+          <a:bodyPr rtlCol="0" anchor="ctr"/>
+          <a:lstStyle/>
+          <a:p>
+            <a:pPr algn="ctr"/>
+          </a:p>
+        </p:txBody>
+      </p:sp>
+      <p:sp>
+        <p:nvSpPr>
+          <p:cNvPr id="22" name="TextBox 21"/>
+          <p:cNvSpPr txBox="1"/>
+          <p:nvPr/>
+        </p:nvSpPr>
+        <p:spPr>
+          <a:xfrm>
+            <a:off x="5669279" y="3291839"/>
+            <a:ext cx="6126480" cy="201168"/>
+          </a:xfrm>
+          <a:prstGeom prst="rect">
+            <a:avLst/>
+          </a:prstGeom>
+          <a:noFill/>
+        </p:spPr>
+        <p:txBody>
+          <a:bodyPr wrap="square" lIns="0" rIns="0" tIns="18288" bIns="18288" anchor="t">
+            <a:spAutoFit/>
+          </a:bodyPr>
+          <a:lstStyle/>
+          <a:p>
+            <a:pPr algn="l"/>
+            <a:r>
+              <a:rPr sz="900" b="1">
+                <a:solidFill>
+                  <a:srgbClr val="475569"/>
+                </a:solidFill>
+                <a:latin typeface="Calibri"/>
+              </a:rPr>
+              <a:t>UNREALIZED $ BY PILLAR (org-wide)</a:t>
+            </a:r>
+          </a:p>
+        </p:txBody>
+      </p:sp>
+      <p:sp>
+        <p:nvSpPr>
+          <p:cNvPr id="23" name="Rectangle 22"/>
+          <p:cNvSpPr/>
+          <p:nvPr/>
+        </p:nvSpPr>
+        <p:spPr>
+          <a:xfrm>
+            <a:off x="5669279" y="3538727"/>
+            <a:ext cx="2024374" cy="274320"/>
+          </a:xfrm>
+          <a:prstGeom prst="rect">
+            <a:avLst/>
+          </a:prstGeom>
+          <a:solidFill>
+            <a:srgbClr val="7C3AED"/>
+          </a:solidFill>
+          <a:ln>
+            <a:noFill/>
+          </a:ln>
+          <a:effectLst/>
+        </p:spPr>
+        <p:style>
+          <a:lnRef idx="1">
+            <a:schemeClr val="accent1"/>
+          </a:lnRef>
+          <a:fillRef idx="3">
+            <a:schemeClr val="accent1"/>
+          </a:fillRef>
+          <a:effectRef idx="2">
+            <a:schemeClr val="accent1"/>
+          </a:effectRef>
+          <a:fontRef idx="minor">
+            <a:schemeClr val="lt1"/>
+          </a:fontRef>
+        </p:style>
+        <p:txBody>
+          <a:bodyPr rtlCol="0" anchor="ctr"/>
+          <a:lstStyle/>
+          <a:p>
+            <a:pPr algn="ctr"/>
+          </a:p>
+        </p:txBody>
+      </p:sp>
+      <p:sp>
+        <p:nvSpPr>
+          <p:cNvPr id="24" name="TextBox 23"/>
+          <p:cNvSpPr txBox="1"/>
+          <p:nvPr/>
+        </p:nvSpPr>
+        <p:spPr>
+          <a:xfrm>
+            <a:off x="5669279" y="3538727"/>
+            <a:ext cx="2024374" cy="274320"/>
+          </a:xfrm>
+          <a:prstGeom prst="rect">
+            <a:avLst/>
+          </a:prstGeom>
+          <a:noFill/>
+        </p:spPr>
+        <p:txBody>
+          <a:bodyPr wrap="square" lIns="0" rIns="0" tIns="18288" bIns="18288" anchor="ctr">
+            <a:spAutoFit/>
+          </a:bodyPr>
+          <a:lstStyle/>
+          <a:p>
+            <a:pPr algn="ctr"/>
+            <a:r>
+              <a:rPr sz="900" b="1">
+                <a:solidFill>
+                  <a:srgbClr val="FFFFFF"/>
+                </a:solidFill>
+                <a:latin typeface="Calibri"/>
+              </a:rPr>
+              <a:t>CR $22M</a:t>
+            </a:r>
+          </a:p>
+        </p:txBody>
+      </p:sp>
+      <p:sp>
+        <p:nvSpPr>
+          <p:cNvPr id="25" name="Rectangle 24"/>
+          <p:cNvSpPr/>
+          <p:nvPr/>
+        </p:nvSpPr>
+        <p:spPr>
+          <a:xfrm>
+            <a:off x="7693654" y="3538727"/>
+            <a:ext cx="1430062" cy="274320"/>
+          </a:xfrm>
+          <a:prstGeom prst="rect">
+            <a:avLst/>
+          </a:prstGeom>
+          <a:solidFill>
+            <a:srgbClr val="0891B2"/>
+          </a:solidFill>
+          <a:ln>
+            <a:noFill/>
+          </a:ln>
+          <a:effectLst/>
+        </p:spPr>
+        <p:style>
+          <a:lnRef idx="1">
+            <a:schemeClr val="accent1"/>
+          </a:lnRef>
+          <a:fillRef idx="3">
+            <a:schemeClr val="accent1"/>
+          </a:fillRef>
+          <a:effectRef idx="2">
+            <a:schemeClr val="accent1"/>
+          </a:effectRef>
+          <a:fontRef idx="minor">
+            <a:schemeClr val="lt1"/>
+          </a:fontRef>
+        </p:style>
+        <p:txBody>
+          <a:bodyPr rtlCol="0" anchor="ctr"/>
+          <a:lstStyle/>
+          <a:p>
+            <a:pPr algn="ctr"/>
+          </a:p>
+        </p:txBody>
+      </p:sp>
+      <p:sp>
+        <p:nvSpPr>
+          <p:cNvPr id="26" name="TextBox 25"/>
+          <p:cNvSpPr txBox="1"/>
+          <p:nvPr/>
+        </p:nvSpPr>
+        <p:spPr>
+          <a:xfrm>
+            <a:off x="7693654" y="3538727"/>
+            <a:ext cx="1430062" cy="274320"/>
+          </a:xfrm>
+          <a:prstGeom prst="rect">
+            <a:avLst/>
+          </a:prstGeom>
+          <a:noFill/>
+        </p:spPr>
+        <p:txBody>
+          <a:bodyPr wrap="square" lIns="0" rIns="0" tIns="18288" bIns="18288" anchor="ctr">
+            <a:spAutoFit/>
+          </a:bodyPr>
+          <a:lstStyle/>
+          <a:p>
+            <a:pPr algn="ctr"/>
+            <a:r>
+              <a:rPr sz="900" b="1">
+                <a:solidFill>
+                  <a:srgbClr val="FFFFFF"/>
+                </a:solidFill>
+                <a:latin typeface="Calibri"/>
+              </a:rPr>
+              <a:t>UM $15M</a:t>
+            </a:r>
+          </a:p>
+        </p:txBody>
+      </p:sp>
+      <p:sp>
+        <p:nvSpPr>
+          <p:cNvPr id="27" name="Rectangle 26"/>
+          <p:cNvSpPr/>
+          <p:nvPr/>
+        </p:nvSpPr>
+        <p:spPr>
+          <a:xfrm>
+            <a:off x="9123717" y="3538727"/>
+            <a:ext cx="686540" cy="274320"/>
+          </a:xfrm>
+          <a:prstGeom prst="rect">
+            <a:avLst/>
+          </a:prstGeom>
+          <a:solidFill>
+            <a:srgbClr val="65A30D"/>
+          </a:solidFill>
+          <a:ln>
+            <a:noFill/>
+          </a:ln>
+          <a:effectLst/>
+        </p:spPr>
+        <p:style>
+          <a:lnRef idx="1">
+            <a:schemeClr val="accent1"/>
+          </a:lnRef>
+          <a:fillRef idx="3">
+            <a:schemeClr val="accent1"/>
+          </a:fillRef>
+          <a:effectRef idx="2">
+            <a:schemeClr val="accent1"/>
+          </a:effectRef>
+          <a:fontRef idx="minor">
+            <a:schemeClr val="lt1"/>
+          </a:fontRef>
+        </p:style>
+        <p:txBody>
+          <a:bodyPr rtlCol="0" anchor="ctr"/>
+          <a:lstStyle/>
+          <a:p>
+            <a:pPr algn="ctr"/>
+          </a:p>
+        </p:txBody>
+      </p:sp>
+      <p:sp>
+        <p:nvSpPr>
+          <p:cNvPr id="28" name="TextBox 27"/>
+          <p:cNvSpPr txBox="1"/>
+          <p:nvPr/>
+        </p:nvSpPr>
+        <p:spPr>
+          <a:xfrm>
+            <a:off x="9123717" y="3538727"/>
+            <a:ext cx="686540" cy="274320"/>
+          </a:xfrm>
+          <a:prstGeom prst="rect">
+            <a:avLst/>
+          </a:prstGeom>
+          <a:noFill/>
+        </p:spPr>
+        <p:txBody>
+          <a:bodyPr wrap="square" lIns="0" rIns="0" tIns="18288" bIns="18288" anchor="ctr">
+            <a:spAutoFit/>
+          </a:bodyPr>
+          <a:lstStyle/>
+          <a:p>
+            <a:pPr algn="ctr"/>
+            <a:r>
+              <a:rPr sz="900" b="1">
+                <a:solidFill>
+                  <a:srgbClr val="FFFFFF"/>
+                </a:solidFill>
+                <a:latin typeface="Calibri"/>
+              </a:rPr>
+              <a:t>DM $7M</a:t>
+            </a:r>
+          </a:p>
+        </p:txBody>
+      </p:sp>
+      <p:sp>
+        <p:nvSpPr>
+          <p:cNvPr id="29" name="Rectangle 28"/>
+          <p:cNvSpPr/>
+          <p:nvPr/>
+        </p:nvSpPr>
+        <p:spPr>
+          <a:xfrm>
+            <a:off x="9810257" y="3538727"/>
+            <a:ext cx="1531301" cy="274320"/>
+          </a:xfrm>
+          <a:prstGeom prst="rect">
+            <a:avLst/>
+          </a:prstGeom>
+          <a:solidFill>
+            <a:srgbClr val="DC2626"/>
+          </a:solidFill>
+          <a:ln>
+            <a:noFill/>
+          </a:ln>
+          <a:effectLst/>
+        </p:spPr>
+        <p:style>
+          <a:lnRef idx="1">
+            <a:schemeClr val="accent1"/>
+          </a:lnRef>
+          <a:fillRef idx="3">
+            <a:schemeClr val="accent1"/>
+          </a:fillRef>
+          <a:effectRef idx="2">
+            <a:schemeClr val="accent1"/>
+          </a:effectRef>
+          <a:fontRef idx="minor">
+            <a:schemeClr val="lt1"/>
+          </a:fontRef>
+        </p:style>
+        <p:txBody>
+          <a:bodyPr rtlCol="0" anchor="ctr"/>
+          <a:lstStyle/>
+          <a:p>
+            <a:pPr algn="ctr"/>
+          </a:p>
+        </p:txBody>
+      </p:sp>
+      <p:sp>
+        <p:nvSpPr>
+          <p:cNvPr id="30" name="TextBox 29"/>
+          <p:cNvSpPr txBox="1"/>
+          <p:nvPr/>
+        </p:nvSpPr>
+        <p:spPr>
+          <a:xfrm>
+            <a:off x="9810257" y="3538727"/>
+            <a:ext cx="1531301" cy="274320"/>
+          </a:xfrm>
+          <a:prstGeom prst="rect">
+            <a:avLst/>
+          </a:prstGeom>
+          <a:noFill/>
+        </p:spPr>
+        <p:txBody>
+          <a:bodyPr wrap="square" lIns="0" rIns="0" tIns="18288" bIns="18288" anchor="ctr">
+            <a:spAutoFit/>
+          </a:bodyPr>
+          <a:lstStyle/>
+          <a:p>
+            <a:pPr algn="ctr"/>
+            <a:r>
+              <a:rPr sz="900" b="1">
+                <a:solidFill>
+                  <a:srgbClr val="FFFFFF"/>
+                </a:solidFill>
+                <a:latin typeface="Calibri"/>
+              </a:rPr>
+              <a:t>TH $16M</a:t>
+            </a:r>
+          </a:p>
+        </p:txBody>
+      </p:sp>
+      <p:sp>
+        <p:nvSpPr>
+          <p:cNvPr id="31" name="Rectangle 30"/>
+          <p:cNvSpPr/>
+          <p:nvPr/>
+        </p:nvSpPr>
+        <p:spPr>
+          <a:xfrm>
+            <a:off x="11341559" y="3538727"/>
+            <a:ext cx="454200" cy="274320"/>
+          </a:xfrm>
+          <a:prstGeom prst="rect">
+            <a:avLst/>
+          </a:prstGeom>
+          <a:solidFill>
+            <a:srgbClr val="92400E"/>
+          </a:solidFill>
+          <a:ln>
+            <a:noFill/>
+          </a:ln>
+          <a:effectLst/>
+        </p:spPr>
+        <p:style>
+          <a:lnRef idx="1">
+            <a:schemeClr val="accent1"/>
+          </a:lnRef>
+          <a:fillRef idx="3">
+            <a:schemeClr val="accent1"/>
+          </a:fillRef>
+          <a:effectRef idx="2">
+            <a:schemeClr val="accent1"/>
+          </a:effectRef>
+          <a:fontRef idx="minor">
+            <a:schemeClr val="lt1"/>
+          </a:fontRef>
+        </p:style>
+        <p:txBody>
+          <a:bodyPr rtlCol="0" anchor="ctr"/>
+          <a:lstStyle/>
+          <a:p>
+            <a:pPr algn="ctr"/>
+          </a:p>
+        </p:txBody>
+      </p:sp>
+      <p:sp>
+        <p:nvSpPr>
+          <p:cNvPr id="32" name="TextBox 31"/>
+          <p:cNvSpPr txBox="1"/>
+          <p:nvPr/>
+        </p:nvSpPr>
+        <p:spPr>
+          <a:xfrm>
+            <a:off x="11341559" y="3538727"/>
+            <a:ext cx="454200" cy="274320"/>
+          </a:xfrm>
+          <a:prstGeom prst="rect">
+            <a:avLst/>
+          </a:prstGeom>
+          <a:noFill/>
+        </p:spPr>
+        <p:txBody>
+          <a:bodyPr wrap="square" lIns="0" rIns="0" tIns="18288" bIns="18288" anchor="ctr">
+            <a:spAutoFit/>
+          </a:bodyPr>
+          <a:lstStyle/>
+          <a:p>
+            <a:pPr algn="ctr"/>
+            <a:r>
+              <a:rPr sz="900" b="1">
+                <a:solidFill>
+                  <a:srgbClr val="FFFFFF"/>
+                </a:solidFill>
+                <a:latin typeface="Calibri"/>
+              </a:rPr>
+              <a:t>Fl $5M</a:t>
+            </a:r>
+          </a:p>
+        </p:txBody>
+      </p:sp>
+      <p:sp>
+        <p:nvSpPr>
+          <p:cNvPr id="33" name="Rounded Rectangle 32"/>
+          <p:cNvSpPr/>
+          <p:nvPr/>
+        </p:nvSpPr>
+        <p:spPr>
+          <a:xfrm>
+            <a:off x="457200" y="4572000"/>
+            <a:ext cx="3718560" cy="1417320"/>
+          </a:xfrm>
+          <a:prstGeom prst="roundRect">
+            <a:avLst>
+              <a:gd name="adj" fmla="val 8000"/>
+            </a:avLst>
+          </a:prstGeom>
+          <a:solidFill>
+            <a:srgbClr val="F8FAFC"/>
+          </a:solidFill>
+          <a:ln w="25400">
+            <a:solidFill>
+              <a:srgbClr val="059669"/>
+            </a:solidFill>
+          </a:ln>
+          <a:effectLst/>
+        </p:spPr>
+        <p:style>
+          <a:lnRef idx="1">
+            <a:schemeClr val="accent1"/>
+          </a:lnRef>
+          <a:fillRef idx="3">
+            <a:schemeClr val="accent1"/>
+          </a:fillRef>
+          <a:effectRef idx="2">
+            <a:schemeClr val="accent1"/>
+          </a:effectRef>
+          <a:fontRef idx="minor">
+            <a:schemeClr val="lt1"/>
+          </a:fontRef>
+        </p:style>
+        <p:txBody>
+          <a:bodyPr rtlCol="0" anchor="ctr"/>
+          <a:lstStyle/>
+          <a:p>
+            <a:pPr algn="ctr"/>
+          </a:p>
+        </p:txBody>
+      </p:sp>
+      <p:sp>
+        <p:nvSpPr>
+          <p:cNvPr id="34" name="Rounded Rectangle 33"/>
+          <p:cNvSpPr/>
+          <p:nvPr/>
+        </p:nvSpPr>
+        <p:spPr>
+          <a:xfrm>
+            <a:off x="594360" y="4681728"/>
+            <a:ext cx="1463040" cy="292608"/>
+          </a:xfrm>
+          <a:prstGeom prst="roundRect">
+            <a:avLst>
+              <a:gd name="adj" fmla="val 30000"/>
+            </a:avLst>
+          </a:prstGeom>
+          <a:solidFill>
+            <a:srgbClr val="059669"/>
+          </a:solidFill>
+          <a:ln>
+            <a:noFill/>
+          </a:ln>
+          <a:effectLst/>
+        </p:spPr>
+        <p:style>
+          <a:lnRef idx="1">
+            <a:schemeClr val="accent1"/>
+          </a:lnRef>
+          <a:fillRef idx="3">
+            <a:schemeClr val="accent1"/>
+          </a:fillRef>
+          <a:effectRef idx="2">
+            <a:schemeClr val="accent1"/>
+          </a:effectRef>
+          <a:fontRef idx="minor">
+            <a:schemeClr val="lt1"/>
+          </a:fontRef>
+        </p:style>
+        <p:txBody>
+          <a:bodyPr rtlCol="0" anchor="ctr"/>
+          <a:lstStyle/>
+          <a:p>
+            <a:pPr algn="ctr"/>
+          </a:p>
+        </p:txBody>
+      </p:sp>
+      <p:sp>
+        <p:nvSpPr>
+          <p:cNvPr id="35" name="TextBox 34"/>
+          <p:cNvSpPr txBox="1"/>
+          <p:nvPr/>
+        </p:nvSpPr>
+        <p:spPr>
+          <a:xfrm>
+            <a:off x="594360" y="4681728"/>
+            <a:ext cx="1463040" cy="292608"/>
+          </a:xfrm>
+          <a:prstGeom prst="rect">
+            <a:avLst/>
+          </a:prstGeom>
+          <a:noFill/>
+        </p:spPr>
+        <p:txBody>
+          <a:bodyPr wrap="square" lIns="0" rIns="0" tIns="18288" bIns="18288" anchor="ctr">
+            <a:spAutoFit/>
+          </a:bodyPr>
+          <a:lstStyle/>
+          <a:p>
+            <a:pPr algn="ctr"/>
+            <a:r>
+              <a:rPr sz="1100" b="1">
+                <a:solidFill>
+                  <a:srgbClr val="FFFFFF"/>
+                </a:solidFill>
+                <a:latin typeface="Calibri"/>
+              </a:rPr>
+              <a:t>AVRI</a:t>
+            </a:r>
+          </a:p>
+        </p:txBody>
+      </p:sp>
+      <p:sp>
+        <p:nvSpPr>
+          <p:cNvPr id="36" name="TextBox 35"/>
+          <p:cNvSpPr txBox="1"/>
+          <p:nvPr/>
+        </p:nvSpPr>
+        <p:spPr>
+          <a:xfrm>
+            <a:off x="2148840" y="4681728"/>
+            <a:ext cx="1889759" cy="292608"/>
+          </a:xfrm>
+          <a:prstGeom prst="rect">
+            <a:avLst/>
+          </a:prstGeom>
+          <a:noFill/>
+        </p:spPr>
+        <p:txBody>
+          <a:bodyPr wrap="square" lIns="0" rIns="0" tIns="18288" bIns="18288" anchor="ctr">
+            <a:spAutoFit/>
+          </a:bodyPr>
+          <a:lstStyle/>
+          <a:p>
+            <a:pPr algn="l"/>
+            <a:r>
+              <a:rPr sz="900" b="1">
+                <a:solidFill>
+                  <a:srgbClr val="059669"/>
+                </a:solidFill>
+                <a:latin typeface="Calibri"/>
+              </a:rPr>
+              <a:t>QUALITY OF EXECUTION</a:t>
+            </a:r>
+          </a:p>
+        </p:txBody>
+      </p:sp>
+      <p:sp>
+        <p:nvSpPr>
+          <p:cNvPr id="37" name="TextBox 36"/>
+          <p:cNvSpPr txBox="1"/>
+          <p:nvPr/>
+        </p:nvSpPr>
+        <p:spPr>
+          <a:xfrm>
+            <a:off x="640080" y="5074920"/>
+            <a:ext cx="3352800" cy="822960"/>
+          </a:xfrm>
+          <a:prstGeom prst="rect">
+            <a:avLst/>
+          </a:prstGeom>
+          <a:noFill/>
+        </p:spPr>
+        <p:txBody>
+          <a:bodyPr wrap="square" lIns="45720" rIns="45720" tIns="18288" bIns="18288" anchor="t">
+            <a:spAutoFit/>
+          </a:bodyPr>
+          <a:lstStyle/>
+          <a:p>
+            <a:pPr algn="l"/>
+            <a:r>
+              <a:rPr sz="1000" b="0">
+                <a:solidFill>
+                  <a:srgbClr val="0F172A"/>
+                </a:solidFill>
+                <a:latin typeface="Calibri"/>
+              </a:rPr>
+              <a:t>Segment-fair, comp-grade. Used for CSM evaluation, performance review, and the case-study disagreements with naive CHS.</a:t>
+            </a:r>
+          </a:p>
+        </p:txBody>
+      </p:sp>
+      <p:sp>
+        <p:nvSpPr>
+          <p:cNvPr id="38" name="Rounded Rectangle 37"/>
+          <p:cNvSpPr/>
+          <p:nvPr/>
+        </p:nvSpPr>
+        <p:spPr>
+          <a:xfrm>
+            <a:off x="4312920" y="4572000"/>
+            <a:ext cx="3718560" cy="1417320"/>
+          </a:xfrm>
+          <a:prstGeom prst="roundRect">
+            <a:avLst>
+              <a:gd name="adj" fmla="val 8000"/>
+            </a:avLst>
+          </a:prstGeom>
+          <a:solidFill>
+            <a:srgbClr val="F8FAFC"/>
+          </a:solidFill>
+          <a:ln w="25400">
+            <a:solidFill>
+              <a:srgbClr val="DC2626"/>
+            </a:solidFill>
+          </a:ln>
+          <a:effectLst/>
+        </p:spPr>
+        <p:style>
+          <a:lnRef idx="1">
+            <a:schemeClr val="accent1"/>
+          </a:lnRef>
+          <a:fillRef idx="3">
+            <a:schemeClr val="accent1"/>
+          </a:fillRef>
+          <a:effectRef idx="2">
+            <a:schemeClr val="accent1"/>
+          </a:effectRef>
+          <a:fontRef idx="minor">
+            <a:schemeClr val="lt1"/>
+          </a:fontRef>
+        </p:style>
+        <p:txBody>
+          <a:bodyPr rtlCol="0" anchor="ctr"/>
+          <a:lstStyle/>
+          <a:p>
+            <a:pPr algn="ctr"/>
+          </a:p>
+        </p:txBody>
+      </p:sp>
+      <p:sp>
+        <p:nvSpPr>
+          <p:cNvPr id="39" name="Rounded Rectangle 38"/>
+          <p:cNvSpPr/>
+          <p:nvPr/>
+        </p:nvSpPr>
+        <p:spPr>
+          <a:xfrm>
+            <a:off x="4450080" y="4681728"/>
+            <a:ext cx="1463040" cy="292608"/>
+          </a:xfrm>
+          <a:prstGeom prst="roundRect">
+            <a:avLst>
+              <a:gd name="adj" fmla="val 30000"/>
+            </a:avLst>
+          </a:prstGeom>
+          <a:solidFill>
+            <a:srgbClr val="DC2626"/>
+          </a:solidFill>
+          <a:ln>
+            <a:noFill/>
+          </a:ln>
+          <a:effectLst/>
+        </p:spPr>
+        <p:style>
+          <a:lnRef idx="1">
+            <a:schemeClr val="accent1"/>
+          </a:lnRef>
+          <a:fillRef idx="3">
+            <a:schemeClr val="accent1"/>
+          </a:fillRef>
+          <a:effectRef idx="2">
+            <a:schemeClr val="accent1"/>
+          </a:effectRef>
+          <a:fontRef idx="minor">
+            <a:schemeClr val="lt1"/>
+          </a:fontRef>
+        </p:style>
+        <p:txBody>
+          <a:bodyPr rtlCol="0" anchor="ctr"/>
+          <a:lstStyle/>
+          <a:p>
+            <a:pPr algn="ctr"/>
+          </a:p>
+        </p:txBody>
+      </p:sp>
+      <p:sp>
+        <p:nvSpPr>
+          <p:cNvPr id="40" name="TextBox 39"/>
+          <p:cNvSpPr txBox="1"/>
+          <p:nvPr/>
+        </p:nvSpPr>
+        <p:spPr>
+          <a:xfrm>
+            <a:off x="4450080" y="4681728"/>
+            <a:ext cx="1463040" cy="292608"/>
+          </a:xfrm>
+          <a:prstGeom prst="rect">
+            <a:avLst/>
+          </a:prstGeom>
+          <a:noFill/>
+        </p:spPr>
+        <p:txBody>
+          <a:bodyPr wrap="square" lIns="0" rIns="0" tIns="18288" bIns="18288" anchor="ctr">
+            <a:spAutoFit/>
+          </a:bodyPr>
+          <a:lstStyle/>
+          <a:p>
+            <a:pPr algn="ctr"/>
+            <a:r>
+              <a:rPr sz="1100" b="1">
+                <a:solidFill>
+                  <a:srgbClr val="FFFFFF"/>
+                </a:solidFill>
+                <a:latin typeface="Calibri"/>
+              </a:rPr>
+              <a:t>RV</a:t>
+            </a:r>
+          </a:p>
+        </p:txBody>
+      </p:sp>
+      <p:sp>
+        <p:nvSpPr>
+          <p:cNvPr id="41" name="TextBox 40"/>
+          <p:cNvSpPr txBox="1"/>
+          <p:nvPr/>
+        </p:nvSpPr>
+        <p:spPr>
+          <a:xfrm>
+            <a:off x="6004560" y="4681728"/>
+            <a:ext cx="1889759" cy="292608"/>
+          </a:xfrm>
+          <a:prstGeom prst="rect">
+            <a:avLst/>
+          </a:prstGeom>
+          <a:noFill/>
+        </p:spPr>
+        <p:txBody>
+          <a:bodyPr wrap="square" lIns="0" rIns="0" tIns="18288" bIns="18288" anchor="ctr">
+            <a:spAutoFit/>
+          </a:bodyPr>
+          <a:lstStyle/>
+          <a:p>
+            <a:pPr algn="l"/>
+            <a:r>
+              <a:rPr sz="900" b="1">
+                <a:solidFill>
+                  <a:srgbClr val="DC2626"/>
+                </a:solidFill>
+                <a:latin typeface="Calibri"/>
+              </a:rPr>
+              <a:t>VALUE AT STAKE</a:t>
+            </a:r>
+          </a:p>
+        </p:txBody>
+      </p:sp>
+      <p:sp>
+        <p:nvSpPr>
+          <p:cNvPr id="42" name="TextBox 41"/>
+          <p:cNvSpPr txBox="1"/>
+          <p:nvPr/>
+        </p:nvSpPr>
+        <p:spPr>
+          <a:xfrm>
+            <a:off x="4495800" y="5074920"/>
+            <a:ext cx="3352800" cy="822960"/>
+          </a:xfrm>
+          <a:prstGeom prst="rect">
+            <a:avLst/>
+          </a:prstGeom>
+          <a:noFill/>
+        </p:spPr>
+        <p:txBody>
+          <a:bodyPr wrap="square" lIns="45720" rIns="45720" tIns="18288" bIns="18288" anchor="t">
+            <a:spAutoFit/>
+          </a:bodyPr>
+          <a:lstStyle/>
+          <a:p>
+            <a:pPr algn="l"/>
+            <a:r>
+              <a:rPr sz="1000" b="0">
+                <a:solidFill>
+                  <a:srgbClr val="0F172A"/>
+                </a:solidFill>
+                <a:latin typeface="Calibri"/>
+              </a:rPr>
+              <a:t>Scale-aware. Used for executive risk concentration: "where are dollars leaking?" Drives the dashboard's headline and pillar heatmap.</a:t>
+            </a:r>
+          </a:p>
+        </p:txBody>
+      </p:sp>
+      <p:sp>
+        <p:nvSpPr>
+          <p:cNvPr id="43" name="Rounded Rectangle 42"/>
+          <p:cNvSpPr/>
+          <p:nvPr/>
+        </p:nvSpPr>
+        <p:spPr>
+          <a:xfrm>
+            <a:off x="8168640" y="4572000"/>
+            <a:ext cx="3718560" cy="1417320"/>
+          </a:xfrm>
+          <a:prstGeom prst="roundRect">
+            <a:avLst>
+              <a:gd name="adj" fmla="val 8000"/>
+            </a:avLst>
+          </a:prstGeom>
+          <a:solidFill>
+            <a:srgbClr val="F8FAFC"/>
+          </a:solidFill>
+          <a:ln w="25400">
+            <a:solidFill>
+              <a:srgbClr val="EA580C"/>
+            </a:solidFill>
+          </a:ln>
+          <a:effectLst/>
+        </p:spPr>
+        <p:style>
+          <a:lnRef idx="1">
+            <a:schemeClr val="accent1"/>
+          </a:lnRef>
+          <a:fillRef idx="3">
+            <a:schemeClr val="accent1"/>
+          </a:fillRef>
+          <a:effectRef idx="2">
+            <a:schemeClr val="accent1"/>
+          </a:effectRef>
+          <a:fontRef idx="minor">
+            <a:schemeClr val="lt1"/>
+          </a:fontRef>
+        </p:style>
+        <p:txBody>
+          <a:bodyPr rtlCol="0" anchor="ctr"/>
+          <a:lstStyle/>
+          <a:p>
+            <a:pPr algn="ctr"/>
+          </a:p>
+        </p:txBody>
+      </p:sp>
+      <p:sp>
+        <p:nvSpPr>
+          <p:cNvPr id="44" name="Rounded Rectangle 43"/>
+          <p:cNvSpPr/>
+          <p:nvPr/>
+        </p:nvSpPr>
+        <p:spPr>
+          <a:xfrm>
+            <a:off x="8305800" y="4681728"/>
+            <a:ext cx="1463040" cy="292608"/>
+          </a:xfrm>
+          <a:prstGeom prst="roundRect">
+            <a:avLst>
+              <a:gd name="adj" fmla="val 30000"/>
+            </a:avLst>
+          </a:prstGeom>
+          <a:solidFill>
+            <a:srgbClr val="EA580C"/>
+          </a:solidFill>
+          <a:ln>
+            <a:noFill/>
+          </a:ln>
+          <a:effectLst/>
+        </p:spPr>
+        <p:style>
+          <a:lnRef idx="1">
+            <a:schemeClr val="accent1"/>
+          </a:lnRef>
+          <a:fillRef idx="3">
+            <a:schemeClr val="accent1"/>
+          </a:fillRef>
+          <a:effectRef idx="2">
+            <a:schemeClr val="accent1"/>
+          </a:effectRef>
+          <a:fontRef idx="minor">
+            <a:schemeClr val="lt1"/>
+          </a:fontRef>
+        </p:style>
+        <p:txBody>
+          <a:bodyPr rtlCol="0" anchor="ctr"/>
+          <a:lstStyle/>
+          <a:p>
+            <a:pPr algn="ctr"/>
+          </a:p>
+        </p:txBody>
+      </p:sp>
+      <p:sp>
+        <p:nvSpPr>
+          <p:cNvPr id="45" name="TextBox 44"/>
+          <p:cNvSpPr txBox="1"/>
+          <p:nvPr/>
+        </p:nvSpPr>
+        <p:spPr>
+          <a:xfrm>
+            <a:off x="8305800" y="4681728"/>
+            <a:ext cx="1463040" cy="292608"/>
+          </a:xfrm>
+          <a:prstGeom prst="rect">
+            <a:avLst/>
+          </a:prstGeom>
+          <a:noFill/>
+        </p:spPr>
+        <p:txBody>
+          <a:bodyPr wrap="square" lIns="0" rIns="0" tIns="18288" bIns="18288" anchor="ctr">
+            <a:spAutoFit/>
+          </a:bodyPr>
+          <a:lstStyle/>
+          <a:p>
+            <a:pPr algn="ctr"/>
+            <a:r>
+              <a:rPr sz="1100" b="1">
+                <a:solidFill>
+                  <a:srgbClr val="FFFFFF"/>
+                </a:solidFill>
+                <a:latin typeface="Calibri"/>
+              </a:rPr>
+              <a:t>UNREALIZED $</a:t>
+            </a:r>
+          </a:p>
+        </p:txBody>
+      </p:sp>
+      <p:sp>
+        <p:nvSpPr>
+          <p:cNvPr id="46" name="TextBox 45"/>
+          <p:cNvSpPr txBox="1"/>
+          <p:nvPr/>
+        </p:nvSpPr>
+        <p:spPr>
+          <a:xfrm>
+            <a:off x="9860280" y="4681728"/>
+            <a:ext cx="1889759" cy="292608"/>
+          </a:xfrm>
+          <a:prstGeom prst="rect">
+            <a:avLst/>
+          </a:prstGeom>
+          <a:noFill/>
+        </p:spPr>
+        <p:txBody>
+          <a:bodyPr wrap="square" lIns="0" rIns="0" tIns="18288" bIns="18288" anchor="ctr">
+            <a:spAutoFit/>
+          </a:bodyPr>
+          <a:lstStyle/>
+          <a:p>
+            <a:pPr algn="l"/>
+            <a:r>
+              <a:rPr sz="900" b="1">
+                <a:solidFill>
+                  <a:srgbClr val="EA580C"/>
+                </a:solidFill>
+                <a:latin typeface="Calibri"/>
+              </a:rPr>
+              <a:t>OPERATIONAL TRIAGE</a:t>
+            </a:r>
+          </a:p>
+        </p:txBody>
+      </p:sp>
+      <p:sp>
+        <p:nvSpPr>
+          <p:cNvPr id="47" name="TextBox 46"/>
+          <p:cNvSpPr txBox="1"/>
+          <p:nvPr/>
+        </p:nvSpPr>
+        <p:spPr>
+          <a:xfrm>
+            <a:off x="8351520" y="5074920"/>
+            <a:ext cx="3352800" cy="822960"/>
+          </a:xfrm>
+          <a:prstGeom prst="rect">
+            <a:avLst/>
+          </a:prstGeom>
+          <a:noFill/>
+        </p:spPr>
+        <p:txBody>
+          <a:bodyPr wrap="square" lIns="45720" rIns="45720" tIns="18288" bIns="18288" anchor="t">
+            <a:spAutoFit/>
+          </a:bodyPr>
+          <a:lstStyle/>
+          <a:p>
+            <a:pPr algn="l"/>
+            <a:r>
+              <a:rPr sz="1000" b="0">
+                <a:solidFill>
+                  <a:srgbClr val="0F172A"/>
+                </a:solidFill>
+                <a:latin typeface="Calibri"/>
+              </a:rPr>
+              <a:t>Account-level. Used by individual CSMs to triage their book: "which 5 accounts have the most $ at risk this week?"</a:t>
+            </a:r>
+          </a:p>
+        </p:txBody>
+      </p:sp>
+      <p:sp>
+        <p:nvSpPr>
+          <p:cNvPr id="48" name="Rounded Rectangle 47"/>
+          <p:cNvSpPr/>
+          <p:nvPr/>
+        </p:nvSpPr>
+        <p:spPr>
+          <a:xfrm>
+            <a:off x="457200" y="6080760"/>
+            <a:ext cx="11430000" cy="365760"/>
+          </a:xfrm>
+          <a:prstGeom prst="roundRect">
+            <a:avLst>
+              <a:gd name="adj" fmla="val 10000"/>
+            </a:avLst>
+          </a:prstGeom>
+          <a:solidFill>
+            <a:srgbClr val="FFEDD5"/>
+          </a:solidFill>
+          <a:ln w="12700">
+            <a:solidFill>
+              <a:srgbClr val="EA580C"/>
+            </a:solidFill>
+          </a:ln>
+          <a:effectLst/>
+        </p:spPr>
+        <p:style>
+          <a:lnRef idx="1">
+            <a:schemeClr val="accent1"/>
+          </a:lnRef>
+          <a:fillRef idx="3">
+            <a:schemeClr val="accent1"/>
+          </a:fillRef>
+          <a:effectRef idx="2">
+            <a:schemeClr val="accent1"/>
+          </a:effectRef>
+          <a:fontRef idx="minor">
+            <a:schemeClr val="lt1"/>
+          </a:fontRef>
+        </p:style>
+        <p:txBody>
+          <a:bodyPr rtlCol="0" anchor="ctr"/>
+          <a:lstStyle/>
+          <a:p>
+            <a:pPr algn="ctr"/>
+          </a:p>
+        </p:txBody>
+      </p:sp>
+      <p:sp>
+        <p:nvSpPr>
+          <p:cNvPr id="49" name="TextBox 48"/>
+          <p:cNvSpPr txBox="1"/>
+          <p:nvPr/>
+        </p:nvSpPr>
+        <p:spPr>
+          <a:xfrm>
+            <a:off x="457200" y="6080760"/>
+            <a:ext cx="11430000" cy="365760"/>
+          </a:xfrm>
+          <a:prstGeom prst="rect">
+            <a:avLst/>
+          </a:prstGeom>
+          <a:noFill/>
+        </p:spPr>
+        <p:txBody>
+          <a:bodyPr wrap="square" tIns="18288" bIns="18288" anchor="ctr">
+            <a:spAutoFit/>
+          </a:bodyPr>
+          <a:lstStyle/>
+          <a:p>
+            <a:pPr algn="ctr"/>
+            <a:r>
+              <a:rPr sz="1100" b="1">
+                <a:solidFill>
+                  <a:srgbClr val="78350F"/>
+                </a:solidFill>
+                <a:latin typeface="Calibri"/>
+              </a:rPr>
+              <a:t>Why linear, not quadratic? Decomposability + honesty (no curvature without renewal data) + calibratability for v3.</a:t>
+            </a:r>
+          </a:p>
+        </p:txBody>
+      </p:sp>
+      <p:sp>
+        <p:nvSpPr>
+          <p:cNvPr id="50" name="TextBox 49"/>
+          <p:cNvSpPr txBox="1"/>
+          <p:nvPr/>
+        </p:nvSpPr>
+        <p:spPr>
+          <a:xfrm>
+            <a:off x="365760" y="6492240"/>
+            <a:ext cx="5486400" cy="274320"/>
+          </a:xfrm>
+          <a:prstGeom prst="rect">
+            <a:avLst/>
+          </a:prstGeom>
+          <a:noFill/>
+        </p:spPr>
+        <p:txBody>
+          <a:bodyPr wrap="square" lIns="0" rIns="0" tIns="18288" bIns="18288" anchor="ctr">
+            <a:spAutoFit/>
+          </a:bodyPr>
+          <a:lstStyle/>
+          <a:p>
+            <a:pPr algn="l"/>
+            <a:r>
+              <a:rPr sz="900" b="0">
+                <a:solidFill>
+                  <a:srgbClr val="94A3B8"/>
+                </a:solidFill>
+                <a:latin typeface="Calibri"/>
+              </a:rPr>
+              <a:t>GCS North Star · AVRI Proposal · Rami Ibrahimi</a:t>
+            </a:r>
+          </a:p>
+        </p:txBody>
+      </p:sp>
+      <p:sp>
+        <p:nvSpPr>
+          <p:cNvPr id="51" name="TextBox 50"/>
+          <p:cNvSpPr txBox="1"/>
+          <p:nvPr/>
+        </p:nvSpPr>
+        <p:spPr>
+          <a:xfrm>
+            <a:off x="11338560" y="6492240"/>
+            <a:ext cx="640080" cy="274320"/>
+          </a:xfrm>
+          <a:prstGeom prst="rect">
+            <a:avLst/>
+          </a:prstGeom>
+          <a:noFill/>
+        </p:spPr>
+        <p:txBody>
+          <a:bodyPr wrap="square" lIns="0" rIns="0" tIns="18288" bIns="18288" anchor="ctr">
+            <a:spAutoFit/>
+          </a:bodyPr>
+          <a:lstStyle/>
+          <a:p>
+            <a:pPr algn="r"/>
+            <a:r>
+              <a:rPr sz="900" b="0">
+                <a:solidFill>
+                  <a:srgbClr val="94A3B8"/>
+                </a:solidFill>
+                <a:latin typeface="Calibri"/>
+              </a:rPr>
+              <a:t>5 / 8</a:t>
+            </a:r>
+          </a:p>
+        </p:txBody>
+      </p:sp>
+    </p:spTree>
+  </p:cSld>
+  <p:clrMapOvr>
+    <a:masterClrMapping/>
+  </p:clrMapOvr>
+</p:sld>
+</file>
+
+<file path=ppt/slides/slide6.xml><?xml version="1.0" encoding="utf-8"?>
 <p:sld xmlns:a="http://schemas.openxmlformats.org/drawingml/2006/main" xmlns:r="http://schemas.openxmlformats.org/officeDocument/2006/relationships" xmlns:p="http://schemas.openxmlformats.org/presentationml/2006/main">
   <p:cSld name="Slide 5">
     <p:bg>
@@ -8876,6 +12102,10 @@
             <a:prstDash val="solid"/>
           </a:ln>
         </p:spPr>
+        <p:txBody>
+          <a:bodyPr/>
+          <a:p/>
+        </p:txBody>
       </p:sp>
       <p:sp>
         <p:nvSpPr>
@@ -8898,19 +12128,17 @@
           <a:bodyPr wrap="square" rtlCol="0" anchor="ctr"/>
           <a:lstStyle/>
           <a:p>
-            <a:pPr indent="0" marL="0">
+            <a:pPr indent="0" marL="0" algn="l">
               <a:buNone/>
             </a:pPr>
             <a:r>
-              <a:rPr lang="en-US" sz="1000" b="1" spc="400" kern="0" dirty="0">
+              <a:rPr sz="1100" b="1">
                 <a:solidFill>
                   <a:srgbClr val="EA580C"/>
                 </a:solidFill>
-                <a:latin typeface="Calibri" pitchFamily="34" charset="0"/>
-                <a:ea typeface="Calibri" pitchFamily="34" charset="-122"/>
-                <a:cs typeface="Calibri" pitchFamily="34" charset="-120"/>
-              </a:rPr>
-              <a:t>05 · THE PROOF</a:t>
+                <a:latin typeface="Calibri"/>
+              </a:rPr>
+              <a:t>06 · THE PROOF</a:t>
             </a:r>
             <a:endParaRPr lang="en-US" sz="1000" dirty="0"/>
           </a:p>
@@ -8937,19 +12165,17 @@
           <a:bodyPr wrap="square" lIns="0" tIns="0" rIns="0" bIns="0" rtlCol="0" anchor="ctr"/>
           <a:lstStyle/>
           <a:p>
-            <a:pPr indent="0" marL="0">
+            <a:pPr indent="0" marL="0" algn="l">
               <a:buNone/>
             </a:pPr>
             <a:r>
-              <a:rPr lang="en-US" sz="3000" b="1" dirty="0">
+              <a:rPr sz="2200" b="1">
                 <a:solidFill>
                   <a:srgbClr val="0F172A"/>
                 </a:solidFill>
-                <a:latin typeface="Calibri" pitchFamily="34" charset="0"/>
-                <a:ea typeface="Calibri" pitchFamily="34" charset="-122"/>
-                <a:cs typeface="Calibri" pitchFamily="34" charset="-120"/>
-              </a:rPr>
-              <a:t>Three accounts where AVRI gets it right and existing metrics don't.</a:t>
+                <a:latin typeface="Calibri"/>
+              </a:rPr>
+              <a:t>Three disagreements with naive CHS, each validating a different design choice.</a:t>
             </a:r>
             <a:endParaRPr lang="en-US" sz="3000" dirty="0"/>
           </a:p>
@@ -8976,19 +12202,17 @@
           <a:bodyPr wrap="square" rtlCol="0" anchor="ctr"/>
           <a:lstStyle/>
           <a:p>
-            <a:pPr indent="0" marL="0">
+            <a:pPr indent="0" marL="0" algn="l">
               <a:buNone/>
             </a:pPr>
             <a:r>
-              <a:rPr lang="en-US" sz="1300" dirty="0">
-                <a:solidFill>
-                  <a:srgbClr val="334155"/>
-                </a:solidFill>
-                <a:latin typeface="Calibri" pitchFamily="34" charset="0"/>
-                <a:ea typeface="Calibri" pitchFamily="34" charset="-122"/>
-                <a:cs typeface="Calibri" pitchFamily="34" charset="-120"/>
-              </a:rPr>
-              <a:t>Inductive validation: the data was generated to be realistic, not to flatter the metric. AVRI's edge cases are visible on real accounts. Then we'll switch to the live dashboard.</a:t>
+              <a:rPr sz="1100" b="0">
+                <a:solidFill>
+                  <a:srgbClr val="475569"/>
+                </a:solidFill>
+                <a:latin typeface="Calibri"/>
+              </a:rPr>
+              <a:t>Three representative cells from the AVRI × CHS matrix on slide 3. Each off-diagonal disagreement validates a specific AVRI mechanism: floor rule, decay-weighted TH, and consumption-dominant weighting.</a:t>
             </a:r>
             <a:endParaRPr lang="en-US" sz="1300" dirty="0"/>
           </a:p>
@@ -9018,6 +12242,10 @@
             <a:prstDash val="solid"/>
           </a:ln>
         </p:spPr>
+        <p:txBody>
+          <a:bodyPr/>
+          <a:p/>
+        </p:txBody>
       </p:sp>
       <p:sp>
         <p:nvSpPr>
@@ -9043,6 +12271,10 @@
             <a:prstDash val="solid"/>
           </a:ln>
         </p:spPr>
+        <p:txBody>
+          <a:bodyPr/>
+          <a:p/>
+        </p:txBody>
       </p:sp>
       <p:sp>
         <p:nvSpPr>
@@ -9058,7 +12290,9 @@
           <a:prstGeom prst="rect">
             <a:avLst/>
           </a:prstGeom>
-          <a:noFill/>
+          <a:solidFill>
+            <a:srgbClr val="D97706"/>
+          </a:solidFill>
           <a:ln/>
         </p:spPr>
         <p:txBody>
@@ -9069,15 +12303,13 @@
               <a:buNone/>
             </a:pPr>
             <a:r>
-              <a:rPr lang="en-US" sz="1200" b="1" spc="500" kern="0" dirty="0">
+              <a:rPr sz="1600" b="1">
                 <a:solidFill>
                   <a:srgbClr val="FFFFFF"/>
                 </a:solidFill>
-                <a:latin typeface="Calibri" pitchFamily="34" charset="0"/>
-                <a:ea typeface="Calibri" pitchFamily="34" charset="-122"/>
-                <a:cs typeface="Calibri" pitchFamily="34" charset="-120"/>
-              </a:rPr>
-              <a:t>SHELFWARE</a:t>
+                <a:latin typeface="Calibri"/>
+              </a:rPr>
+              <a:t>FLOOR RULE FIRES</a:t>
             </a:r>
             <a:endParaRPr lang="en-US" sz="1200" dirty="0"/>
           </a:p>
@@ -9104,19 +12336,17 @@
           <a:bodyPr wrap="square" lIns="0" tIns="0" rIns="0" bIns="0" rtlCol="0" anchor="ctr"/>
           <a:lstStyle/>
           <a:p>
-            <a:pPr indent="0" marL="0">
+            <a:pPr indent="0" marL="0" algn="l">
               <a:buNone/>
             </a:pPr>
             <a:r>
-              <a:rPr lang="en-US" sz="1800" b="1" dirty="0">
+              <a:rPr sz="1800" b="1">
                 <a:solidFill>
                   <a:srgbClr val="0F172A"/>
                 </a:solidFill>
-                <a:latin typeface="Consolas" pitchFamily="34" charset="0"/>
-                <a:ea typeface="Consolas" pitchFamily="34" charset="-122"/>
-                <a:cs typeface="Consolas" pitchFamily="34" charset="-120"/>
-              </a:rPr>
-              <a:t>ACC-00202</a:t>
+                <a:latin typeface="Calibri"/>
+              </a:rPr>
+              <a:t>ACC-00026</a:t>
             </a:r>
             <a:endParaRPr lang="en-US" sz="1800" dirty="0"/>
           </a:p>
@@ -9143,19 +12373,17 @@
           <a:bodyPr wrap="square" lIns="0" tIns="0" rIns="0" bIns="0" rtlCol="0" anchor="ctr"/>
           <a:lstStyle/>
           <a:p>
-            <a:pPr indent="0" marL="0">
+            <a:pPr indent="0" marL="0" algn="l">
               <a:buNone/>
             </a:pPr>
             <a:r>
-              <a:rPr lang="en-US" sz="1100" dirty="0">
-                <a:solidFill>
-                  <a:srgbClr val="64748B"/>
-                </a:solidFill>
-                <a:latin typeface="Calibri" pitchFamily="34" charset="0"/>
-                <a:ea typeface="Calibri" pitchFamily="34" charset="-122"/>
-                <a:cs typeface="Calibri" pitchFamily="34" charset="-120"/>
-              </a:rPr>
-              <a:t>Financial Services  ·  $3.5M ARR</a:t>
+              <a:rPr sz="1000" b="0">
+                <a:solidFill>
+                  <a:srgbClr val="475569"/>
+                </a:solidFill>
+                <a:latin typeface="Calibri"/>
+              </a:rPr>
+              <a:t>Healthcare  ·  $165K ARR  ·  130 days</a:t>
             </a:r>
             <a:endParaRPr lang="en-US" sz="1100" dirty="0"/>
           </a:p>
@@ -9183,6 +12411,10 @@
             <a:prstDash val="solid"/>
           </a:ln>
         </p:spPr>
+        <p:txBody>
+          <a:bodyPr/>
+          <a:p/>
+        </p:txBody>
       </p:sp>
       <p:sp>
         <p:nvSpPr>
@@ -9205,19 +12437,17 @@
           <a:bodyPr wrap="square" lIns="0" tIns="0" rIns="0" bIns="0" rtlCol="0" anchor="ctr"/>
           <a:lstStyle/>
           <a:p>
-            <a:pPr indent="0" marL="0">
+            <a:pPr indent="0" marL="0" algn="l">
               <a:buNone/>
             </a:pPr>
             <a:r>
-              <a:rPr lang="en-US" sz="1000" dirty="0">
-                <a:solidFill>
-                  <a:srgbClr val="64748B"/>
-                </a:solidFill>
-                <a:latin typeface="Calibri" pitchFamily="34" charset="0"/>
-                <a:ea typeface="Calibri" pitchFamily="34" charset="-122"/>
-                <a:cs typeface="Calibri" pitchFamily="34" charset="-120"/>
-              </a:rPr>
-              <a:t>Naive CHS:</a:t>
+              <a:rPr sz="1150" b="1">
+                <a:solidFill>
+                  <a:srgbClr val="059669"/>
+                </a:solidFill>
+                <a:latin typeface="Calibri"/>
+              </a:rPr>
+              <a:t>CHS  78  (green)</a:t>
             </a:r>
             <a:endParaRPr lang="en-US" sz="1000" dirty="0"/>
           </a:p>
@@ -9244,19 +12474,17 @@
           <a:bodyPr wrap="square" lIns="0" tIns="0" rIns="0" bIns="0" rtlCol="0" anchor="ctr"/>
           <a:lstStyle/>
           <a:p>
-            <a:pPr indent="0" marL="0">
+            <a:pPr indent="0" marL="0" algn="l">
               <a:buNone/>
             </a:pPr>
             <a:r>
-              <a:rPr lang="en-US" sz="1200" b="1" dirty="0">
-                <a:solidFill>
-                  <a:srgbClr val="D97706"/>
-                </a:solidFill>
-                <a:latin typeface="Calibri" pitchFamily="34" charset="0"/>
-                <a:ea typeface="Calibri" pitchFamily="34" charset="-122"/>
-                <a:cs typeface="Calibri" pitchFamily="34" charset="-120"/>
-              </a:rPr>
-              <a:t>40 (yellow)</a:t>
+              <a:rPr sz="900" b="0">
+                <a:solidFill>
+                  <a:srgbClr val="94A3B8"/>
+                </a:solidFill>
+                <a:latin typeface="Calibri"/>
+              </a:rPr>
+              <a:t/>
             </a:r>
             <a:endParaRPr lang="en-US" sz="1200" dirty="0"/>
           </a:p>
@@ -9283,19 +12511,17 @@
           <a:bodyPr wrap="square" lIns="0" tIns="0" rIns="0" bIns="0" rtlCol="0" anchor="ctr"/>
           <a:lstStyle/>
           <a:p>
-            <a:pPr indent="0" marL="0">
+            <a:pPr indent="0" marL="0" algn="l">
               <a:buNone/>
             </a:pPr>
             <a:r>
-              <a:rPr lang="en-US" sz="1000" dirty="0">
-                <a:solidFill>
-                  <a:srgbClr val="64748B"/>
-                </a:solidFill>
-                <a:latin typeface="Calibri" pitchFamily="34" charset="0"/>
-                <a:ea typeface="Calibri" pitchFamily="34" charset="-122"/>
-                <a:cs typeface="Calibri" pitchFamily="34" charset="-120"/>
-              </a:rPr>
-              <a:t>AVRI:</a:t>
+              <a:rPr sz="1150" b="1">
+                <a:solidFill>
+                  <a:srgbClr val="D97706"/>
+                </a:solidFill>
+                <a:latin typeface="Calibri"/>
+              </a:rPr>
+              <a:t>AVRI  50  (yellow)</a:t>
             </a:r>
             <a:endParaRPr lang="en-US" sz="1000" dirty="0"/>
           </a:p>
@@ -9322,19 +12548,17 @@
           <a:bodyPr wrap="square" lIns="0" tIns="0" rIns="0" bIns="0" rtlCol="0" anchor="ctr"/>
           <a:lstStyle/>
           <a:p>
-            <a:pPr indent="0" marL="0">
+            <a:pPr indent="0" marL="0" algn="l">
               <a:buNone/>
             </a:pPr>
             <a:r>
-              <a:rPr lang="en-US" sz="1200" b="1" dirty="0">
-                <a:solidFill>
-                  <a:srgbClr val="DC2626"/>
-                </a:solidFill>
-                <a:latin typeface="Calibri" pitchFamily="34" charset="0"/>
-                <a:ea typeface="Calibri" pitchFamily="34" charset="-122"/>
-                <a:cs typeface="Calibri" pitchFamily="34" charset="-120"/>
-              </a:rPr>
-              <a:t>19.5 (red)</a:t>
+              <a:rPr sz="900" b="0">
+                <a:solidFill>
+                  <a:srgbClr val="94A3B8"/>
+                </a:solidFill>
+                <a:latin typeface="Calibri"/>
+              </a:rPr>
+              <a:t/>
             </a:r>
             <a:endParaRPr lang="en-US" sz="1200" dirty="0"/>
           </a:p>
@@ -9364,6 +12588,10 @@
             <a:prstDash val="solid"/>
           </a:ln>
         </p:spPr>
+        <p:txBody>
+          <a:bodyPr/>
+          <a:p/>
+        </p:txBody>
       </p:sp>
       <p:sp>
         <p:nvSpPr>
@@ -9386,21 +12614,55 @@
           <a:bodyPr wrap="square" lIns="0" tIns="0" rIns="0" bIns="0" rtlCol="0" anchor="ctr"/>
           <a:lstStyle/>
           <a:p>
-            <a:pPr indent="0" marL="0">
+            <a:pPr indent="0" marL="0" algn="l">
               <a:buNone/>
             </a:pPr>
             <a:r>
-              <a:rPr lang="en-US" sz="1050" i="1" dirty="0">
-                <a:solidFill>
-                  <a:srgbClr val="334155"/>
-                </a:solidFill>
-                <a:latin typeface="Calibri" pitchFamily="34" charset="0"/>
-                <a:ea typeface="Calibri" pitchFamily="34" charset="-122"/>
-                <a:cs typeface="Calibri" pitchFamily="34" charset="-120"/>
-              </a:rPr>
-              <a:t>0 active days in 90. Latest health color was green from earlier in the year, naive CHS is fooled by it. AVRI sees through.</a:t>
+              <a:rPr sz="900" b="1">
+                <a:solidFill>
+                  <a:srgbClr val="475569"/>
+                </a:solidFill>
+                <a:latin typeface="Calibri"/>
+              </a:rPr>
+              <a:t>Cell: AVRI Yellow × CHS Green</a:t>
             </a:r>
             <a:endParaRPr lang="en-US" sz="1050" dirty="0"/>
+          </a:p>
+          <a:p>
+            <a:pPr algn="l"/>
+            <a:r>
+              <a:rPr sz="900" b="1">
+                <a:solidFill>
+                  <a:srgbClr val="EA580C"/>
+                </a:solidFill>
+                <a:latin typeface="Calibri"/>
+              </a:rPr>
+              <a:t>RV $83K  ·  Unrealized $83K (50% of book on this account)</a:t>
+            </a:r>
+          </a:p>
+          <a:p>
+            <a:pPr algn="l"/>
+            <a:r>
+              <a:rPr sz="400" b="0">
+                <a:solidFill>
+                  <a:srgbClr val="475569"/>
+                </a:solidFill>
+                <a:latin typeface="Calibri"/>
+              </a:rPr>
+              <a:t/>
+            </a:r>
+          </a:p>
+          <a:p>
+            <a:pPr algn="l"/>
+            <a:r>
+              <a:rPr sz="1050" b="0">
+                <a:solidFill>
+                  <a:srgbClr val="0F172A"/>
+                </a:solidFill>
+                <a:latin typeface="Calibri"/>
+              </a:rPr>
+              <a:t>All three consumption pillars at 100, but TH = 28.5. Floor rule caps AVRI at 50 — refuses to let usage paper over a tech-health crisis. Without the rule, AVRI = 86 (Green). CHS has no analog.</a:t>
+            </a:r>
           </a:p>
         </p:txBody>
       </p:sp>
@@ -9428,6 +12690,10 @@
             <a:prstDash val="solid"/>
           </a:ln>
         </p:spPr>
+        <p:txBody>
+          <a:bodyPr/>
+          <a:p/>
+        </p:txBody>
       </p:sp>
       <p:sp>
         <p:nvSpPr>
@@ -9453,6 +12719,10 @@
             <a:prstDash val="solid"/>
           </a:ln>
         </p:spPr>
+        <p:txBody>
+          <a:bodyPr/>
+          <a:p/>
+        </p:txBody>
       </p:sp>
       <p:sp>
         <p:nvSpPr>
@@ -9468,7 +12738,9 @@
           <a:prstGeom prst="rect">
             <a:avLst/>
           </a:prstGeom>
-          <a:noFill/>
+          <a:solidFill>
+            <a:srgbClr val="059669"/>
+          </a:solidFill>
           <a:ln/>
         </p:spPr>
         <p:txBody>
@@ -9479,15 +12751,13 @@
               <a:buNone/>
             </a:pPr>
             <a:r>
-              <a:rPr lang="en-US" sz="1200" b="1" spc="500" kern="0" dirty="0">
+              <a:rPr sz="1600" b="1">
                 <a:solidFill>
                   <a:srgbClr val="FFFFFF"/>
                 </a:solidFill>
-                <a:latin typeface="Calibri" pitchFamily="34" charset="0"/>
-                <a:ea typeface="Calibri" pitchFamily="34" charset="-122"/>
-                <a:cs typeface="Calibri" pitchFamily="34" charset="-120"/>
-              </a:rPr>
-              <a:t>FLOOR RULE</a:t>
+                <a:latin typeface="Calibri"/>
+              </a:rPr>
+              <a:t>DECAY WEIGHTING</a:t>
             </a:r>
             <a:endParaRPr lang="en-US" sz="1200" dirty="0"/>
           </a:p>
@@ -9514,19 +12784,17 @@
           <a:bodyPr wrap="square" lIns="0" tIns="0" rIns="0" bIns="0" rtlCol="0" anchor="ctr"/>
           <a:lstStyle/>
           <a:p>
-            <a:pPr indent="0" marL="0">
+            <a:pPr indent="0" marL="0" algn="l">
               <a:buNone/>
             </a:pPr>
             <a:r>
-              <a:rPr lang="en-US" sz="1800" b="1" dirty="0">
+              <a:rPr sz="1800" b="1">
                 <a:solidFill>
                   <a:srgbClr val="0F172A"/>
                 </a:solidFill>
-                <a:latin typeface="Consolas" pitchFamily="34" charset="0"/>
-                <a:ea typeface="Consolas" pitchFamily="34" charset="-122"/>
-                <a:cs typeface="Consolas" pitchFamily="34" charset="-120"/>
-              </a:rPr>
-              <a:t>ACC-00226</a:t>
+                <a:latin typeface="Calibri"/>
+              </a:rPr>
+              <a:t>ACC-00876</a:t>
             </a:r>
             <a:endParaRPr lang="en-US" sz="1800" dirty="0"/>
           </a:p>
@@ -9553,19 +12821,17 @@
           <a:bodyPr wrap="square" lIns="0" tIns="0" rIns="0" bIns="0" rtlCol="0" anchor="ctr"/>
           <a:lstStyle/>
           <a:p>
-            <a:pPr indent="0" marL="0">
+            <a:pPr indent="0" marL="0" algn="l">
               <a:buNone/>
             </a:pPr>
             <a:r>
-              <a:rPr lang="en-US" sz="1100" dirty="0">
-                <a:solidFill>
-                  <a:srgbClr val="64748B"/>
-                </a:solidFill>
-                <a:latin typeface="Calibri" pitchFamily="34" charset="0"/>
-                <a:ea typeface="Calibri" pitchFamily="34" charset="-122"/>
-                <a:cs typeface="Calibri" pitchFamily="34" charset="-120"/>
-              </a:rPr>
-              <a:t>Technology  ·  $8M ARR</a:t>
+              <a:rPr sz="1000" b="0">
+                <a:solidFill>
+                  <a:srgbClr val="475569"/>
+                </a:solidFill>
+                <a:latin typeface="Calibri"/>
+              </a:rPr>
+              <a:t>Manufacturing  ·  $246K ARR  ·  215 days</a:t>
             </a:r>
             <a:endParaRPr lang="en-US" sz="1100" dirty="0"/>
           </a:p>
@@ -9593,6 +12859,10 @@
             <a:prstDash val="solid"/>
           </a:ln>
         </p:spPr>
+        <p:txBody>
+          <a:bodyPr/>
+          <a:p/>
+        </p:txBody>
       </p:sp>
       <p:sp>
         <p:nvSpPr>
@@ -9615,19 +12885,17 @@
           <a:bodyPr wrap="square" lIns="0" tIns="0" rIns="0" bIns="0" rtlCol="0" anchor="ctr"/>
           <a:lstStyle/>
           <a:p>
-            <a:pPr indent="0" marL="0">
+            <a:pPr indent="0" marL="0" algn="l">
               <a:buNone/>
             </a:pPr>
             <a:r>
-              <a:rPr lang="en-US" sz="1000" dirty="0">
-                <a:solidFill>
-                  <a:srgbClr val="64748B"/>
-                </a:solidFill>
-                <a:latin typeface="Calibri" pitchFamily="34" charset="0"/>
-                <a:ea typeface="Calibri" pitchFamily="34" charset="-122"/>
-                <a:cs typeface="Calibri" pitchFamily="34" charset="-120"/>
-              </a:rPr>
-              <a:t>Naive CHS:</a:t>
+              <a:rPr sz="1150" b="1">
+                <a:solidFill>
+                  <a:srgbClr val="D97706"/>
+                </a:solidFill>
+                <a:latin typeface="Calibri"/>
+              </a:rPr>
+              <a:t>CHS  57  (yellow)</a:t>
             </a:r>
             <a:endParaRPr lang="en-US" sz="1000" dirty="0"/>
           </a:p>
@@ -9654,19 +12922,17 @@
           <a:bodyPr wrap="square" lIns="0" tIns="0" rIns="0" bIns="0" rtlCol="0" anchor="ctr"/>
           <a:lstStyle/>
           <a:p>
-            <a:pPr indent="0" marL="0">
+            <a:pPr indent="0" marL="0" algn="l">
               <a:buNone/>
             </a:pPr>
             <a:r>
-              <a:rPr lang="en-US" sz="1200" b="1" dirty="0">
-                <a:solidFill>
-                  <a:srgbClr val="D97706"/>
-                </a:solidFill>
-                <a:latin typeface="Calibri" pitchFamily="34" charset="0"/>
-                <a:ea typeface="Calibri" pitchFamily="34" charset="-122"/>
-                <a:cs typeface="Calibri" pitchFamily="34" charset="-120"/>
-              </a:rPr>
-              <a:t>70 (yellow)</a:t>
+              <a:rPr sz="900" b="0">
+                <a:solidFill>
+                  <a:srgbClr val="94A3B8"/>
+                </a:solidFill>
+                <a:latin typeface="Calibri"/>
+              </a:rPr>
+              <a:t/>
             </a:r>
             <a:endParaRPr lang="en-US" sz="1200" dirty="0"/>
           </a:p>
@@ -9693,19 +12959,17 @@
           <a:bodyPr wrap="square" lIns="0" tIns="0" rIns="0" bIns="0" rtlCol="0" anchor="ctr"/>
           <a:lstStyle/>
           <a:p>
-            <a:pPr indent="0" marL="0">
+            <a:pPr indent="0" marL="0" algn="l">
               <a:buNone/>
             </a:pPr>
             <a:r>
-              <a:rPr lang="en-US" sz="1000" dirty="0">
-                <a:solidFill>
-                  <a:srgbClr val="64748B"/>
-                </a:solidFill>
-                <a:latin typeface="Calibri" pitchFamily="34" charset="0"/>
-                <a:ea typeface="Calibri" pitchFamily="34" charset="-122"/>
-                <a:cs typeface="Calibri" pitchFamily="34" charset="-120"/>
-              </a:rPr>
-              <a:t>AVRI:</a:t>
+              <a:rPr sz="1150" b="1">
+                <a:solidFill>
+                  <a:srgbClr val="059669"/>
+                </a:solidFill>
+                <a:latin typeface="Calibri"/>
+              </a:rPr>
+              <a:t>AVRI  92  (green)</a:t>
             </a:r>
             <a:endParaRPr lang="en-US" sz="1000" dirty="0"/>
           </a:p>
@@ -9732,19 +12996,17 @@
           <a:bodyPr wrap="square" lIns="0" tIns="0" rIns="0" bIns="0" rtlCol="0" anchor="ctr"/>
           <a:lstStyle/>
           <a:p>
-            <a:pPr indent="0" marL="0">
+            <a:pPr indent="0" marL="0" algn="l">
               <a:buNone/>
             </a:pPr>
             <a:r>
-              <a:rPr lang="en-US" sz="1200" b="1" dirty="0">
-                <a:solidFill>
-                  <a:srgbClr val="D97706"/>
-                </a:solidFill>
-                <a:latin typeface="Calibri" pitchFamily="34" charset="0"/>
-                <a:ea typeface="Calibri" pitchFamily="34" charset="-122"/>
-                <a:cs typeface="Calibri" pitchFamily="34" charset="-120"/>
-              </a:rPr>
-              <a:t>50 (yellow)</a:t>
+              <a:rPr sz="900" b="0">
+                <a:solidFill>
+                  <a:srgbClr val="94A3B8"/>
+                </a:solidFill>
+                <a:latin typeface="Calibri"/>
+              </a:rPr>
+              <a:t/>
             </a:r>
             <a:endParaRPr lang="en-US" sz="1200" dirty="0"/>
           </a:p>
@@ -9774,6 +13036,10 @@
             <a:prstDash val="solid"/>
           </a:ln>
         </p:spPr>
+        <p:txBody>
+          <a:bodyPr/>
+          <a:p/>
+        </p:txBody>
       </p:sp>
       <p:sp>
         <p:nvSpPr>
@@ -9796,21 +13062,55 @@
           <a:bodyPr wrap="square" lIns="0" tIns="0" rIns="0" bIns="0" rtlCol="0" anchor="ctr"/>
           <a:lstStyle/>
           <a:p>
-            <a:pPr indent="0" marL="0">
+            <a:pPr indent="0" marL="0" algn="l">
               <a:buNone/>
             </a:pPr>
             <a:r>
-              <a:rPr lang="en-US" sz="1050" i="1" dirty="0">
-                <a:solidFill>
-                  <a:srgbClr val="334155"/>
-                </a:solidFill>
-                <a:latin typeface="Calibri" pitchFamily="34" charset="0"/>
-                <a:ea typeface="Calibri" pitchFamily="34" charset="-122"/>
-                <a:cs typeface="Calibri" pitchFamily="34" charset="-120"/>
-              </a:rPr>
-              <a:t>Consumption looks great (130% util, all 4 pillars high) BUT TH = 15. Without floor rule AVRI = 86 (green). Rule correctly caps it.</a:t>
+              <a:rPr sz="900" b="1">
+                <a:solidFill>
+                  <a:srgbClr val="475569"/>
+                </a:solidFill>
+                <a:latin typeface="Calibri"/>
+              </a:rPr>
+              <a:t>Cell: AVRI Green × CHS Yellow</a:t>
             </a:r>
             <a:endParaRPr lang="en-US" sz="1050" dirty="0"/>
+          </a:p>
+          <a:p>
+            <a:pPr algn="l"/>
+            <a:r>
+              <a:rPr sz="900" b="1">
+                <a:solidFill>
+                  <a:srgbClr val="EA580C"/>
+                </a:solidFill>
+                <a:latin typeface="Calibri"/>
+              </a:rPr>
+              <a:t>RV $227K  ·  Unrealized $19K (the easy-win contrast)</a:t>
+            </a:r>
+          </a:p>
+          <a:p>
+            <a:pPr algn="l"/>
+            <a:r>
+              <a:rPr sz="400" b="0">
+                <a:solidFill>
+                  <a:srgbClr val="475569"/>
+                </a:solidFill>
+                <a:latin typeface="Calibri"/>
+              </a:rPr>
+              <a:t/>
+            </a:r>
+          </a:p>
+          <a:p>
+            <a:pPr algn="l"/>
+            <a:r>
+              <a:rPr sz="1050" b="0">
+                <a:solidFill>
+                  <a:srgbClr val="0F172A"/>
+                </a:solidFill>
+                <a:latin typeface="Calibri"/>
+              </a:rPr>
+              <a:t>All pillars high; latest health color happened to be red (one bad week). CHS over-penalizes recency. AVRI's 90-day decay-weighted TH (≈61) sees the trend, not a single data point.</a:t>
+            </a:r>
           </a:p>
         </p:txBody>
       </p:sp>
@@ -9838,6 +13138,10 @@
             <a:prstDash val="solid"/>
           </a:ln>
         </p:spPr>
+        <p:txBody>
+          <a:bodyPr/>
+          <a:p/>
+        </p:txBody>
       </p:sp>
       <p:sp>
         <p:nvSpPr>
@@ -9863,6 +13167,10 @@
             <a:prstDash val="solid"/>
           </a:ln>
         </p:spPr>
+        <p:txBody>
+          <a:bodyPr/>
+          <a:p/>
+        </p:txBody>
       </p:sp>
       <p:sp>
         <p:nvSpPr>
@@ -9878,7 +13186,9 @@
           <a:prstGeom prst="rect">
             <a:avLst/>
           </a:prstGeom>
-          <a:noFill/>
+          <a:solidFill>
+            <a:srgbClr val="DC2626"/>
+          </a:solidFill>
           <a:ln/>
         </p:spPr>
         <p:txBody>
@@ -9889,15 +13199,13 @@
               <a:buNone/>
             </a:pPr>
             <a:r>
-              <a:rPr lang="en-US" sz="1200" b="1" spc="500" kern="0" dirty="0">
+              <a:rPr sz="1600" b="1">
                 <a:solidFill>
                   <a:srgbClr val="FFFFFF"/>
                 </a:solidFill>
-                <a:latin typeface="Calibri" pitchFamily="34" charset="0"/>
-                <a:ea typeface="Calibri" pitchFamily="34" charset="-122"/>
-                <a:cs typeface="Calibri" pitchFamily="34" charset="-120"/>
-              </a:rPr>
-              <a:t>REWARDED</a:t>
+                <a:latin typeface="Calibri"/>
+              </a:rPr>
+              <a:t>AVRI ESCALATES</a:t>
             </a:r>
             <a:endParaRPr lang="en-US" sz="1200" dirty="0"/>
           </a:p>
@@ -9924,19 +13232,17 @@
           <a:bodyPr wrap="square" lIns="0" tIns="0" rIns="0" bIns="0" rtlCol="0" anchor="ctr"/>
           <a:lstStyle/>
           <a:p>
-            <a:pPr indent="0" marL="0">
+            <a:pPr indent="0" marL="0" algn="l">
               <a:buNone/>
             </a:pPr>
             <a:r>
-              <a:rPr lang="en-US" sz="1800" b="1" dirty="0">
+              <a:rPr sz="1800" b="1">
                 <a:solidFill>
                   <a:srgbClr val="0F172A"/>
                 </a:solidFill>
-                <a:latin typeface="Consolas" pitchFamily="34" charset="0"/>
-                <a:ea typeface="Consolas" pitchFamily="34" charset="-122"/>
-                <a:cs typeface="Consolas" pitchFamily="34" charset="-120"/>
-              </a:rPr>
-              <a:t>ACC-00876</a:t>
+                <a:latin typeface="Calibri"/>
+              </a:rPr>
+              <a:t>ACC-00298</a:t>
             </a:r>
             <a:endParaRPr lang="en-US" sz="1800" dirty="0"/>
           </a:p>
@@ -9963,19 +13269,17 @@
           <a:bodyPr wrap="square" lIns="0" tIns="0" rIns="0" bIns="0" rtlCol="0" anchor="ctr"/>
           <a:lstStyle/>
           <a:p>
-            <a:pPr indent="0" marL="0">
+            <a:pPr indent="0" marL="0" algn="l">
               <a:buNone/>
             </a:pPr>
             <a:r>
-              <a:rPr lang="en-US" sz="1100" dirty="0">
-                <a:solidFill>
-                  <a:srgbClr val="64748B"/>
-                </a:solidFill>
-                <a:latin typeface="Calibri" pitchFamily="34" charset="0"/>
-                <a:ea typeface="Calibri" pitchFamily="34" charset="-122"/>
-                <a:cs typeface="Calibri" pitchFamily="34" charset="-120"/>
-              </a:rPr>
-              <a:t>Manufacturing  ·  $246K ARR</a:t>
+              <a:rPr sz="1000" b="0">
+                <a:solidFill>
+                  <a:srgbClr val="475569"/>
+                </a:solidFill>
+                <a:latin typeface="Calibri"/>
+              </a:rPr>
+              <a:t>Financial Services  ·  $325K ARR  ·  332 days</a:t>
             </a:r>
             <a:endParaRPr lang="en-US" sz="1100" dirty="0"/>
           </a:p>
@@ -10003,6 +13307,10 @@
             <a:prstDash val="solid"/>
           </a:ln>
         </p:spPr>
+        <p:txBody>
+          <a:bodyPr/>
+          <a:p/>
+        </p:txBody>
       </p:sp>
       <p:sp>
         <p:nvSpPr>
@@ -10025,19 +13333,17 @@
           <a:bodyPr wrap="square" lIns="0" tIns="0" rIns="0" bIns="0" rtlCol="0" anchor="ctr"/>
           <a:lstStyle/>
           <a:p>
-            <a:pPr indent="0" marL="0">
+            <a:pPr indent="0" marL="0" algn="l">
               <a:buNone/>
             </a:pPr>
             <a:r>
-              <a:rPr lang="en-US" sz="1000" dirty="0">
-                <a:solidFill>
-                  <a:srgbClr val="64748B"/>
-                </a:solidFill>
-                <a:latin typeface="Calibri" pitchFamily="34" charset="0"/>
-                <a:ea typeface="Calibri" pitchFamily="34" charset="-122"/>
-                <a:cs typeface="Calibri" pitchFamily="34" charset="-120"/>
-              </a:rPr>
-              <a:t>Naive CHS:</a:t>
+              <a:rPr sz="1150" b="1">
+                <a:solidFill>
+                  <a:srgbClr val="D97706"/>
+                </a:solidFill>
+                <a:latin typeface="Calibri"/>
+              </a:rPr>
+              <a:t>CHS  57  (yellow)</a:t>
             </a:r>
             <a:endParaRPr lang="en-US" sz="1000" dirty="0"/>
           </a:p>
@@ -10064,19 +13370,17 @@
           <a:bodyPr wrap="square" lIns="0" tIns="0" rIns="0" bIns="0" rtlCol="0" anchor="ctr"/>
           <a:lstStyle/>
           <a:p>
-            <a:pPr indent="0" marL="0">
+            <a:pPr indent="0" marL="0" algn="l">
               <a:buNone/>
             </a:pPr>
             <a:r>
-              <a:rPr lang="en-US" sz="1200" b="1" dirty="0">
-                <a:solidFill>
-                  <a:srgbClr val="D97706"/>
-                </a:solidFill>
-                <a:latin typeface="Calibri" pitchFamily="34" charset="0"/>
-                <a:ea typeface="Calibri" pitchFamily="34" charset="-122"/>
-                <a:cs typeface="Calibri" pitchFamily="34" charset="-120"/>
-              </a:rPr>
-              <a:t>57 (yellow)</a:t>
+              <a:rPr sz="900" b="0">
+                <a:solidFill>
+                  <a:srgbClr val="94A3B8"/>
+                </a:solidFill>
+                <a:latin typeface="Calibri"/>
+              </a:rPr>
+              <a:t/>
             </a:r>
             <a:endParaRPr lang="en-US" sz="1200" dirty="0"/>
           </a:p>
@@ -10103,19 +13407,17 @@
           <a:bodyPr wrap="square" lIns="0" tIns="0" rIns="0" bIns="0" rtlCol="0" anchor="ctr"/>
           <a:lstStyle/>
           <a:p>
-            <a:pPr indent="0" marL="0">
+            <a:pPr indent="0" marL="0" algn="l">
               <a:buNone/>
             </a:pPr>
             <a:r>
-              <a:rPr lang="en-US" sz="1000" dirty="0">
-                <a:solidFill>
-                  <a:srgbClr val="64748B"/>
-                </a:solidFill>
-                <a:latin typeface="Calibri" pitchFamily="34" charset="0"/>
-                <a:ea typeface="Calibri" pitchFamily="34" charset="-122"/>
-                <a:cs typeface="Calibri" pitchFamily="34" charset="-120"/>
-              </a:rPr>
-              <a:t>AVRI:</a:t>
+              <a:rPr sz="1150" b="1">
+                <a:solidFill>
+                  <a:srgbClr val="DC2626"/>
+                </a:solidFill>
+                <a:latin typeface="Calibri"/>
+              </a:rPr>
+              <a:t>AVRI  24  (red)</a:t>
             </a:r>
             <a:endParaRPr lang="en-US" sz="1000" dirty="0"/>
           </a:p>
@@ -10142,19 +13444,17 @@
           <a:bodyPr wrap="square" lIns="0" tIns="0" rIns="0" bIns="0" rtlCol="0" anchor="ctr"/>
           <a:lstStyle/>
           <a:p>
-            <a:pPr indent="0" marL="0">
+            <a:pPr indent="0" marL="0" algn="l">
               <a:buNone/>
             </a:pPr>
             <a:r>
-              <a:rPr lang="en-US" sz="1200" b="1" dirty="0">
-                <a:solidFill>
-                  <a:srgbClr val="059669"/>
-                </a:solidFill>
-                <a:latin typeface="Calibri" pitchFamily="34" charset="0"/>
-                <a:ea typeface="Calibri" pitchFamily="34" charset="-122"/>
-                <a:cs typeface="Calibri" pitchFamily="34" charset="-120"/>
-              </a:rPr>
-              <a:t>92 (green)</a:t>
+              <a:rPr sz="900" b="0">
+                <a:solidFill>
+                  <a:srgbClr val="94A3B8"/>
+                </a:solidFill>
+                <a:latin typeface="Calibri"/>
+              </a:rPr>
+              <a:t/>
             </a:r>
             <a:endParaRPr lang="en-US" sz="1200" dirty="0"/>
           </a:p>
@@ -10184,6 +13484,10 @@
             <a:prstDash val="solid"/>
           </a:ln>
         </p:spPr>
+        <p:txBody>
+          <a:bodyPr/>
+          <a:p/>
+        </p:txBody>
       </p:sp>
       <p:sp>
         <p:nvSpPr>
@@ -10206,21 +13510,55 @@
           <a:bodyPr wrap="square" lIns="0" tIns="0" rIns="0" bIns="0" rtlCol="0" anchor="ctr"/>
           <a:lstStyle/>
           <a:p>
-            <a:pPr indent="0" marL="0">
+            <a:pPr indent="0" marL="0" algn="l">
               <a:buNone/>
             </a:pPr>
             <a:r>
-              <a:rPr lang="en-US" sz="1050" i="1" dirty="0">
-                <a:solidFill>
-                  <a:srgbClr val="334155"/>
-                </a:solidFill>
-                <a:latin typeface="Calibri" pitchFamily="34" charset="0"/>
-                <a:ea typeface="Calibri" pitchFamily="34" charset="-122"/>
-                <a:cs typeface="Calibri" pitchFamily="34" charset="-120"/>
-              </a:rPr>
-              <a:t>All pillars high; latest health color happened to be red (one bad week). Naive CHS over-penalizes; AVRI's decay-weighted TH gets the trend right.</a:t>
+              <a:rPr sz="900" b="1">
+                <a:solidFill>
+                  <a:srgbClr val="475569"/>
+                </a:solidFill>
+                <a:latin typeface="Calibri"/>
+              </a:rPr>
+              <a:t>Cell: AVRI Red × CHS Yellow  ·  most-common disagreement</a:t>
             </a:r>
             <a:endParaRPr lang="en-US" sz="1050" dirty="0"/>
+          </a:p>
+          <a:p>
+            <a:pPr algn="l"/>
+            <a:r>
+              <a:rPr sz="900" b="1">
+                <a:solidFill>
+                  <a:srgbClr val="EA580C"/>
+                </a:solidFill>
+                <a:latin typeface="Calibri"/>
+              </a:rPr>
+              <a:t>RV $77K  ·  Unrealized $248K (the renewal landmine)</a:t>
+            </a:r>
+          </a:p>
+          <a:p>
+            <a:pPr algn="l"/>
+            <a:r>
+              <a:rPr sz="400" b="0">
+                <a:solidFill>
+                  <a:srgbClr val="475569"/>
+                </a:solidFill>
+                <a:latin typeface="Calibri"/>
+              </a:rPr>
+              <a:t/>
+            </a:r>
+          </a:p>
+          <a:p>
+            <a:pPr algn="l"/>
+            <a:r>
+              <a:rPr sz="1050" b="0">
+                <a:solidFill>
+                  <a:srgbClr val="0F172A"/>
+                </a:solidFill>
+                <a:latin typeface="Calibri"/>
+              </a:rPr>
+              <a:t>5% util, no momentum, sparse engagement — three pillars in collapse. CHS sees ARR + recent green color and says 'watch.' AVRI escalates. 25 accounts / $16.9M ARR sit in this cell.</a:t>
+            </a:r>
           </a:p>
         </p:txBody>
       </p:sp>
@@ -10248,6 +13586,10 @@
             <a:prstDash val="solid"/>
           </a:ln>
         </p:spPr>
+        <p:txBody>
+          <a:bodyPr/>
+          <a:p/>
+        </p:txBody>
       </p:sp>
       <p:sp>
         <p:nvSpPr>
@@ -10354,6 +13696,10 @@
             <a:prstDash val="solid"/>
           </a:ln>
         </p:spPr>
+        <p:txBody>
+          <a:bodyPr/>
+          <a:p/>
+        </p:txBody>
       </p:sp>
       <p:sp>
         <p:nvSpPr>
@@ -10432,6 +13778,10 @@
             <a:prstDash val="solid"/>
           </a:ln>
         </p:spPr>
+        <p:txBody>
+          <a:bodyPr/>
+          <a:p/>
+        </p:txBody>
       </p:sp>
       <p:sp>
         <p:nvSpPr>
@@ -10550,15 +13900,13 @@
               <a:buNone/>
             </a:pPr>
             <a:r>
-              <a:rPr lang="en-US" sz="900" dirty="0">
-                <a:solidFill>
-                  <a:srgbClr val="64748B"/>
-                </a:solidFill>
-                <a:latin typeface="Calibri" pitchFamily="34" charset="0"/>
-                <a:ea typeface="Calibri" pitchFamily="34" charset="-122"/>
-                <a:cs typeface="Calibri" pitchFamily="34" charset="-120"/>
-              </a:rPr>
-              <a:t>5 / 6</a:t>
+              <a:rPr sz="900" b="0">
+                <a:solidFill>
+                  <a:srgbClr val="94A3B8"/>
+                </a:solidFill>
+                <a:latin typeface="Calibri"/>
+              </a:rPr>
+              <a:t>6 / 8</a:t>
             </a:r>
             <a:endParaRPr lang="en-US" sz="900" dirty="0"/>
           </a:p>
@@ -10572,7 +13920,7 @@
 </p:sld>
 </file>
 
-<file path=ppt/slides/slide6.xml><?xml version="1.0" encoding="utf-8"?>
+<file path=ppt/slides/slide7.xml><?xml version="1.0" encoding="utf-8"?>
 <p:sld xmlns:a="http://schemas.openxmlformats.org/drawingml/2006/main" xmlns:r="http://schemas.openxmlformats.org/officeDocument/2006/relationships" xmlns:p="http://schemas.openxmlformats.org/presentationml/2006/main">
   <p:cSld name="Slide 6">
     <p:bg>
@@ -10620,6 +13968,10 @@
             <a:prstDash val="solid"/>
           </a:ln>
         </p:spPr>
+        <p:txBody>
+          <a:bodyPr/>
+          <a:p/>
+        </p:txBody>
       </p:sp>
       <p:sp>
         <p:nvSpPr>
@@ -10642,19 +13994,17 @@
           <a:bodyPr wrap="square" rtlCol="0" anchor="ctr"/>
           <a:lstStyle/>
           <a:p>
-            <a:pPr indent="0" marL="0">
+            <a:pPr indent="0" marL="0" algn="l">
               <a:buNone/>
             </a:pPr>
             <a:r>
-              <a:rPr lang="en-US" sz="1000" b="1" spc="400" kern="0" dirty="0">
+              <a:rPr sz="1100" b="1">
                 <a:solidFill>
                   <a:srgbClr val="EA580C"/>
                 </a:solidFill>
-                <a:latin typeface="Calibri" pitchFamily="34" charset="0"/>
-                <a:ea typeface="Calibri" pitchFamily="34" charset="-122"/>
-                <a:cs typeface="Calibri" pitchFamily="34" charset="-120"/>
-              </a:rPr>
-              <a:t>06 · RETROSPECTIVE + ROADMAP</a:t>
+                <a:latin typeface="Calibri"/>
+              </a:rPr>
+              <a:t>07 · RETROSPECTIVE + ROADMAP</a:t>
             </a:r>
             <a:endParaRPr lang="en-US" sz="1000" dirty="0"/>
           </a:p>
@@ -10762,6 +14112,10 @@
             <a:prstDash val="solid"/>
           </a:ln>
         </p:spPr>
+        <p:txBody>
+          <a:bodyPr/>
+          <a:p/>
+        </p:txBody>
       </p:sp>
       <p:sp>
         <p:nvSpPr>
@@ -10787,6 +14141,10 @@
             <a:prstDash val="solid"/>
           </a:ln>
         </p:spPr>
+        <p:txBody>
+          <a:bodyPr/>
+          <a:p/>
+        </p:txBody>
       </p:sp>
       <p:sp>
         <p:nvSpPr>
@@ -10812,6 +14170,10 @@
             <a:prstDash val="solid"/>
           </a:ln>
         </p:spPr>
+        <p:txBody>
+          <a:bodyPr/>
+          <a:p/>
+        </p:txBody>
       </p:sp>
       <p:sp>
         <p:nvSpPr>
@@ -10913,6 +14275,10 @@
             <a:prstDash val="solid"/>
           </a:ln>
         </p:spPr>
+        <p:txBody>
+          <a:bodyPr/>
+          <a:p/>
+        </p:txBody>
       </p:sp>
       <p:sp>
         <p:nvSpPr>
@@ -11065,6 +14431,10 @@
             <a:prstDash val="solid"/>
           </a:ln>
         </p:spPr>
+        <p:txBody>
+          <a:bodyPr/>
+          <a:p/>
+        </p:txBody>
       </p:sp>
       <p:sp>
         <p:nvSpPr>
@@ -11090,6 +14460,10 @@
             <a:prstDash val="solid"/>
           </a:ln>
         </p:spPr>
+        <p:txBody>
+          <a:bodyPr/>
+          <a:p/>
+        </p:txBody>
       </p:sp>
       <p:sp>
         <p:nvSpPr>
@@ -11115,6 +14489,10 @@
             <a:prstDash val="solid"/>
           </a:ln>
         </p:spPr>
+        <p:txBody>
+          <a:bodyPr/>
+          <a:p/>
+        </p:txBody>
       </p:sp>
       <p:sp>
         <p:nvSpPr>
@@ -11216,6 +14594,10 @@
             <a:prstDash val="solid"/>
           </a:ln>
         </p:spPr>
+        <p:txBody>
+          <a:bodyPr/>
+          <a:p/>
+        </p:txBody>
       </p:sp>
       <p:sp>
         <p:nvSpPr>
@@ -11238,7 +14620,7 @@
           <a:bodyPr wrap="square" rtlCol="0" anchor="t"/>
           <a:lstStyle/>
           <a:p>
-            <a:pPr marL="342900" indent="-342900">
+            <a:pPr marL="342900" indent="-342900" algn="l">
               <a:spcAft>
                 <a:spcPts val="600"/>
               </a:spcAft>
@@ -11246,101 +14628,87 @@
               <a:buChar char="■"/>
             </a:pPr>
             <a:r>
-              <a:rPr lang="en-US" sz="1050" dirty="0">
-                <a:solidFill>
-                  <a:srgbClr val="334155"/>
-                </a:solidFill>
-                <a:latin typeface="Calibri" pitchFamily="34" charset="0"/>
-                <a:ea typeface="Calibri" pitchFamily="34" charset="-122"/>
-                <a:cs typeface="Calibri" pitchFamily="34" charset="-120"/>
-              </a:rPr>
-              <a:t>Agentic data quality: agent watches the pipeline, surfaces anomalies in Slack autonomously.</a:t>
+              <a:rPr sz="1000" b="1">
+                <a:solidFill>
+                  <a:srgbClr val="EA580C"/>
+                </a:solidFill>
+                <a:latin typeface="Calibri"/>
+              </a:rPr>
+              <a:t>v2 SHIPPED: Realized Value (linear), pillar decomposition, calibration sandbox, 29 DQ tests pass.</a:t>
             </a:r>
             <a:endParaRPr lang="en-US" sz="1050" dirty="0"/>
           </a:p>
           <a:p>
-            <a:pPr marL="342900" indent="-342900">
-              <a:spcAft>
-                <a:spcPts val="600"/>
-              </a:spcAft>
-              <a:buSzPct val="100000"/>
-              <a:buChar char="■"/>
-            </a:pPr>
-            <a:r>
-              <a:rPr lang="en-US" sz="1050" dirty="0">
-                <a:solidFill>
-                  <a:srgbClr val="334155"/>
-                </a:solidFill>
-                <a:latin typeface="Calibri" pitchFamily="34" charset="0"/>
-                <a:ea typeface="Calibri" pitchFamily="34" charset="-122"/>
-                <a:cs typeface="Calibri" pitchFamily="34" charset="-120"/>
-              </a:rPr>
-              <a:t>LLM-summarized account briefs: per at-risk account, generate CSM-ready talking points from history.</a:t>
-            </a:r>
-            <a:endParaRPr lang="en-US" sz="1050" dirty="0"/>
-          </a:p>
-          <a:p>
-            <a:pPr marL="342900" indent="-342900">
-              <a:spcAft>
-                <a:spcPts val="600"/>
-              </a:spcAft>
-              <a:buSzPct val="100000"/>
-              <a:buChar char="■"/>
-            </a:pPr>
-            <a:r>
-              <a:rPr lang="en-US" sz="1050" dirty="0">
-                <a:solidFill>
-                  <a:srgbClr val="334155"/>
-                </a:solidFill>
-                <a:latin typeface="Calibri" pitchFamily="34" charset="0"/>
-                <a:ea typeface="Calibri" pitchFamily="34" charset="-122"/>
-                <a:cs typeface="Calibri" pitchFamily="34" charset="-120"/>
-              </a:rPr>
-              <a:t>Tenure-aware cold-start: separate Onboarding RAG state instead of forcing G/Y/R buckets.</a:t>
-            </a:r>
-            <a:endParaRPr lang="en-US" sz="1050" dirty="0"/>
-          </a:p>
-          <a:p>
-            <a:pPr marL="342900" indent="-342900">
-              <a:spcAft>
-                <a:spcPts val="600"/>
-              </a:spcAft>
-              <a:buSzPct val="100000"/>
-              <a:buChar char="■"/>
-            </a:pPr>
-            <a:r>
-              <a:rPr lang="en-US" sz="1050" dirty="0">
-                <a:solidFill>
-                  <a:srgbClr val="334155"/>
-                </a:solidFill>
-                <a:latin typeface="Calibri" pitchFamily="34" charset="0"/>
-                <a:ea typeface="Calibri" pitchFamily="34" charset="-122"/>
-                <a:cs typeface="Calibri" pitchFamily="34" charset="-120"/>
-              </a:rPr>
-              <a:t>Per-segment weight tuning (Enterprise vs Mid-Market), calibrated against renewal correlation.</a:t>
-            </a:r>
-            <a:endParaRPr lang="en-US" sz="1050" dirty="0"/>
-          </a:p>
-          <a:p>
-            <a:pPr marL="342900" indent="-342900">
-              <a:spcAft>
-                <a:spcPts val="600"/>
-              </a:spcAft>
-              <a:buSzPct val="100000"/>
-              <a:buChar char="■"/>
-            </a:pPr>
-            <a:r>
-              <a:rPr lang="en-US" sz="1050" dirty="0">
-                <a:solidFill>
-                  <a:srgbClr val="334155"/>
-                </a:solidFill>
-                <a:latin typeface="Calibri" pitchFamily="34" charset="0"/>
-                <a:ea typeface="Calibri" pitchFamily="34" charset="-122"/>
-                <a:cs typeface="Calibri" pitchFamily="34" charset="-120"/>
-              </a:rPr>
-              <a:t>Replace proxies in DM and TH with real signal: license provisioning, Sev-1 frequency, NPS.</a:t>
-            </a:r>
-            <a:endParaRPr lang="en-US" sz="1050" dirty="0"/>
+            <a:pPr algn="l"/>
+            <a:r>
+              <a:rPr sz="400" b="0">
+                <a:solidFill>
+                  <a:srgbClr val="475569"/>
+                </a:solidFill>
+                <a:latin typeface="Calibri"/>
+              </a:rPr>
+              <a:t/>
+            </a:r>
+          </a:p>
+          <a:p>
+            <a:pPr algn="l"/>
+            <a:r>
+              <a:rPr sz="1000" b="0">
+                <a:solidFill>
+                  <a:srgbClr val="0F172A"/>
+                </a:solidFill>
+                <a:latin typeface="Calibri"/>
+              </a:rPr>
+              <a:t>Agentic DQ: agent watches the pipeline, surfaces anomalies in Slack autonomously.</a:t>
+            </a:r>
+          </a:p>
+          <a:p>
+            <a:pPr algn="l"/>
+            <a:r>
+              <a:rPr sz="1000" b="0">
+                <a:solidFill>
+                  <a:srgbClr val="0F172A"/>
+                </a:solidFill>
+                <a:latin typeface="Calibri"/>
+              </a:rPr>
+              <a:t>LLM-summarized account briefs: per at-risk acct, generate CSM-ready talking points from history.</a:t>
+            </a:r>
+          </a:p>
+          <a:p>
+            <a:pPr algn="l"/>
+            <a:r>
+              <a:rPr sz="1000" b="0">
+                <a:solidFill>
+                  <a:srgbClr val="0F172A"/>
+                </a:solidFill>
+                <a:latin typeface="Calibri"/>
+              </a:rPr>
+              <a:t>Per-segment AVRI weight tuning (Enterprise vs Mid-Market), calibrated against renewal correlation.</a:t>
+            </a:r>
+          </a:p>
+          <a:p>
+            <a:pPr algn="l"/>
+            <a:r>
+              <a:rPr sz="1000" b="0">
+                <a:solidFill>
+                  <a:srgbClr val="0F172A"/>
+                </a:solidFill>
+                <a:latin typeface="Calibri"/>
+              </a:rPr>
+              <a:t>Sigmoidal RV: refit AVRI→realized-revenue function from historical renewals.</a:t>
+            </a:r>
+          </a:p>
+          <a:p>
+            <a:pPr algn="l"/>
+            <a:r>
+              <a:rPr sz="1000" b="0">
+                <a:solidFill>
+                  <a:srgbClr val="0F172A"/>
+                </a:solidFill>
+                <a:latin typeface="Calibri"/>
+              </a:rPr>
+              <a:t>Replace TH proxies with real signal: Sev-1 frequency, SLA attainment, escalations.</a:t>
+            </a:r>
           </a:p>
         </p:txBody>
       </p:sp>
@@ -11368,6 +14736,10 @@
             <a:prstDash val="solid"/>
           </a:ln>
         </p:spPr>
+        <p:txBody>
+          <a:bodyPr/>
+          <a:p/>
+        </p:txBody>
       </p:sp>
       <p:sp>
         <p:nvSpPr>
@@ -11393,6 +14765,10 @@
             <a:prstDash val="solid"/>
           </a:ln>
         </p:spPr>
+        <p:txBody>
+          <a:bodyPr/>
+          <a:p/>
+        </p:txBody>
       </p:sp>
       <p:sp>
         <p:nvSpPr>
@@ -11418,6 +14794,10 @@
             <a:prstDash val="solid"/>
           </a:ln>
         </p:spPr>
+        <p:txBody>
+          <a:bodyPr/>
+          <a:p/>
+        </p:txBody>
       </p:sp>
       <p:sp>
         <p:nvSpPr>
@@ -11519,6 +14899,10 @@
             <a:prstDash val="solid"/>
           </a:ln>
         </p:spPr>
+        <p:txBody>
+          <a:bodyPr/>
+          <a:p/>
+        </p:txBody>
       </p:sp>
       <p:sp>
         <p:nvSpPr>
@@ -11671,6 +15055,10 @@
             <a:prstDash val="solid"/>
           </a:ln>
         </p:spPr>
+        <p:txBody>
+          <a:bodyPr/>
+          <a:p/>
+        </p:txBody>
       </p:sp>
       <p:sp>
         <p:nvSpPr>
@@ -11775,17 +15163,2350 @@
               <a:buNone/>
             </a:pPr>
             <a:r>
-              <a:rPr lang="en-US" sz="900" dirty="0">
-                <a:solidFill>
-                  <a:srgbClr val="64748B"/>
-                </a:solidFill>
-                <a:latin typeface="Calibri" pitchFamily="34" charset="0"/>
-                <a:ea typeface="Calibri" pitchFamily="34" charset="-122"/>
-                <a:cs typeface="Calibri" pitchFamily="34" charset="-120"/>
-              </a:rPr>
-              <a:t>6 / 6</a:t>
+              <a:rPr sz="900" b="0">
+                <a:solidFill>
+                  <a:srgbClr val="94A3B8"/>
+                </a:solidFill>
+                <a:latin typeface="Calibri"/>
+              </a:rPr>
+              <a:t>7 / 8</a:t>
             </a:r>
             <a:endParaRPr lang="en-US" sz="900" dirty="0"/>
+          </a:p>
+        </p:txBody>
+      </p:sp>
+    </p:spTree>
+  </p:cSld>
+  <p:clrMapOvr>
+    <a:masterClrMapping/>
+  </p:clrMapOvr>
+</p:sld>
+</file>
+
+<file path=ppt/slides/slide8.xml><?xml version="1.0" encoding="utf-8"?>
+<p:sld xmlns:a="http://schemas.openxmlformats.org/drawingml/2006/main" xmlns:p="http://schemas.openxmlformats.org/presentationml/2006/main" xmlns:r="http://schemas.openxmlformats.org/officeDocument/2006/relationships">
+  <p:cSld>
+    <p:spTree>
+      <p:nvGrpSpPr>
+        <p:cNvPr id="1" name=""/>
+        <p:cNvGrpSpPr/>
+        <p:nvPr/>
+      </p:nvGrpSpPr>
+      <p:grpSpPr/>
+      <p:sp>
+        <p:nvSpPr>
+          <p:cNvPr id="2" name="Rectangle 1"/>
+          <p:cNvSpPr/>
+          <p:nvPr/>
+        </p:nvSpPr>
+        <p:spPr>
+          <a:xfrm>
+            <a:off x="0" y="0"/>
+            <a:ext cx="164592" cy="6858000"/>
+          </a:xfrm>
+          <a:prstGeom prst="rect">
+            <a:avLst/>
+          </a:prstGeom>
+          <a:solidFill>
+            <a:srgbClr val="EA580C"/>
+          </a:solidFill>
+          <a:ln>
+            <a:noFill/>
+          </a:ln>
+          <a:effectLst/>
+        </p:spPr>
+        <p:style>
+          <a:lnRef idx="1">
+            <a:schemeClr val="accent1"/>
+          </a:lnRef>
+          <a:fillRef idx="3">
+            <a:schemeClr val="accent1"/>
+          </a:fillRef>
+          <a:effectRef idx="2">
+            <a:schemeClr val="accent1"/>
+          </a:effectRef>
+          <a:fontRef idx="minor">
+            <a:schemeClr val="lt1"/>
+          </a:fontRef>
+        </p:style>
+        <p:txBody>
+          <a:bodyPr rtlCol="0" anchor="ctr"/>
+          <a:lstStyle/>
+          <a:p>
+            <a:pPr algn="ctr"/>
+          </a:p>
+        </p:txBody>
+      </p:sp>
+      <p:sp>
+        <p:nvSpPr>
+          <p:cNvPr id="3" name="TextBox 2"/>
+          <p:cNvSpPr txBox="1"/>
+          <p:nvPr/>
+        </p:nvSpPr>
+        <p:spPr>
+          <a:xfrm>
+            <a:off x="457200" y="320040"/>
+            <a:ext cx="7315200" cy="274320"/>
+          </a:xfrm>
+          <a:prstGeom prst="rect">
+            <a:avLst/>
+          </a:prstGeom>
+          <a:noFill/>
+        </p:spPr>
+        <p:txBody>
+          <a:bodyPr wrap="square" lIns="0" rIns="0" tIns="18288" bIns="18288" anchor="ctr">
+            <a:spAutoFit/>
+          </a:bodyPr>
+          <a:lstStyle/>
+          <a:p>
+            <a:pPr algn="l"/>
+            <a:r>
+              <a:rPr sz="1100" b="1">
+                <a:solidFill>
+                  <a:srgbClr val="EA580C"/>
+                </a:solidFill>
+                <a:latin typeface="Calibri"/>
+              </a:rPr>
+              <a:t>APPENDIX  ·  EDGE CASES</a:t>
+            </a:r>
+          </a:p>
+        </p:txBody>
+      </p:sp>
+      <p:sp>
+        <p:nvSpPr>
+          <p:cNvPr id="4" name="TextBox 3"/>
+          <p:cNvSpPr txBox="1"/>
+          <p:nvPr/>
+        </p:nvSpPr>
+        <p:spPr>
+          <a:xfrm>
+            <a:off x="457200" y="594360"/>
+            <a:ext cx="10972800" cy="640080"/>
+          </a:xfrm>
+          <a:prstGeom prst="rect">
+            <a:avLst/>
+          </a:prstGeom>
+          <a:noFill/>
+        </p:spPr>
+        <p:txBody>
+          <a:bodyPr wrap="square" lIns="0" rIns="0" tIns="18288" bIns="18288" anchor="t">
+            <a:spAutoFit/>
+          </a:bodyPr>
+          <a:lstStyle/>
+          <a:p>
+            <a:pPr algn="l"/>
+            <a:r>
+              <a:rPr sz="2600" b="1">
+                <a:solidFill>
+                  <a:srgbClr val="0F172A"/>
+                </a:solidFill>
+                <a:latin typeface="Calibri"/>
+              </a:rPr>
+              <a:t>How AVRI handles the brief's five edge cases.</a:t>
+            </a:r>
+          </a:p>
+        </p:txBody>
+      </p:sp>
+      <p:sp>
+        <p:nvSpPr>
+          <p:cNvPr id="5" name="TextBox 4"/>
+          <p:cNvSpPr txBox="1"/>
+          <p:nvPr/>
+        </p:nvSpPr>
+        <p:spPr>
+          <a:xfrm>
+            <a:off x="457200" y="1280160"/>
+            <a:ext cx="11247120" cy="502920"/>
+          </a:xfrm>
+          <a:prstGeom prst="rect">
+            <a:avLst/>
+          </a:prstGeom>
+          <a:noFill/>
+        </p:spPr>
+        <p:txBody>
+          <a:bodyPr wrap="square" lIns="0" rIns="0" tIns="18288" bIns="18288" anchor="t">
+            <a:spAutoFit/>
+          </a:bodyPr>
+          <a:lstStyle/>
+          <a:p>
+            <a:pPr algn="l"/>
+            <a:r>
+              <a:rPr sz="1200" b="0">
+                <a:solidFill>
+                  <a:srgbClr val="475569"/>
+                </a:solidFill>
+                <a:latin typeface="Calibri"/>
+              </a:rPr>
+              <a:t>Each edge case is answered at the right altitude — pillar mechanism, pipeline logic, or DQ layer. Naive CHS treats every problem as a scoring problem; AVRI separates structural design from data-quality.</a:t>
+            </a:r>
+          </a:p>
+        </p:txBody>
+      </p:sp>
+      <p:sp>
+        <p:nvSpPr>
+          <p:cNvPr id="6" name="TextBox 5"/>
+          <p:cNvSpPr txBox="1"/>
+          <p:nvPr/>
+        </p:nvSpPr>
+        <p:spPr>
+          <a:xfrm>
+            <a:off x="502920" y="1874519"/>
+            <a:ext cx="2194560" cy="274320"/>
+          </a:xfrm>
+          <a:prstGeom prst="rect">
+            <a:avLst/>
+          </a:prstGeom>
+          <a:noFill/>
+        </p:spPr>
+        <p:txBody>
+          <a:bodyPr wrap="square" lIns="0" rIns="0" tIns="18288" bIns="18288" anchor="ctr">
+            <a:spAutoFit/>
+          </a:bodyPr>
+          <a:lstStyle/>
+          <a:p>
+            <a:pPr algn="l"/>
+            <a:r>
+              <a:rPr sz="900" b="1">
+                <a:solidFill>
+                  <a:srgbClr val="475569"/>
+                </a:solidFill>
+                <a:latin typeface="Calibri"/>
+              </a:rPr>
+              <a:t>EDGE CASE</a:t>
+            </a:r>
+          </a:p>
+        </p:txBody>
+      </p:sp>
+      <p:sp>
+        <p:nvSpPr>
+          <p:cNvPr id="7" name="TextBox 6"/>
+          <p:cNvSpPr txBox="1"/>
+          <p:nvPr/>
+        </p:nvSpPr>
+        <p:spPr>
+          <a:xfrm>
+            <a:off x="2788920" y="1874519"/>
+            <a:ext cx="3291840" cy="274320"/>
+          </a:xfrm>
+          <a:prstGeom prst="rect">
+            <a:avLst/>
+          </a:prstGeom>
+          <a:noFill/>
+        </p:spPr>
+        <p:txBody>
+          <a:bodyPr wrap="square" lIns="0" rIns="0" tIns="18288" bIns="18288" anchor="ctr">
+            <a:spAutoFit/>
+          </a:bodyPr>
+          <a:lstStyle/>
+          <a:p>
+            <a:pPr algn="l"/>
+            <a:r>
+              <a:rPr sz="900" b="1">
+                <a:solidFill>
+                  <a:srgbClr val="7F1D1D"/>
+                </a:solidFill>
+                <a:latin typeface="Calibri"/>
+              </a:rPr>
+              <a:t>NAIVE CHS HANDLING</a:t>
+            </a:r>
+          </a:p>
+        </p:txBody>
+      </p:sp>
+      <p:sp>
+        <p:nvSpPr>
+          <p:cNvPr id="8" name="TextBox 7"/>
+          <p:cNvSpPr txBox="1"/>
+          <p:nvPr/>
+        </p:nvSpPr>
+        <p:spPr>
+          <a:xfrm>
+            <a:off x="6172200" y="1874519"/>
+            <a:ext cx="3931920" cy="274320"/>
+          </a:xfrm>
+          <a:prstGeom prst="rect">
+            <a:avLst/>
+          </a:prstGeom>
+          <a:noFill/>
+        </p:spPr>
+        <p:txBody>
+          <a:bodyPr wrap="square" lIns="0" rIns="0" tIns="18288" bIns="18288" anchor="ctr">
+            <a:spAutoFit/>
+          </a:bodyPr>
+          <a:lstStyle/>
+          <a:p>
+            <a:pPr algn="l"/>
+            <a:r>
+              <a:rPr sz="900" b="1">
+                <a:solidFill>
+                  <a:srgbClr val="14532D"/>
+                </a:solidFill>
+                <a:latin typeface="Calibri"/>
+              </a:rPr>
+              <a:t>AVRI MECHANISM</a:t>
+            </a:r>
+          </a:p>
+        </p:txBody>
+      </p:sp>
+      <p:sp>
+        <p:nvSpPr>
+          <p:cNvPr id="9" name="TextBox 8"/>
+          <p:cNvSpPr txBox="1"/>
+          <p:nvPr/>
+        </p:nvSpPr>
+        <p:spPr>
+          <a:xfrm>
+            <a:off x="10195560" y="1874519"/>
+            <a:ext cx="1463039" cy="274320"/>
+          </a:xfrm>
+          <a:prstGeom prst="rect">
+            <a:avLst/>
+          </a:prstGeom>
+          <a:noFill/>
+        </p:spPr>
+        <p:txBody>
+          <a:bodyPr wrap="square" lIns="0" rIns="0" tIns="18288" bIns="18288" anchor="ctr">
+            <a:spAutoFit/>
+          </a:bodyPr>
+          <a:lstStyle/>
+          <a:p>
+            <a:pPr algn="l"/>
+            <a:r>
+              <a:rPr sz="900" b="1">
+                <a:solidFill>
+                  <a:srgbClr val="475569"/>
+                </a:solidFill>
+                <a:latin typeface="Calibri"/>
+              </a:rPr>
+              <a:t>VERDICT</a:t>
+            </a:r>
+          </a:p>
+        </p:txBody>
+      </p:sp>
+      <p:sp>
+        <p:nvSpPr>
+          <p:cNvPr id="10" name="Rounded Rectangle 9"/>
+          <p:cNvSpPr/>
+          <p:nvPr/>
+        </p:nvSpPr>
+        <p:spPr>
+          <a:xfrm>
+            <a:off x="502920" y="2194559"/>
+            <a:ext cx="320040" cy="630936"/>
+          </a:xfrm>
+          <a:prstGeom prst="roundRect">
+            <a:avLst>
+              <a:gd name="adj" fmla="val 50000"/>
+            </a:avLst>
+          </a:prstGeom>
+          <a:solidFill>
+            <a:srgbClr val="DC2626"/>
+          </a:solidFill>
+          <a:ln>
+            <a:noFill/>
+          </a:ln>
+          <a:effectLst/>
+        </p:spPr>
+        <p:style>
+          <a:lnRef idx="1">
+            <a:schemeClr val="accent1"/>
+          </a:lnRef>
+          <a:fillRef idx="3">
+            <a:schemeClr val="accent1"/>
+          </a:fillRef>
+          <a:effectRef idx="2">
+            <a:schemeClr val="accent1"/>
+          </a:effectRef>
+          <a:fontRef idx="minor">
+            <a:schemeClr val="lt1"/>
+          </a:fontRef>
+        </p:style>
+        <p:txBody>
+          <a:bodyPr rtlCol="0" anchor="ctr"/>
+          <a:lstStyle/>
+          <a:p>
+            <a:pPr algn="ctr"/>
+          </a:p>
+        </p:txBody>
+      </p:sp>
+      <p:sp>
+        <p:nvSpPr>
+          <p:cNvPr id="11" name="TextBox 10"/>
+          <p:cNvSpPr txBox="1"/>
+          <p:nvPr/>
+        </p:nvSpPr>
+        <p:spPr>
+          <a:xfrm>
+            <a:off x="896112" y="2148839"/>
+            <a:ext cx="1783080" cy="722376"/>
+          </a:xfrm>
+          <a:prstGeom prst="rect">
+            <a:avLst/>
+          </a:prstGeom>
+          <a:noFill/>
+        </p:spPr>
+        <p:txBody>
+          <a:bodyPr wrap="square" lIns="0" rIns="0" tIns="18288" bIns="18288" anchor="ctr">
+            <a:spAutoFit/>
+          </a:bodyPr>
+          <a:lstStyle/>
+          <a:p>
+            <a:pPr algn="l"/>
+            <a:r>
+              <a:rPr sz="1200" b="1">
+                <a:solidFill>
+                  <a:srgbClr val="0F172A"/>
+                </a:solidFill>
+                <a:latin typeface="Calibri"/>
+              </a:rPr>
+              <a:t>Spike &amp; Drop</a:t>
+            </a:r>
+          </a:p>
+          <a:p>
+            <a:pPr algn="l"/>
+            <a:r>
+              <a:rPr sz="900" b="0">
+                <a:solidFill>
+                  <a:srgbClr val="475569"/>
+                </a:solidFill>
+                <a:latin typeface="Calibri"/>
+              </a:rPr>
+              <a:t>~5%</a:t>
+            </a:r>
+          </a:p>
+        </p:txBody>
+      </p:sp>
+      <p:sp>
+        <p:nvSpPr>
+          <p:cNvPr id="12" name="Rounded Rectangle 11"/>
+          <p:cNvSpPr/>
+          <p:nvPr/>
+        </p:nvSpPr>
+        <p:spPr>
+          <a:xfrm>
+            <a:off x="2788920" y="2194559"/>
+            <a:ext cx="3246120" cy="630936"/>
+          </a:xfrm>
+          <a:prstGeom prst="roundRect">
+            <a:avLst>
+              <a:gd name="adj" fmla="val 18000"/>
+            </a:avLst>
+          </a:prstGeom>
+          <a:solidFill>
+            <a:srgbClr val="FEF2F2"/>
+          </a:solidFill>
+          <a:ln w="9525">
+            <a:solidFill>
+              <a:srgbClr val="FECACA"/>
+            </a:solidFill>
+          </a:ln>
+          <a:effectLst/>
+        </p:spPr>
+        <p:style>
+          <a:lnRef idx="1">
+            <a:schemeClr val="accent1"/>
+          </a:lnRef>
+          <a:fillRef idx="3">
+            <a:schemeClr val="accent1"/>
+          </a:fillRef>
+          <a:effectRef idx="2">
+            <a:schemeClr val="accent1"/>
+          </a:effectRef>
+          <a:fontRef idx="minor">
+            <a:schemeClr val="lt1"/>
+          </a:fontRef>
+        </p:style>
+        <p:txBody>
+          <a:bodyPr rtlCol="0" anchor="ctr"/>
+          <a:lstStyle/>
+          <a:p>
+            <a:pPr algn="ctr"/>
+          </a:p>
+        </p:txBody>
+      </p:sp>
+      <p:sp>
+        <p:nvSpPr>
+          <p:cNvPr id="13" name="TextBox 12"/>
+          <p:cNvSpPr txBox="1"/>
+          <p:nvPr/>
+        </p:nvSpPr>
+        <p:spPr>
+          <a:xfrm>
+            <a:off x="2788920" y="2194559"/>
+            <a:ext cx="3246120" cy="630936"/>
+          </a:xfrm>
+          <a:prstGeom prst="rect">
+            <a:avLst/>
+          </a:prstGeom>
+          <a:noFill/>
+        </p:spPr>
+        <p:txBody>
+          <a:bodyPr wrap="square" tIns="18288" bIns="18288" anchor="ctr">
+            <a:spAutoFit/>
+          </a:bodyPr>
+          <a:lstStyle/>
+          <a:p>
+            <a:pPr algn="l"/>
+            <a:r>
+              <a:rPr sz="1000" b="0">
+                <a:solidFill>
+                  <a:srgbClr val="7F1D1D"/>
+                </a:solidFill>
+                <a:latin typeface="Calibri"/>
+              </a:rPr>
+              <a:t>Recent health color still green from burst period. ARR component still high. Hedges to Yellow.</a:t>
+            </a:r>
+          </a:p>
+        </p:txBody>
+      </p:sp>
+      <p:sp>
+        <p:nvSpPr>
+          <p:cNvPr id="14" name="Rounded Rectangle 13"/>
+          <p:cNvSpPr/>
+          <p:nvPr/>
+        </p:nvSpPr>
+        <p:spPr>
+          <a:xfrm>
+            <a:off x="6172200" y="2194559"/>
+            <a:ext cx="3886200" cy="630936"/>
+          </a:xfrm>
+          <a:prstGeom prst="roundRect">
+            <a:avLst>
+              <a:gd name="adj" fmla="val 18000"/>
+            </a:avLst>
+          </a:prstGeom>
+          <a:solidFill>
+            <a:srgbClr val="F0FDF4"/>
+          </a:solidFill>
+          <a:ln w="9525">
+            <a:solidFill>
+              <a:srgbClr val="BBF7D0"/>
+            </a:solidFill>
+          </a:ln>
+          <a:effectLst/>
+        </p:spPr>
+        <p:style>
+          <a:lnRef idx="1">
+            <a:schemeClr val="accent1"/>
+          </a:lnRef>
+          <a:fillRef idx="3">
+            <a:schemeClr val="accent1"/>
+          </a:fillRef>
+          <a:effectRef idx="2">
+            <a:schemeClr val="accent1"/>
+          </a:effectRef>
+          <a:fontRef idx="minor">
+            <a:schemeClr val="lt1"/>
+          </a:fontRef>
+        </p:style>
+        <p:txBody>
+          <a:bodyPr rtlCol="0" anchor="ctr"/>
+          <a:lstStyle/>
+          <a:p>
+            <a:pPr algn="ctr"/>
+          </a:p>
+        </p:txBody>
+      </p:sp>
+      <p:sp>
+        <p:nvSpPr>
+          <p:cNvPr id="15" name="TextBox 14"/>
+          <p:cNvSpPr txBox="1"/>
+          <p:nvPr/>
+        </p:nvSpPr>
+        <p:spPr>
+          <a:xfrm>
+            <a:off x="6172200" y="2194559"/>
+            <a:ext cx="3886200" cy="630936"/>
+          </a:xfrm>
+          <a:prstGeom prst="rect">
+            <a:avLst/>
+          </a:prstGeom>
+          <a:noFill/>
+        </p:spPr>
+        <p:txBody>
+          <a:bodyPr wrap="square" tIns="18288" bIns="18288" anchor="ctr">
+            <a:spAutoFit/>
+          </a:bodyPr>
+          <a:lstStyle/>
+          <a:p>
+            <a:pPr algn="l"/>
+            <a:r>
+              <a:rPr sz="1000" b="0">
+                <a:solidFill>
+                  <a:srgbClr val="14532D"/>
+                </a:solidFill>
+                <a:latin typeface="Calibri"/>
+              </a:rPr>
+              <a:t>UM level guard fires when 90d/annual usage collapses. CR window-based (90d, not annual) catches the drop.</a:t>
+            </a:r>
+          </a:p>
+        </p:txBody>
+      </p:sp>
+      <p:sp>
+        <p:nvSpPr>
+          <p:cNvPr id="16" name="Rounded Rectangle 15"/>
+          <p:cNvSpPr/>
+          <p:nvPr/>
+        </p:nvSpPr>
+        <p:spPr>
+          <a:xfrm>
+            <a:off x="10195560" y="2240279"/>
+            <a:ext cx="1371600" cy="329184"/>
+          </a:xfrm>
+          <a:prstGeom prst="roundRect">
+            <a:avLst>
+              <a:gd name="adj" fmla="val 30000"/>
+            </a:avLst>
+          </a:prstGeom>
+          <a:solidFill>
+            <a:srgbClr val="DC2626"/>
+          </a:solidFill>
+          <a:ln>
+            <a:noFill/>
+          </a:ln>
+          <a:effectLst/>
+        </p:spPr>
+        <p:style>
+          <a:lnRef idx="1">
+            <a:schemeClr val="accent1"/>
+          </a:lnRef>
+          <a:fillRef idx="3">
+            <a:schemeClr val="accent1"/>
+          </a:fillRef>
+          <a:effectRef idx="2">
+            <a:schemeClr val="accent1"/>
+          </a:effectRef>
+          <a:fontRef idx="minor">
+            <a:schemeClr val="lt1"/>
+          </a:fontRef>
+        </p:style>
+        <p:txBody>
+          <a:bodyPr rtlCol="0" anchor="ctr"/>
+          <a:lstStyle/>
+          <a:p>
+            <a:pPr algn="ctr"/>
+          </a:p>
+        </p:txBody>
+      </p:sp>
+      <p:sp>
+        <p:nvSpPr>
+          <p:cNvPr id="17" name="TextBox 16"/>
+          <p:cNvSpPr txBox="1"/>
+          <p:nvPr/>
+        </p:nvSpPr>
+        <p:spPr>
+          <a:xfrm>
+            <a:off x="10195560" y="2240279"/>
+            <a:ext cx="1371600" cy="329184"/>
+          </a:xfrm>
+          <a:prstGeom prst="rect">
+            <a:avLst/>
+          </a:prstGeom>
+          <a:noFill/>
+        </p:spPr>
+        <p:txBody>
+          <a:bodyPr wrap="square" lIns="0" rIns="0" tIns="18288" bIns="18288" anchor="ctr">
+            <a:spAutoFit/>
+          </a:bodyPr>
+          <a:lstStyle/>
+          <a:p>
+            <a:pPr algn="ctr"/>
+            <a:r>
+              <a:rPr sz="900" b="1">
+                <a:solidFill>
+                  <a:srgbClr val="FFFFFF"/>
+                </a:solidFill>
+                <a:latin typeface="Calibri"/>
+              </a:rPr>
+              <a:t>RED</a:t>
+            </a:r>
+          </a:p>
+        </p:txBody>
+      </p:sp>
+      <p:sp>
+        <p:nvSpPr>
+          <p:cNvPr id="18" name="TextBox 17"/>
+          <p:cNvSpPr txBox="1"/>
+          <p:nvPr/>
+        </p:nvSpPr>
+        <p:spPr>
+          <a:xfrm>
+            <a:off x="10195560" y="2606039"/>
+            <a:ext cx="1371600" cy="219456"/>
+          </a:xfrm>
+          <a:prstGeom prst="rect">
+            <a:avLst/>
+          </a:prstGeom>
+          <a:noFill/>
+        </p:spPr>
+        <p:txBody>
+          <a:bodyPr wrap="square" lIns="0" rIns="0" tIns="18288" bIns="18288" anchor="ctr">
+            <a:spAutoFit/>
+          </a:bodyPr>
+          <a:lstStyle/>
+          <a:p>
+            <a:pPr algn="ctr"/>
+            <a:r>
+              <a:rPr sz="900" b="1">
+                <a:solidFill>
+                  <a:srgbClr val="475569"/>
+                </a:solidFill>
+                <a:latin typeface="Calibri"/>
+              </a:rPr>
+              <a:t>UM · CR</a:t>
+            </a:r>
+          </a:p>
+        </p:txBody>
+      </p:sp>
+      <p:sp>
+        <p:nvSpPr>
+          <p:cNvPr id="19" name="Rounded Rectangle 18"/>
+          <p:cNvSpPr/>
+          <p:nvPr/>
+        </p:nvSpPr>
+        <p:spPr>
+          <a:xfrm>
+            <a:off x="502920" y="2971799"/>
+            <a:ext cx="320040" cy="630936"/>
+          </a:xfrm>
+          <a:prstGeom prst="roundRect">
+            <a:avLst>
+              <a:gd name="adj" fmla="val 50000"/>
+            </a:avLst>
+          </a:prstGeom>
+          <a:solidFill>
+            <a:srgbClr val="DC2626"/>
+          </a:solidFill>
+          <a:ln>
+            <a:noFill/>
+          </a:ln>
+          <a:effectLst/>
+        </p:spPr>
+        <p:style>
+          <a:lnRef idx="1">
+            <a:schemeClr val="accent1"/>
+          </a:lnRef>
+          <a:fillRef idx="3">
+            <a:schemeClr val="accent1"/>
+          </a:fillRef>
+          <a:effectRef idx="2">
+            <a:schemeClr val="accent1"/>
+          </a:effectRef>
+          <a:fontRef idx="minor">
+            <a:schemeClr val="lt1"/>
+          </a:fontRef>
+        </p:style>
+        <p:txBody>
+          <a:bodyPr rtlCol="0" anchor="ctr"/>
+          <a:lstStyle/>
+          <a:p>
+            <a:pPr algn="ctr"/>
+          </a:p>
+        </p:txBody>
+      </p:sp>
+      <p:sp>
+        <p:nvSpPr>
+          <p:cNvPr id="20" name="TextBox 19"/>
+          <p:cNvSpPr txBox="1"/>
+          <p:nvPr/>
+        </p:nvSpPr>
+        <p:spPr>
+          <a:xfrm>
+            <a:off x="896112" y="2926079"/>
+            <a:ext cx="1783080" cy="722376"/>
+          </a:xfrm>
+          <a:prstGeom prst="rect">
+            <a:avLst/>
+          </a:prstGeom>
+          <a:noFill/>
+        </p:spPr>
+        <p:txBody>
+          <a:bodyPr wrap="square" lIns="0" rIns="0" tIns="18288" bIns="18288" anchor="ctr">
+            <a:spAutoFit/>
+          </a:bodyPr>
+          <a:lstStyle/>
+          <a:p>
+            <a:pPr algn="l"/>
+            <a:r>
+              <a:rPr sz="1200" b="1">
+                <a:solidFill>
+                  <a:srgbClr val="0F172A"/>
+                </a:solidFill>
+                <a:latin typeface="Calibri"/>
+              </a:rPr>
+              <a:t>Shelfware</a:t>
+            </a:r>
+          </a:p>
+          <a:p>
+            <a:pPr algn="l"/>
+            <a:r>
+              <a:rPr sz="900" b="0">
+                <a:solidFill>
+                  <a:srgbClr val="475569"/>
+                </a:solidFill>
+                <a:latin typeface="Calibri"/>
+              </a:rPr>
+              <a:t>~10%</a:t>
+            </a:r>
+          </a:p>
+        </p:txBody>
+      </p:sp>
+      <p:sp>
+        <p:nvSpPr>
+          <p:cNvPr id="21" name="Rounded Rectangle 20"/>
+          <p:cNvSpPr/>
+          <p:nvPr/>
+        </p:nvSpPr>
+        <p:spPr>
+          <a:xfrm>
+            <a:off x="2788920" y="2971799"/>
+            <a:ext cx="3246120" cy="630936"/>
+          </a:xfrm>
+          <a:prstGeom prst="roundRect">
+            <a:avLst>
+              <a:gd name="adj" fmla="val 18000"/>
+            </a:avLst>
+          </a:prstGeom>
+          <a:solidFill>
+            <a:srgbClr val="FEF2F2"/>
+          </a:solidFill>
+          <a:ln w="9525">
+            <a:solidFill>
+              <a:srgbClr val="FECACA"/>
+            </a:solidFill>
+          </a:ln>
+          <a:effectLst/>
+        </p:spPr>
+        <p:style>
+          <a:lnRef idx="1">
+            <a:schemeClr val="accent1"/>
+          </a:lnRef>
+          <a:fillRef idx="3">
+            <a:schemeClr val="accent1"/>
+          </a:fillRef>
+          <a:effectRef idx="2">
+            <a:schemeClr val="accent1"/>
+          </a:effectRef>
+          <a:fontRef idx="minor">
+            <a:schemeClr val="lt1"/>
+          </a:fontRef>
+        </p:style>
+        <p:txBody>
+          <a:bodyPr rtlCol="0" anchor="ctr"/>
+          <a:lstStyle/>
+          <a:p>
+            <a:pPr algn="ctr"/>
+          </a:p>
+        </p:txBody>
+      </p:sp>
+      <p:sp>
+        <p:nvSpPr>
+          <p:cNvPr id="22" name="TextBox 21"/>
+          <p:cNvSpPr txBox="1"/>
+          <p:nvPr/>
+        </p:nvSpPr>
+        <p:spPr>
+          <a:xfrm>
+            <a:off x="2788920" y="2971799"/>
+            <a:ext cx="3246120" cy="630936"/>
+          </a:xfrm>
+          <a:prstGeom prst="rect">
+            <a:avLst/>
+          </a:prstGeom>
+          <a:noFill/>
+        </p:spPr>
+        <p:txBody>
+          <a:bodyPr wrap="square" tIns="18288" bIns="18288" anchor="ctr">
+            <a:spAutoFit/>
+          </a:bodyPr>
+          <a:lstStyle/>
+          <a:p>
+            <a:pPr algn="l"/>
+            <a:r>
+              <a:rPr sz="1000" b="0">
+                <a:solidFill>
+                  <a:srgbClr val="7F1D1D"/>
+                </a:solidFill>
+                <a:latin typeface="Calibri"/>
+              </a:rPr>
+              <a:t>ARR component (often 30%+ weight) props score into the 30–50 range. Looks like a 'watch' account, not an emergency.</a:t>
+            </a:r>
+          </a:p>
+        </p:txBody>
+      </p:sp>
+      <p:sp>
+        <p:nvSpPr>
+          <p:cNvPr id="23" name="Rounded Rectangle 22"/>
+          <p:cNvSpPr/>
+          <p:nvPr/>
+        </p:nvSpPr>
+        <p:spPr>
+          <a:xfrm>
+            <a:off x="6172200" y="2971799"/>
+            <a:ext cx="3886200" cy="630936"/>
+          </a:xfrm>
+          <a:prstGeom prst="roundRect">
+            <a:avLst>
+              <a:gd name="adj" fmla="val 18000"/>
+            </a:avLst>
+          </a:prstGeom>
+          <a:solidFill>
+            <a:srgbClr val="F0FDF4"/>
+          </a:solidFill>
+          <a:ln w="9525">
+            <a:solidFill>
+              <a:srgbClr val="BBF7D0"/>
+            </a:solidFill>
+          </a:ln>
+          <a:effectLst/>
+        </p:spPr>
+        <p:style>
+          <a:lnRef idx="1">
+            <a:schemeClr val="accent1"/>
+          </a:lnRef>
+          <a:fillRef idx="3">
+            <a:schemeClr val="accent1"/>
+          </a:fillRef>
+          <a:effectRef idx="2">
+            <a:schemeClr val="accent1"/>
+          </a:effectRef>
+          <a:fontRef idx="minor">
+            <a:schemeClr val="lt1"/>
+          </a:fontRef>
+        </p:style>
+        <p:txBody>
+          <a:bodyPr rtlCol="0" anchor="ctr"/>
+          <a:lstStyle/>
+          <a:p>
+            <a:pPr algn="ctr"/>
+          </a:p>
+        </p:txBody>
+      </p:sp>
+      <p:sp>
+        <p:nvSpPr>
+          <p:cNvPr id="24" name="TextBox 23"/>
+          <p:cNvSpPr txBox="1"/>
+          <p:nvPr/>
+        </p:nvSpPr>
+        <p:spPr>
+          <a:xfrm>
+            <a:off x="6172200" y="2971799"/>
+            <a:ext cx="3886200" cy="630936"/>
+          </a:xfrm>
+          <a:prstGeom prst="rect">
+            <a:avLst/>
+          </a:prstGeom>
+          <a:noFill/>
+        </p:spPr>
+        <p:txBody>
+          <a:bodyPr wrap="square" tIns="18288" bIns="18288" anchor="ctr">
+            <a:spAutoFit/>
+          </a:bodyPr>
+          <a:lstStyle/>
+          <a:p>
+            <a:pPr algn="l"/>
+            <a:r>
+              <a:rPr sz="1000" b="0">
+                <a:solidFill>
+                  <a:srgbClr val="14532D"/>
+                </a:solidFill>
+                <a:latin typeface="Calibri"/>
+              </a:rPr>
+              <a:t>ARR not a pillar. Three pillars collapse (CR≈0, UM≈0, DM≈0). Even perfect TH pulls AVRI to ~20.</a:t>
+            </a:r>
+          </a:p>
+        </p:txBody>
+      </p:sp>
+      <p:sp>
+        <p:nvSpPr>
+          <p:cNvPr id="25" name="Rounded Rectangle 24"/>
+          <p:cNvSpPr/>
+          <p:nvPr/>
+        </p:nvSpPr>
+        <p:spPr>
+          <a:xfrm>
+            <a:off x="10195560" y="3017520"/>
+            <a:ext cx="1371600" cy="329184"/>
+          </a:xfrm>
+          <a:prstGeom prst="roundRect">
+            <a:avLst>
+              <a:gd name="adj" fmla="val 30000"/>
+            </a:avLst>
+          </a:prstGeom>
+          <a:solidFill>
+            <a:srgbClr val="DC2626"/>
+          </a:solidFill>
+          <a:ln>
+            <a:noFill/>
+          </a:ln>
+          <a:effectLst/>
+        </p:spPr>
+        <p:style>
+          <a:lnRef idx="1">
+            <a:schemeClr val="accent1"/>
+          </a:lnRef>
+          <a:fillRef idx="3">
+            <a:schemeClr val="accent1"/>
+          </a:fillRef>
+          <a:effectRef idx="2">
+            <a:schemeClr val="accent1"/>
+          </a:effectRef>
+          <a:fontRef idx="minor">
+            <a:schemeClr val="lt1"/>
+          </a:fontRef>
+        </p:style>
+        <p:txBody>
+          <a:bodyPr rtlCol="0" anchor="ctr"/>
+          <a:lstStyle/>
+          <a:p>
+            <a:pPr algn="ctr"/>
+          </a:p>
+        </p:txBody>
+      </p:sp>
+      <p:sp>
+        <p:nvSpPr>
+          <p:cNvPr id="26" name="TextBox 25"/>
+          <p:cNvSpPr txBox="1"/>
+          <p:nvPr/>
+        </p:nvSpPr>
+        <p:spPr>
+          <a:xfrm>
+            <a:off x="10195560" y="3017520"/>
+            <a:ext cx="1371600" cy="329184"/>
+          </a:xfrm>
+          <a:prstGeom prst="rect">
+            <a:avLst/>
+          </a:prstGeom>
+          <a:noFill/>
+        </p:spPr>
+        <p:txBody>
+          <a:bodyPr wrap="square" lIns="0" rIns="0" tIns="18288" bIns="18288" anchor="ctr">
+            <a:spAutoFit/>
+          </a:bodyPr>
+          <a:lstStyle/>
+          <a:p>
+            <a:pPr algn="ctr"/>
+            <a:r>
+              <a:rPr sz="900" b="1">
+                <a:solidFill>
+                  <a:srgbClr val="FFFFFF"/>
+                </a:solidFill>
+                <a:latin typeface="Calibri"/>
+              </a:rPr>
+              <a:t>DEEP RED</a:t>
+            </a:r>
+          </a:p>
+        </p:txBody>
+      </p:sp>
+      <p:sp>
+        <p:nvSpPr>
+          <p:cNvPr id="27" name="TextBox 26"/>
+          <p:cNvSpPr txBox="1"/>
+          <p:nvPr/>
+        </p:nvSpPr>
+        <p:spPr>
+          <a:xfrm>
+            <a:off x="10195560" y="3383279"/>
+            <a:ext cx="1371600" cy="219456"/>
+          </a:xfrm>
+          <a:prstGeom prst="rect">
+            <a:avLst/>
+          </a:prstGeom>
+          <a:noFill/>
+        </p:spPr>
+        <p:txBody>
+          <a:bodyPr wrap="square" lIns="0" rIns="0" tIns="18288" bIns="18288" anchor="ctr">
+            <a:spAutoFit/>
+          </a:bodyPr>
+          <a:lstStyle/>
+          <a:p>
+            <a:pPr algn="ctr"/>
+            <a:r>
+              <a:rPr sz="900" b="1">
+                <a:solidFill>
+                  <a:srgbClr val="475569"/>
+                </a:solidFill>
+                <a:latin typeface="Calibri"/>
+              </a:rPr>
+              <a:t>CR · UM · DM</a:t>
+            </a:r>
+          </a:p>
+        </p:txBody>
+      </p:sp>
+      <p:sp>
+        <p:nvSpPr>
+          <p:cNvPr id="28" name="Rounded Rectangle 27"/>
+          <p:cNvSpPr/>
+          <p:nvPr/>
+        </p:nvSpPr>
+        <p:spPr>
+          <a:xfrm>
+            <a:off x="502920" y="3749039"/>
+            <a:ext cx="320040" cy="630936"/>
+          </a:xfrm>
+          <a:prstGeom prst="roundRect">
+            <a:avLst>
+              <a:gd name="adj" fmla="val 50000"/>
+            </a:avLst>
+          </a:prstGeom>
+          <a:solidFill>
+            <a:srgbClr val="059669"/>
+          </a:solidFill>
+          <a:ln>
+            <a:noFill/>
+          </a:ln>
+          <a:effectLst/>
+        </p:spPr>
+        <p:style>
+          <a:lnRef idx="1">
+            <a:schemeClr val="accent1"/>
+          </a:lnRef>
+          <a:fillRef idx="3">
+            <a:schemeClr val="accent1"/>
+          </a:fillRef>
+          <a:effectRef idx="2">
+            <a:schemeClr val="accent1"/>
+          </a:effectRef>
+          <a:fontRef idx="minor">
+            <a:schemeClr val="lt1"/>
+          </a:fontRef>
+        </p:style>
+        <p:txBody>
+          <a:bodyPr rtlCol="0" anchor="ctr"/>
+          <a:lstStyle/>
+          <a:p>
+            <a:pPr algn="ctr"/>
+          </a:p>
+        </p:txBody>
+      </p:sp>
+      <p:sp>
+        <p:nvSpPr>
+          <p:cNvPr id="29" name="TextBox 28"/>
+          <p:cNvSpPr txBox="1"/>
+          <p:nvPr/>
+        </p:nvSpPr>
+        <p:spPr>
+          <a:xfrm>
+            <a:off x="896112" y="3703320"/>
+            <a:ext cx="1783080" cy="722376"/>
+          </a:xfrm>
+          <a:prstGeom prst="rect">
+            <a:avLst/>
+          </a:prstGeom>
+          <a:noFill/>
+        </p:spPr>
+        <p:txBody>
+          <a:bodyPr wrap="square" lIns="0" rIns="0" tIns="18288" bIns="18288" anchor="ctr">
+            <a:spAutoFit/>
+          </a:bodyPr>
+          <a:lstStyle/>
+          <a:p>
+            <a:pPr algn="l"/>
+            <a:r>
+              <a:rPr sz="1200" b="1">
+                <a:solidFill>
+                  <a:srgbClr val="0F172A"/>
+                </a:solidFill>
+                <a:latin typeface="Calibri"/>
+              </a:rPr>
+              <a:t>Consistent Overage</a:t>
+            </a:r>
+          </a:p>
+          <a:p>
+            <a:pPr algn="l"/>
+            <a:r>
+              <a:rPr sz="900" b="0">
+                <a:solidFill>
+                  <a:srgbClr val="475569"/>
+                </a:solidFill>
+                <a:latin typeface="Calibri"/>
+              </a:rPr>
+              <a:t>~15%</a:t>
+            </a:r>
+          </a:p>
+        </p:txBody>
+      </p:sp>
+      <p:sp>
+        <p:nvSpPr>
+          <p:cNvPr id="30" name="Rounded Rectangle 29"/>
+          <p:cNvSpPr/>
+          <p:nvPr/>
+        </p:nvSpPr>
+        <p:spPr>
+          <a:xfrm>
+            <a:off x="2788920" y="3749039"/>
+            <a:ext cx="3246120" cy="630936"/>
+          </a:xfrm>
+          <a:prstGeom prst="roundRect">
+            <a:avLst>
+              <a:gd name="adj" fmla="val 18000"/>
+            </a:avLst>
+          </a:prstGeom>
+          <a:solidFill>
+            <a:srgbClr val="FEF2F2"/>
+          </a:solidFill>
+          <a:ln w="9525">
+            <a:solidFill>
+              <a:srgbClr val="FECACA"/>
+            </a:solidFill>
+          </a:ln>
+          <a:effectLst/>
+        </p:spPr>
+        <p:style>
+          <a:lnRef idx="1">
+            <a:schemeClr val="accent1"/>
+          </a:lnRef>
+          <a:fillRef idx="3">
+            <a:schemeClr val="accent1"/>
+          </a:fillRef>
+          <a:effectRef idx="2">
+            <a:schemeClr val="accent1"/>
+          </a:effectRef>
+          <a:fontRef idx="minor">
+            <a:schemeClr val="lt1"/>
+          </a:fontRef>
+        </p:style>
+        <p:txBody>
+          <a:bodyPr rtlCol="0" anchor="ctr"/>
+          <a:lstStyle/>
+          <a:p>
+            <a:pPr algn="ctr"/>
+          </a:p>
+        </p:txBody>
+      </p:sp>
+      <p:sp>
+        <p:nvSpPr>
+          <p:cNvPr id="31" name="TextBox 30"/>
+          <p:cNvSpPr txBox="1"/>
+          <p:nvPr/>
+        </p:nvSpPr>
+        <p:spPr>
+          <a:xfrm>
+            <a:off x="2788920" y="3749039"/>
+            <a:ext cx="3246120" cy="630936"/>
+          </a:xfrm>
+          <a:prstGeom prst="rect">
+            <a:avLst/>
+          </a:prstGeom>
+          <a:noFill/>
+        </p:spPr>
+        <p:txBody>
+          <a:bodyPr wrap="square" tIns="18288" bIns="18288" anchor="ctr">
+            <a:spAutoFit/>
+          </a:bodyPr>
+          <a:lstStyle/>
+          <a:p>
+            <a:pPr algn="l"/>
+            <a:r>
+              <a:rPr sz="1000" b="0">
+                <a:solidFill>
+                  <a:srgbClr val="7F1D1D"/>
+                </a:solidFill>
+                <a:latin typeface="Calibri"/>
+              </a:rPr>
+              <a:t>Caps util at 100% or penalizes anything above. 130%-util account scores Yellow; CSM told to 'manage burn rate.'</a:t>
+            </a:r>
+          </a:p>
+        </p:txBody>
+      </p:sp>
+      <p:sp>
+        <p:nvSpPr>
+          <p:cNvPr id="32" name="Rounded Rectangle 31"/>
+          <p:cNvSpPr/>
+          <p:nvPr/>
+        </p:nvSpPr>
+        <p:spPr>
+          <a:xfrm>
+            <a:off x="6172200" y="3749039"/>
+            <a:ext cx="3886200" cy="630936"/>
+          </a:xfrm>
+          <a:prstGeom prst="roundRect">
+            <a:avLst>
+              <a:gd name="adj" fmla="val 18000"/>
+            </a:avLst>
+          </a:prstGeom>
+          <a:solidFill>
+            <a:srgbClr val="F0FDF4"/>
+          </a:solidFill>
+          <a:ln w="9525">
+            <a:solidFill>
+              <a:srgbClr val="BBF7D0"/>
+            </a:solidFill>
+          </a:ln>
+          <a:effectLst/>
+        </p:spPr>
+        <p:style>
+          <a:lnRef idx="1">
+            <a:schemeClr val="accent1"/>
+          </a:lnRef>
+          <a:fillRef idx="3">
+            <a:schemeClr val="accent1"/>
+          </a:fillRef>
+          <a:effectRef idx="2">
+            <a:schemeClr val="accent1"/>
+          </a:effectRef>
+          <a:fontRef idx="minor">
+            <a:schemeClr val="lt1"/>
+          </a:fontRef>
+        </p:style>
+        <p:txBody>
+          <a:bodyPr rtlCol="0" anchor="ctr"/>
+          <a:lstStyle/>
+          <a:p>
+            <a:pPr algn="ctr"/>
+          </a:p>
+        </p:txBody>
+      </p:sp>
+      <p:sp>
+        <p:nvSpPr>
+          <p:cNvPr id="33" name="TextBox 32"/>
+          <p:cNvSpPr txBox="1"/>
+          <p:nvPr/>
+        </p:nvSpPr>
+        <p:spPr>
+          <a:xfrm>
+            <a:off x="6172200" y="3749039"/>
+            <a:ext cx="3886200" cy="630936"/>
+          </a:xfrm>
+          <a:prstGeom prst="rect">
+            <a:avLst/>
+          </a:prstGeom>
+          <a:noFill/>
+        </p:spPr>
+        <p:txBody>
+          <a:bodyPr wrap="square" tIns="18288" bIns="18288" anchor="ctr">
+            <a:spAutoFit/>
+          </a:bodyPr>
+          <a:lstStyle/>
+          <a:p>
+            <a:pPr algn="l"/>
+            <a:r>
+              <a:rPr sz="1000" b="0">
+                <a:solidFill>
+                  <a:srgbClr val="14532D"/>
+                </a:solidFill>
+                <a:latin typeface="Calibri"/>
+              </a:rPr>
+              <a:t>CR is piecewise: 50–110% util = full credit (sweet zone). 110–150% = gentle decay. 200%+ = hard zero.</a:t>
+            </a:r>
+          </a:p>
+        </p:txBody>
+      </p:sp>
+      <p:sp>
+        <p:nvSpPr>
+          <p:cNvPr id="34" name="Rounded Rectangle 33"/>
+          <p:cNvSpPr/>
+          <p:nvPr/>
+        </p:nvSpPr>
+        <p:spPr>
+          <a:xfrm>
+            <a:off x="10195560" y="3794759"/>
+            <a:ext cx="1371600" cy="329184"/>
+          </a:xfrm>
+          <a:prstGeom prst="roundRect">
+            <a:avLst>
+              <a:gd name="adj" fmla="val 30000"/>
+            </a:avLst>
+          </a:prstGeom>
+          <a:solidFill>
+            <a:srgbClr val="059669"/>
+          </a:solidFill>
+          <a:ln>
+            <a:noFill/>
+          </a:ln>
+          <a:effectLst/>
+        </p:spPr>
+        <p:style>
+          <a:lnRef idx="1">
+            <a:schemeClr val="accent1"/>
+          </a:lnRef>
+          <a:fillRef idx="3">
+            <a:schemeClr val="accent1"/>
+          </a:fillRef>
+          <a:effectRef idx="2">
+            <a:schemeClr val="accent1"/>
+          </a:effectRef>
+          <a:fontRef idx="minor">
+            <a:schemeClr val="lt1"/>
+          </a:fontRef>
+        </p:style>
+        <p:txBody>
+          <a:bodyPr rtlCol="0" anchor="ctr"/>
+          <a:lstStyle/>
+          <a:p>
+            <a:pPr algn="ctr"/>
+          </a:p>
+        </p:txBody>
+      </p:sp>
+      <p:sp>
+        <p:nvSpPr>
+          <p:cNvPr id="35" name="TextBox 34"/>
+          <p:cNvSpPr txBox="1"/>
+          <p:nvPr/>
+        </p:nvSpPr>
+        <p:spPr>
+          <a:xfrm>
+            <a:off x="10195560" y="3794759"/>
+            <a:ext cx="1371600" cy="329184"/>
+          </a:xfrm>
+          <a:prstGeom prst="rect">
+            <a:avLst/>
+          </a:prstGeom>
+          <a:noFill/>
+        </p:spPr>
+        <p:txBody>
+          <a:bodyPr wrap="square" lIns="0" rIns="0" tIns="18288" bIns="18288" anchor="ctr">
+            <a:spAutoFit/>
+          </a:bodyPr>
+          <a:lstStyle/>
+          <a:p>
+            <a:pPr algn="ctr"/>
+            <a:r>
+              <a:rPr sz="900" b="1">
+                <a:solidFill>
+                  <a:srgbClr val="FFFFFF"/>
+                </a:solidFill>
+                <a:latin typeface="Calibri"/>
+              </a:rPr>
+              <a:t>GREEN + expansion</a:t>
+            </a:r>
+          </a:p>
+        </p:txBody>
+      </p:sp>
+      <p:sp>
+        <p:nvSpPr>
+          <p:cNvPr id="36" name="TextBox 35"/>
+          <p:cNvSpPr txBox="1"/>
+          <p:nvPr/>
+        </p:nvSpPr>
+        <p:spPr>
+          <a:xfrm>
+            <a:off x="10195560" y="4160520"/>
+            <a:ext cx="1371600" cy="219456"/>
+          </a:xfrm>
+          <a:prstGeom prst="rect">
+            <a:avLst/>
+          </a:prstGeom>
+          <a:noFill/>
+        </p:spPr>
+        <p:txBody>
+          <a:bodyPr wrap="square" lIns="0" rIns="0" tIns="18288" bIns="18288" anchor="ctr">
+            <a:spAutoFit/>
+          </a:bodyPr>
+          <a:lstStyle/>
+          <a:p>
+            <a:pPr algn="ctr"/>
+            <a:r>
+              <a:rPr sz="900" b="1">
+                <a:solidFill>
+                  <a:srgbClr val="475569"/>
+                </a:solidFill>
+                <a:latin typeface="Calibri"/>
+              </a:rPr>
+              <a:t>CR plateau</a:t>
+            </a:r>
+          </a:p>
+        </p:txBody>
+      </p:sp>
+      <p:sp>
+        <p:nvSpPr>
+          <p:cNvPr id="37" name="Rounded Rectangle 36"/>
+          <p:cNvSpPr/>
+          <p:nvPr/>
+        </p:nvSpPr>
+        <p:spPr>
+          <a:xfrm>
+            <a:off x="502920" y="4526279"/>
+            <a:ext cx="320040" cy="630936"/>
+          </a:xfrm>
+          <a:prstGeom prst="roundRect">
+            <a:avLst>
+              <a:gd name="adj" fmla="val 50000"/>
+            </a:avLst>
+          </a:prstGeom>
+          <a:solidFill>
+            <a:srgbClr val="059669"/>
+          </a:solidFill>
+          <a:ln>
+            <a:noFill/>
+          </a:ln>
+          <a:effectLst/>
+        </p:spPr>
+        <p:style>
+          <a:lnRef idx="1">
+            <a:schemeClr val="accent1"/>
+          </a:lnRef>
+          <a:fillRef idx="3">
+            <a:schemeClr val="accent1"/>
+          </a:fillRef>
+          <a:effectRef idx="2">
+            <a:schemeClr val="accent1"/>
+          </a:effectRef>
+          <a:fontRef idx="minor">
+            <a:schemeClr val="lt1"/>
+          </a:fontRef>
+        </p:style>
+        <p:txBody>
+          <a:bodyPr rtlCol="0" anchor="ctr"/>
+          <a:lstStyle/>
+          <a:p>
+            <a:pPr algn="ctr"/>
+          </a:p>
+        </p:txBody>
+      </p:sp>
+      <p:sp>
+        <p:nvSpPr>
+          <p:cNvPr id="38" name="TextBox 37"/>
+          <p:cNvSpPr txBox="1"/>
+          <p:nvPr/>
+        </p:nvSpPr>
+        <p:spPr>
+          <a:xfrm>
+            <a:off x="896112" y="4480559"/>
+            <a:ext cx="1783080" cy="722376"/>
+          </a:xfrm>
+          <a:prstGeom prst="rect">
+            <a:avLst/>
+          </a:prstGeom>
+          <a:noFill/>
+        </p:spPr>
+        <p:txBody>
+          <a:bodyPr wrap="square" lIns="0" rIns="0" tIns="18288" bIns="18288" anchor="ctr">
+            <a:spAutoFit/>
+          </a:bodyPr>
+          <a:lstStyle/>
+          <a:p>
+            <a:pPr algn="l"/>
+            <a:r>
+              <a:rPr sz="1200" b="1">
+                <a:solidFill>
+                  <a:srgbClr val="0F172A"/>
+                </a:solidFill>
+                <a:latin typeface="Calibri"/>
+              </a:rPr>
+              <a:t>Mid-Year Expansion</a:t>
+            </a:r>
+          </a:p>
+          <a:p>
+            <a:pPr algn="l"/>
+            <a:r>
+              <a:rPr sz="900" b="0">
+                <a:solidFill>
+                  <a:srgbClr val="475569"/>
+                </a:solidFill>
+                <a:latin typeface="Calibri"/>
+              </a:rPr>
+              <a:t>~5%</a:t>
+            </a:r>
+          </a:p>
+        </p:txBody>
+      </p:sp>
+      <p:sp>
+        <p:nvSpPr>
+          <p:cNvPr id="39" name="Rounded Rectangle 38"/>
+          <p:cNvSpPr/>
+          <p:nvPr/>
+        </p:nvSpPr>
+        <p:spPr>
+          <a:xfrm>
+            <a:off x="2788920" y="4526279"/>
+            <a:ext cx="3246120" cy="630936"/>
+          </a:xfrm>
+          <a:prstGeom prst="roundRect">
+            <a:avLst>
+              <a:gd name="adj" fmla="val 18000"/>
+            </a:avLst>
+          </a:prstGeom>
+          <a:solidFill>
+            <a:srgbClr val="FEF2F2"/>
+          </a:solidFill>
+          <a:ln w="9525">
+            <a:solidFill>
+              <a:srgbClr val="FECACA"/>
+            </a:solidFill>
+          </a:ln>
+          <a:effectLst/>
+        </p:spPr>
+        <p:style>
+          <a:lnRef idx="1">
+            <a:schemeClr val="accent1"/>
+          </a:lnRef>
+          <a:fillRef idx="3">
+            <a:schemeClr val="accent1"/>
+          </a:fillRef>
+          <a:effectRef idx="2">
+            <a:schemeClr val="accent1"/>
+          </a:effectRef>
+          <a:fontRef idx="minor">
+            <a:schemeClr val="lt1"/>
+          </a:fontRef>
+        </p:style>
+        <p:txBody>
+          <a:bodyPr rtlCol="0" anchor="ctr"/>
+          <a:lstStyle/>
+          <a:p>
+            <a:pPr algn="ctr"/>
+          </a:p>
+        </p:txBody>
+      </p:sp>
+      <p:sp>
+        <p:nvSpPr>
+          <p:cNvPr id="40" name="TextBox 39"/>
+          <p:cNvSpPr txBox="1"/>
+          <p:nvPr/>
+        </p:nvSpPr>
+        <p:spPr>
+          <a:xfrm>
+            <a:off x="2788920" y="4526279"/>
+            <a:ext cx="3246120" cy="630936"/>
+          </a:xfrm>
+          <a:prstGeom prst="rect">
+            <a:avLst/>
+          </a:prstGeom>
+          <a:noFill/>
+        </p:spPr>
+        <p:txBody>
+          <a:bodyPr wrap="square" tIns="18288" bIns="18288" anchor="ctr">
+            <a:spAutoFit/>
+          </a:bodyPr>
+          <a:lstStyle/>
+          <a:p>
+            <a:pPr algn="l"/>
+            <a:r>
+              <a:rPr sz="1000" b="0">
+                <a:solidFill>
+                  <a:srgbClr val="7F1D1D"/>
+                </a:solidFill>
+                <a:latin typeface="Calibri"/>
+              </a:rPr>
+              <a:t>Takes latest contract only (loses original commit) OR sums both regardless of date overlap (double-counts).</a:t>
+            </a:r>
+          </a:p>
+        </p:txBody>
+      </p:sp>
+      <p:sp>
+        <p:nvSpPr>
+          <p:cNvPr id="41" name="Rounded Rectangle 40"/>
+          <p:cNvSpPr/>
+          <p:nvPr/>
+        </p:nvSpPr>
+        <p:spPr>
+          <a:xfrm>
+            <a:off x="6172200" y="4526279"/>
+            <a:ext cx="3886200" cy="630936"/>
+          </a:xfrm>
+          <a:prstGeom prst="roundRect">
+            <a:avLst>
+              <a:gd name="adj" fmla="val 18000"/>
+            </a:avLst>
+          </a:prstGeom>
+          <a:solidFill>
+            <a:srgbClr val="F0FDF4"/>
+          </a:solidFill>
+          <a:ln w="9525">
+            <a:solidFill>
+              <a:srgbClr val="BBF7D0"/>
+            </a:solidFill>
+          </a:ln>
+          <a:effectLst/>
+        </p:spPr>
+        <p:style>
+          <a:lnRef idx="1">
+            <a:schemeClr val="accent1"/>
+          </a:lnRef>
+          <a:fillRef idx="3">
+            <a:schemeClr val="accent1"/>
+          </a:fillRef>
+          <a:effectRef idx="2">
+            <a:schemeClr val="accent1"/>
+          </a:effectRef>
+          <a:fontRef idx="minor">
+            <a:schemeClr val="lt1"/>
+          </a:fontRef>
+        </p:style>
+        <p:txBody>
+          <a:bodyPr rtlCol="0" anchor="ctr"/>
+          <a:lstStyle/>
+          <a:p>
+            <a:pPr algn="ctr"/>
+          </a:p>
+        </p:txBody>
+      </p:sp>
+      <p:sp>
+        <p:nvSpPr>
+          <p:cNvPr id="42" name="TextBox 41"/>
+          <p:cNvSpPr txBox="1"/>
+          <p:nvPr/>
+        </p:nvSpPr>
+        <p:spPr>
+          <a:xfrm>
+            <a:off x="6172200" y="4526279"/>
+            <a:ext cx="3886200" cy="630936"/>
+          </a:xfrm>
+          <a:prstGeom prst="rect">
+            <a:avLst/>
+          </a:prstGeom>
+          <a:noFill/>
+        </p:spPr>
+        <p:txBody>
+          <a:bodyPr wrap="square" tIns="18288" bIns="18288" anchor="ctr">
+            <a:spAutoFit/>
+          </a:bodyPr>
+          <a:lstStyle/>
+          <a:p>
+            <a:pPr algn="l"/>
+            <a:r>
+              <a:rPr sz="1000" b="0">
+                <a:solidFill>
+                  <a:srgbClr val="14532D"/>
+                </a:solidFill>
+                <a:latin typeface="Calibri"/>
+              </a:rPr>
+              <a:t>Denominator at any point in time = SUM of active commits for any contract whose date range covers that point.</a:t>
+            </a:r>
+          </a:p>
+        </p:txBody>
+      </p:sp>
+      <p:sp>
+        <p:nvSpPr>
+          <p:cNvPr id="43" name="Rounded Rectangle 42"/>
+          <p:cNvSpPr/>
+          <p:nvPr/>
+        </p:nvSpPr>
+        <p:spPr>
+          <a:xfrm>
+            <a:off x="10195560" y="4571999"/>
+            <a:ext cx="1371600" cy="329184"/>
+          </a:xfrm>
+          <a:prstGeom prst="roundRect">
+            <a:avLst>
+              <a:gd name="adj" fmla="val 30000"/>
+            </a:avLst>
+          </a:prstGeom>
+          <a:solidFill>
+            <a:srgbClr val="059669"/>
+          </a:solidFill>
+          <a:ln>
+            <a:noFill/>
+          </a:ln>
+          <a:effectLst/>
+        </p:spPr>
+        <p:style>
+          <a:lnRef idx="1">
+            <a:schemeClr val="accent1"/>
+          </a:lnRef>
+          <a:fillRef idx="3">
+            <a:schemeClr val="accent1"/>
+          </a:fillRef>
+          <a:effectRef idx="2">
+            <a:schemeClr val="accent1"/>
+          </a:effectRef>
+          <a:fontRef idx="minor">
+            <a:schemeClr val="lt1"/>
+          </a:fontRef>
+        </p:style>
+        <p:txBody>
+          <a:bodyPr rtlCol="0" anchor="ctr"/>
+          <a:lstStyle/>
+          <a:p>
+            <a:pPr algn="ctr"/>
+          </a:p>
+        </p:txBody>
+      </p:sp>
+      <p:sp>
+        <p:nvSpPr>
+          <p:cNvPr id="44" name="TextBox 43"/>
+          <p:cNvSpPr txBox="1"/>
+          <p:nvPr/>
+        </p:nvSpPr>
+        <p:spPr>
+          <a:xfrm>
+            <a:off x="10195560" y="4571999"/>
+            <a:ext cx="1371600" cy="329184"/>
+          </a:xfrm>
+          <a:prstGeom prst="rect">
+            <a:avLst/>
+          </a:prstGeom>
+          <a:noFill/>
+        </p:spPr>
+        <p:txBody>
+          <a:bodyPr wrap="square" lIns="0" rIns="0" tIns="18288" bIns="18288" anchor="ctr">
+            <a:spAutoFit/>
+          </a:bodyPr>
+          <a:lstStyle/>
+          <a:p>
+            <a:pPr algn="ctr"/>
+            <a:r>
+              <a:rPr sz="900" b="1">
+                <a:solidFill>
+                  <a:srgbClr val="FFFFFF"/>
+                </a:solidFill>
+                <a:latin typeface="Calibri"/>
+              </a:rPr>
+              <a:t>no distortion</a:t>
+            </a:r>
+          </a:p>
+        </p:txBody>
+      </p:sp>
+      <p:sp>
+        <p:nvSpPr>
+          <p:cNvPr id="45" name="TextBox 44"/>
+          <p:cNvSpPr txBox="1"/>
+          <p:nvPr/>
+        </p:nvSpPr>
+        <p:spPr>
+          <a:xfrm>
+            <a:off x="10195560" y="4937759"/>
+            <a:ext cx="1371600" cy="219456"/>
+          </a:xfrm>
+          <a:prstGeom prst="rect">
+            <a:avLst/>
+          </a:prstGeom>
+          <a:noFill/>
+        </p:spPr>
+        <p:txBody>
+          <a:bodyPr wrap="square" lIns="0" rIns="0" tIns="18288" bIns="18288" anchor="ctr">
+            <a:spAutoFit/>
+          </a:bodyPr>
+          <a:lstStyle/>
+          <a:p>
+            <a:pPr algn="ctr"/>
+            <a:r>
+              <a:rPr sz="900" b="1">
+                <a:solidFill>
+                  <a:srgbClr val="475569"/>
+                </a:solidFill>
+                <a:latin typeface="Calibri"/>
+              </a:rPr>
+              <a:t>Pipeline</a:t>
+            </a:r>
+          </a:p>
+        </p:txBody>
+      </p:sp>
+      <p:sp>
+        <p:nvSpPr>
+          <p:cNvPr id="46" name="Rounded Rectangle 45"/>
+          <p:cNvSpPr/>
+          <p:nvPr/>
+        </p:nvSpPr>
+        <p:spPr>
+          <a:xfrm>
+            <a:off x="502920" y="5303520"/>
+            <a:ext cx="320040" cy="630936"/>
+          </a:xfrm>
+          <a:prstGeom prst="roundRect">
+            <a:avLst>
+              <a:gd name="adj" fmla="val 50000"/>
+            </a:avLst>
+          </a:prstGeom>
+          <a:solidFill>
+            <a:srgbClr val="D97706"/>
+          </a:solidFill>
+          <a:ln>
+            <a:noFill/>
+          </a:ln>
+          <a:effectLst/>
+        </p:spPr>
+        <p:style>
+          <a:lnRef idx="1">
+            <a:schemeClr val="accent1"/>
+          </a:lnRef>
+          <a:fillRef idx="3">
+            <a:schemeClr val="accent1"/>
+          </a:fillRef>
+          <a:effectRef idx="2">
+            <a:schemeClr val="accent1"/>
+          </a:effectRef>
+          <a:fontRef idx="minor">
+            <a:schemeClr val="lt1"/>
+          </a:fontRef>
+        </p:style>
+        <p:txBody>
+          <a:bodyPr rtlCol="0" anchor="ctr"/>
+          <a:lstStyle/>
+          <a:p>
+            <a:pPr algn="ctr"/>
+          </a:p>
+        </p:txBody>
+      </p:sp>
+      <p:sp>
+        <p:nvSpPr>
+          <p:cNvPr id="47" name="TextBox 46"/>
+          <p:cNvSpPr txBox="1"/>
+          <p:nvPr/>
+        </p:nvSpPr>
+        <p:spPr>
+          <a:xfrm>
+            <a:off x="896112" y="5257800"/>
+            <a:ext cx="1783080" cy="722376"/>
+          </a:xfrm>
+          <a:prstGeom prst="rect">
+            <a:avLst/>
+          </a:prstGeom>
+          <a:noFill/>
+        </p:spPr>
+        <p:txBody>
+          <a:bodyPr wrap="square" lIns="0" rIns="0" tIns="18288" bIns="18288" anchor="ctr">
+            <a:spAutoFit/>
+          </a:bodyPr>
+          <a:lstStyle/>
+          <a:p>
+            <a:pPr algn="l"/>
+            <a:r>
+              <a:rPr sz="1200" b="1">
+                <a:solidFill>
+                  <a:srgbClr val="0F172A"/>
+                </a:solidFill>
+                <a:latin typeface="Calibri"/>
+              </a:rPr>
+              <a:t>Orphan / Rogue Usage</a:t>
+            </a:r>
+          </a:p>
+          <a:p>
+            <a:pPr algn="l"/>
+            <a:r>
+              <a:rPr sz="900" b="0">
+                <a:solidFill>
+                  <a:srgbClr val="475569"/>
+                </a:solidFill>
+                <a:latin typeface="Calibri"/>
+              </a:rPr>
+              <a:t>~300 logs</a:t>
+            </a:r>
+          </a:p>
+        </p:txBody>
+      </p:sp>
+      <p:sp>
+        <p:nvSpPr>
+          <p:cNvPr id="48" name="Rounded Rectangle 47"/>
+          <p:cNvSpPr/>
+          <p:nvPr/>
+        </p:nvSpPr>
+        <p:spPr>
+          <a:xfrm>
+            <a:off x="2788920" y="5303520"/>
+            <a:ext cx="3246120" cy="630936"/>
+          </a:xfrm>
+          <a:prstGeom prst="roundRect">
+            <a:avLst>
+              <a:gd name="adj" fmla="val 18000"/>
+            </a:avLst>
+          </a:prstGeom>
+          <a:solidFill>
+            <a:srgbClr val="FEF2F2"/>
+          </a:solidFill>
+          <a:ln w="9525">
+            <a:solidFill>
+              <a:srgbClr val="FECACA"/>
+            </a:solidFill>
+          </a:ln>
+          <a:effectLst/>
+        </p:spPr>
+        <p:style>
+          <a:lnRef idx="1">
+            <a:schemeClr val="accent1"/>
+          </a:lnRef>
+          <a:fillRef idx="3">
+            <a:schemeClr val="accent1"/>
+          </a:fillRef>
+          <a:effectRef idx="2">
+            <a:schemeClr val="accent1"/>
+          </a:effectRef>
+          <a:fontRef idx="minor">
+            <a:schemeClr val="lt1"/>
+          </a:fontRef>
+        </p:style>
+        <p:txBody>
+          <a:bodyPr rtlCol="0" anchor="ctr"/>
+          <a:lstStyle/>
+          <a:p>
+            <a:pPr algn="ctr"/>
+          </a:p>
+        </p:txBody>
+      </p:sp>
+      <p:sp>
+        <p:nvSpPr>
+          <p:cNvPr id="49" name="TextBox 48"/>
+          <p:cNvSpPr txBox="1"/>
+          <p:nvPr/>
+        </p:nvSpPr>
+        <p:spPr>
+          <a:xfrm>
+            <a:off x="2788920" y="5303520"/>
+            <a:ext cx="3246120" cy="630936"/>
+          </a:xfrm>
+          <a:prstGeom prst="rect">
+            <a:avLst/>
+          </a:prstGeom>
+          <a:noFill/>
+        </p:spPr>
+        <p:txBody>
+          <a:bodyPr wrap="square" tIns="18288" bIns="18288" anchor="ctr">
+            <a:spAutoFit/>
+          </a:bodyPr>
+          <a:lstStyle/>
+          <a:p>
+            <a:pPr algn="l"/>
+            <a:r>
+              <a:rPr sz="1000" b="0">
+                <a:solidFill>
+                  <a:srgbClr val="7F1D1D"/>
+                </a:solidFill>
+                <a:latin typeface="Calibri"/>
+              </a:rPr>
+              <a:t>LEFT JOIN shortcut: orphan logs vanish silently; out-of-window logs credited as billable. Rollups inflate.</a:t>
+            </a:r>
+          </a:p>
+        </p:txBody>
+      </p:sp>
+      <p:sp>
+        <p:nvSpPr>
+          <p:cNvPr id="50" name="Rounded Rectangle 49"/>
+          <p:cNvSpPr/>
+          <p:nvPr/>
+        </p:nvSpPr>
+        <p:spPr>
+          <a:xfrm>
+            <a:off x="6172200" y="5303520"/>
+            <a:ext cx="3886200" cy="630936"/>
+          </a:xfrm>
+          <a:prstGeom prst="roundRect">
+            <a:avLst>
+              <a:gd name="adj" fmla="val 18000"/>
+            </a:avLst>
+          </a:prstGeom>
+          <a:solidFill>
+            <a:srgbClr val="F0FDF4"/>
+          </a:solidFill>
+          <a:ln w="9525">
+            <a:solidFill>
+              <a:srgbClr val="BBF7D0"/>
+            </a:solidFill>
+          </a:ln>
+          <a:effectLst/>
+        </p:spPr>
+        <p:style>
+          <a:lnRef idx="1">
+            <a:schemeClr val="accent1"/>
+          </a:lnRef>
+          <a:fillRef idx="3">
+            <a:schemeClr val="accent1"/>
+          </a:fillRef>
+          <a:effectRef idx="2">
+            <a:schemeClr val="accent1"/>
+          </a:effectRef>
+          <a:fontRef idx="minor">
+            <a:schemeClr val="lt1"/>
+          </a:fontRef>
+        </p:style>
+        <p:txBody>
+          <a:bodyPr rtlCol="0" anchor="ctr"/>
+          <a:lstStyle/>
+          <a:p>
+            <a:pPr algn="ctr"/>
+          </a:p>
+        </p:txBody>
+      </p:sp>
+      <p:sp>
+        <p:nvSpPr>
+          <p:cNvPr id="51" name="TextBox 50"/>
+          <p:cNvSpPr txBox="1"/>
+          <p:nvPr/>
+        </p:nvSpPr>
+        <p:spPr>
+          <a:xfrm>
+            <a:off x="6172200" y="5303520"/>
+            <a:ext cx="3886200" cy="630936"/>
+          </a:xfrm>
+          <a:prstGeom prst="rect">
+            <a:avLst/>
+          </a:prstGeom>
+          <a:noFill/>
+        </p:spPr>
+        <p:txBody>
+          <a:bodyPr wrap="square" tIns="18288" bIns="18288" anchor="ctr">
+            <a:spAutoFit/>
+          </a:bodyPr>
+          <a:lstStyle/>
+          <a:p>
+            <a:pPr algn="l"/>
+            <a:r>
+              <a:rPr sz="1000" b="0">
+                <a:solidFill>
+                  <a:srgbClr val="14532D"/>
+                </a:solidFill>
+                <a:latin typeface="Calibri"/>
+              </a:rPr>
+              <a:t>Pipeline INNER JOINs daily_usage_logs to contracts on date range. Out-of-scope rows excluded from CR/UM.</a:t>
+            </a:r>
+          </a:p>
+        </p:txBody>
+      </p:sp>
+      <p:sp>
+        <p:nvSpPr>
+          <p:cNvPr id="52" name="Rounded Rectangle 51"/>
+          <p:cNvSpPr/>
+          <p:nvPr/>
+        </p:nvSpPr>
+        <p:spPr>
+          <a:xfrm>
+            <a:off x="10195560" y="5349240"/>
+            <a:ext cx="1371600" cy="329184"/>
+          </a:xfrm>
+          <a:prstGeom prst="roundRect">
+            <a:avLst>
+              <a:gd name="adj" fmla="val 30000"/>
+            </a:avLst>
+          </a:prstGeom>
+          <a:solidFill>
+            <a:srgbClr val="D97706"/>
+          </a:solidFill>
+          <a:ln>
+            <a:noFill/>
+          </a:ln>
+          <a:effectLst/>
+        </p:spPr>
+        <p:style>
+          <a:lnRef idx="1">
+            <a:schemeClr val="accent1"/>
+          </a:lnRef>
+          <a:fillRef idx="3">
+            <a:schemeClr val="accent1"/>
+          </a:fillRef>
+          <a:effectRef idx="2">
+            <a:schemeClr val="accent1"/>
+          </a:effectRef>
+          <a:fontRef idx="minor">
+            <a:schemeClr val="lt1"/>
+          </a:fontRef>
+        </p:style>
+        <p:txBody>
+          <a:bodyPr rtlCol="0" anchor="ctr"/>
+          <a:lstStyle/>
+          <a:p>
+            <a:pPr algn="ctr"/>
+          </a:p>
+        </p:txBody>
+      </p:sp>
+      <p:sp>
+        <p:nvSpPr>
+          <p:cNvPr id="53" name="TextBox 52"/>
+          <p:cNvSpPr txBox="1"/>
+          <p:nvPr/>
+        </p:nvSpPr>
+        <p:spPr>
+          <a:xfrm>
+            <a:off x="10195560" y="5349240"/>
+            <a:ext cx="1371600" cy="329184"/>
+          </a:xfrm>
+          <a:prstGeom prst="rect">
+            <a:avLst/>
+          </a:prstGeom>
+          <a:noFill/>
+        </p:spPr>
+        <p:txBody>
+          <a:bodyPr wrap="square" lIns="0" rIns="0" tIns="18288" bIns="18288" anchor="ctr">
+            <a:spAutoFit/>
+          </a:bodyPr>
+          <a:lstStyle/>
+          <a:p>
+            <a:pPr algn="ctr"/>
+            <a:r>
+              <a:rPr sz="900" b="1">
+                <a:solidFill>
+                  <a:srgbClr val="FFFFFF"/>
+                </a:solidFill>
+                <a:latin typeface="Calibri"/>
+              </a:rPr>
+              <a:t>QUARANTINED</a:t>
+            </a:r>
+          </a:p>
+        </p:txBody>
+      </p:sp>
+      <p:sp>
+        <p:nvSpPr>
+          <p:cNvPr id="54" name="TextBox 53"/>
+          <p:cNvSpPr txBox="1"/>
+          <p:nvPr/>
+        </p:nvSpPr>
+        <p:spPr>
+          <a:xfrm>
+            <a:off x="10195560" y="5715000"/>
+            <a:ext cx="1371600" cy="219456"/>
+          </a:xfrm>
+          <a:prstGeom prst="rect">
+            <a:avLst/>
+          </a:prstGeom>
+          <a:noFill/>
+        </p:spPr>
+        <p:txBody>
+          <a:bodyPr wrap="square" lIns="0" rIns="0" tIns="18288" bIns="18288" anchor="ctr">
+            <a:spAutoFit/>
+          </a:bodyPr>
+          <a:lstStyle/>
+          <a:p>
+            <a:pPr algn="ctr"/>
+            <a:r>
+              <a:rPr sz="900" b="1">
+                <a:solidFill>
+                  <a:srgbClr val="475569"/>
+                </a:solidFill>
+                <a:latin typeface="Calibri"/>
+              </a:rPr>
+              <a:t>DQ layer</a:t>
+            </a:r>
+          </a:p>
+        </p:txBody>
+      </p:sp>
+      <p:sp>
+        <p:nvSpPr>
+          <p:cNvPr id="55" name="Rounded Rectangle 54"/>
+          <p:cNvSpPr/>
+          <p:nvPr/>
+        </p:nvSpPr>
+        <p:spPr>
+          <a:xfrm>
+            <a:off x="457200" y="6126479"/>
+            <a:ext cx="11247120" cy="502920"/>
+          </a:xfrm>
+          <a:prstGeom prst="roundRect">
+            <a:avLst>
+              <a:gd name="adj" fmla="val 10000"/>
+            </a:avLst>
+          </a:prstGeom>
+          <a:solidFill>
+            <a:srgbClr val="FFEDD5"/>
+          </a:solidFill>
+          <a:ln w="12700">
+            <a:solidFill>
+              <a:srgbClr val="FDBA74"/>
+            </a:solidFill>
+          </a:ln>
+          <a:effectLst/>
+        </p:spPr>
+        <p:style>
+          <a:lnRef idx="1">
+            <a:schemeClr val="accent1"/>
+          </a:lnRef>
+          <a:fillRef idx="3">
+            <a:schemeClr val="accent1"/>
+          </a:fillRef>
+          <a:effectRef idx="2">
+            <a:schemeClr val="accent1"/>
+          </a:effectRef>
+          <a:fontRef idx="minor">
+            <a:schemeClr val="lt1"/>
+          </a:fontRef>
+        </p:style>
+        <p:txBody>
+          <a:bodyPr rtlCol="0" anchor="ctr"/>
+          <a:lstStyle/>
+          <a:p>
+            <a:pPr algn="ctr"/>
+          </a:p>
+        </p:txBody>
+      </p:sp>
+      <p:sp>
+        <p:nvSpPr>
+          <p:cNvPr id="56" name="TextBox 55"/>
+          <p:cNvSpPr txBox="1"/>
+          <p:nvPr/>
+        </p:nvSpPr>
+        <p:spPr>
+          <a:xfrm>
+            <a:off x="457200" y="6126479"/>
+            <a:ext cx="11247120" cy="502920"/>
+          </a:xfrm>
+          <a:prstGeom prst="rect">
+            <a:avLst/>
+          </a:prstGeom>
+          <a:noFill/>
+        </p:spPr>
+        <p:txBody>
+          <a:bodyPr wrap="square" tIns="18288" bIns="18288" anchor="ctr">
+            <a:spAutoFit/>
+          </a:bodyPr>
+          <a:lstStyle/>
+          <a:p>
+            <a:pPr algn="ctr"/>
+            <a:r>
+              <a:rPr sz="1200" b="1">
+                <a:solidFill>
+                  <a:srgbClr val="78350F"/>
+                </a:solidFill>
+                <a:latin typeface="Calibri"/>
+              </a:rPr>
+              <a:t>3 of 5 edge cases caught by structural pillar design  ·  1 by pipeline logic  ·  1 by data-quality layer.  Different problems, answered at the right altitude.</a:t>
+            </a:r>
+          </a:p>
+        </p:txBody>
+      </p:sp>
+      <p:sp>
+        <p:nvSpPr>
+          <p:cNvPr id="57" name="TextBox 56"/>
+          <p:cNvSpPr txBox="1"/>
+          <p:nvPr/>
+        </p:nvSpPr>
+        <p:spPr>
+          <a:xfrm>
+            <a:off x="365760" y="6492240"/>
+            <a:ext cx="5486400" cy="274320"/>
+          </a:xfrm>
+          <a:prstGeom prst="rect">
+            <a:avLst/>
+          </a:prstGeom>
+          <a:noFill/>
+        </p:spPr>
+        <p:txBody>
+          <a:bodyPr wrap="square" lIns="0" rIns="0" tIns="18288" bIns="18288" anchor="ctr">
+            <a:spAutoFit/>
+          </a:bodyPr>
+          <a:lstStyle/>
+          <a:p>
+            <a:pPr algn="l"/>
+            <a:r>
+              <a:rPr sz="900" b="0">
+                <a:solidFill>
+                  <a:srgbClr val="94A3B8"/>
+                </a:solidFill>
+                <a:latin typeface="Calibri"/>
+              </a:rPr>
+              <a:t>GCS North Star · AVRI Proposal · Rami Ibrahimi</a:t>
+            </a:r>
+          </a:p>
+        </p:txBody>
+      </p:sp>
+      <p:sp>
+        <p:nvSpPr>
+          <p:cNvPr id="58" name="TextBox 57"/>
+          <p:cNvSpPr txBox="1"/>
+          <p:nvPr/>
+        </p:nvSpPr>
+        <p:spPr>
+          <a:xfrm>
+            <a:off x="11338560" y="6492240"/>
+            <a:ext cx="640080" cy="274320"/>
+          </a:xfrm>
+          <a:prstGeom prst="rect">
+            <a:avLst/>
+          </a:prstGeom>
+          <a:noFill/>
+        </p:spPr>
+        <p:txBody>
+          <a:bodyPr wrap="square" lIns="0" rIns="0" tIns="18288" bIns="18288" anchor="ctr">
+            <a:spAutoFit/>
+          </a:bodyPr>
+          <a:lstStyle/>
+          <a:p>
+            <a:pPr algn="r"/>
+            <a:r>
+              <a:rPr sz="900" b="0">
+                <a:solidFill>
+                  <a:srgbClr val="94A3B8"/>
+                </a:solidFill>
+                <a:latin typeface="Calibri"/>
+              </a:rPr>
+              <a:t>8 / 8</a:t>
+            </a:r>
           </a:p>
         </p:txBody>
       </p:sp>
